--- a/cisco-workshop-slides.pptx
+++ b/cisco-workshop-slides.pptx
@@ -3327,7 +3327,7 @@
         <p:spPr>
           <a:xfrm>
             <a:off x="0" y="0"/>
-            <a:ext cx="12190320" cy="135720"/>
+            <a:ext cx="12189960" cy="135360"/>
           </a:xfrm>
           <a:prstGeom prst="rect">
             <a:avLst/>
@@ -3368,7 +3368,7 @@
         <p:spPr>
           <a:xfrm>
             <a:off x="457200" y="1920240"/>
-            <a:ext cx="11275920" cy="1796760"/>
+            <a:ext cx="11275560" cy="1796760"/>
           </a:xfrm>
           <a:prstGeom prst="rect">
             <a:avLst/>
@@ -3419,7 +3419,7 @@
         <p:spPr>
           <a:xfrm>
             <a:off x="2536560" y="3658680"/>
-            <a:ext cx="7117200" cy="455400"/>
+            <a:ext cx="7116840" cy="455400"/>
           </a:xfrm>
           <a:prstGeom prst="rect">
             <a:avLst/>
@@ -3470,7 +3470,7 @@
         <p:spPr>
           <a:xfrm>
             <a:off x="4686480" y="4663440"/>
-            <a:ext cx="2816640" cy="363960"/>
+            <a:ext cx="2816280" cy="363960"/>
           </a:xfrm>
           <a:prstGeom prst="rect">
             <a:avLst/>
@@ -3558,7 +3558,7 @@
         <p:spPr>
           <a:xfrm>
             <a:off x="2440440" y="365760"/>
-            <a:ext cx="7309440" cy="638280"/>
+            <a:ext cx="7309080" cy="638280"/>
           </a:xfrm>
           <a:prstGeom prst="rect">
             <a:avLst/>
@@ -3609,7 +3609,7 @@
         <p:spPr>
           <a:xfrm>
             <a:off x="457200" y="1234440"/>
-            <a:ext cx="2284560" cy="53280"/>
+            <a:ext cx="2284200" cy="52920"/>
           </a:xfrm>
           <a:prstGeom prst="rect">
             <a:avLst/>
@@ -3650,7 +3650,7 @@
         <p:spPr>
           <a:xfrm>
             <a:off x="457200" y="1645920"/>
-            <a:ext cx="5302080" cy="4570560"/>
+            <a:ext cx="5301720" cy="4570200"/>
           </a:xfrm>
           <a:prstGeom prst="roundRect">
             <a:avLst>
@@ -3693,7 +3693,7 @@
         <p:spPr>
           <a:xfrm>
             <a:off x="1335600" y="1920240"/>
-            <a:ext cx="3544920" cy="394560"/>
+            <a:ext cx="3544560" cy="394560"/>
           </a:xfrm>
           <a:prstGeom prst="rect">
             <a:avLst/>
@@ -3744,7 +3744,7 @@
         <p:spPr>
           <a:xfrm>
             <a:off x="731520" y="2560320"/>
-            <a:ext cx="4753440" cy="333000"/>
+            <a:ext cx="4753080" cy="333000"/>
           </a:xfrm>
           <a:prstGeom prst="rect">
             <a:avLst/>
@@ -3805,7 +3805,7 @@
         <p:spPr>
           <a:xfrm>
             <a:off x="731520" y="3383280"/>
-            <a:ext cx="4753440" cy="333000"/>
+            <a:ext cx="4753080" cy="333000"/>
           </a:xfrm>
           <a:prstGeom prst="rect">
             <a:avLst/>
@@ -3866,7 +3866,7 @@
         <p:spPr>
           <a:xfrm>
             <a:off x="731520" y="4206240"/>
-            <a:ext cx="4753440" cy="333000"/>
+            <a:ext cx="4753080" cy="333000"/>
           </a:xfrm>
           <a:prstGeom prst="rect">
             <a:avLst/>
@@ -3927,7 +3927,7 @@
         <p:spPr>
           <a:xfrm>
             <a:off x="731520" y="5029200"/>
-            <a:ext cx="4753440" cy="333000"/>
+            <a:ext cx="4753080" cy="333000"/>
           </a:xfrm>
           <a:prstGeom prst="rect">
             <a:avLst/>
@@ -3988,7 +3988,7 @@
         <p:spPr>
           <a:xfrm>
             <a:off x="6400800" y="1645920"/>
-            <a:ext cx="5302080" cy="4570560"/>
+            <a:ext cx="5301720" cy="4570200"/>
           </a:xfrm>
           <a:prstGeom prst="roundRect">
             <a:avLst>
@@ -4031,7 +4031,7 @@
         <p:spPr>
           <a:xfrm>
             <a:off x="7431480" y="1920240"/>
-            <a:ext cx="3240360" cy="394560"/>
+            <a:ext cx="3240000" cy="394560"/>
           </a:xfrm>
           <a:prstGeom prst="rect">
             <a:avLst/>
@@ -4082,7 +4082,7 @@
         <p:spPr>
           <a:xfrm>
             <a:off x="6675120" y="2560320"/>
-            <a:ext cx="4753440" cy="333000"/>
+            <a:ext cx="4753080" cy="333000"/>
           </a:xfrm>
           <a:prstGeom prst="rect">
             <a:avLst/>
@@ -4143,7 +4143,7 @@
         <p:spPr>
           <a:xfrm>
             <a:off x="6675120" y="3383280"/>
-            <a:ext cx="4753440" cy="333000"/>
+            <a:ext cx="4753080" cy="333000"/>
           </a:xfrm>
           <a:prstGeom prst="rect">
             <a:avLst/>
@@ -4204,7 +4204,7 @@
         <p:spPr>
           <a:xfrm>
             <a:off x="6675120" y="4206240"/>
-            <a:ext cx="4753440" cy="333000"/>
+            <a:ext cx="4753080" cy="333000"/>
           </a:xfrm>
           <a:prstGeom prst="rect">
             <a:avLst/>
@@ -4265,7 +4265,7 @@
         <p:spPr>
           <a:xfrm>
             <a:off x="6675120" y="5029200"/>
-            <a:ext cx="4753440" cy="333000"/>
+            <a:ext cx="4753080" cy="333000"/>
           </a:xfrm>
           <a:prstGeom prst="rect">
             <a:avLst/>
@@ -4363,7 +4363,7 @@
         <p:spPr>
           <a:xfrm>
             <a:off x="3486240" y="1481760"/>
-            <a:ext cx="5262480" cy="638280"/>
+            <a:ext cx="5262120" cy="638280"/>
           </a:xfrm>
           <a:prstGeom prst="rect">
             <a:avLst/>
@@ -4414,7 +4414,7 @@
         <p:spPr>
           <a:xfrm>
             <a:off x="2377440" y="2396160"/>
-            <a:ext cx="7480080" cy="1308600"/>
+            <a:ext cx="7479720" cy="1308600"/>
           </a:xfrm>
           <a:prstGeom prst="rect">
             <a:avLst/>
@@ -4465,7 +4465,7 @@
         <p:spPr>
           <a:xfrm>
             <a:off x="2660760" y="4042080"/>
-            <a:ext cx="6913080" cy="455400"/>
+            <a:ext cx="6912720" cy="455400"/>
           </a:xfrm>
           <a:prstGeom prst="rect">
             <a:avLst/>
@@ -4516,7 +4516,7 @@
         <p:spPr>
           <a:xfrm>
             <a:off x="5051520" y="5322240"/>
-            <a:ext cx="2131920" cy="71640"/>
+            <a:ext cx="2131560" cy="71280"/>
           </a:xfrm>
           <a:prstGeom prst="rect">
             <a:avLst/>
@@ -4594,7 +4594,7 @@
         <p:spPr>
           <a:xfrm>
             <a:off x="3814920" y="457200"/>
-            <a:ext cx="4560120" cy="699120"/>
+            <a:ext cx="4559760" cy="699120"/>
           </a:xfrm>
           <a:prstGeom prst="rect">
             <a:avLst/>
@@ -4645,7 +4645,7 @@
         <p:spPr>
           <a:xfrm>
             <a:off x="868680" y="1965960"/>
-            <a:ext cx="3839040" cy="3656160"/>
+            <a:ext cx="3838680" cy="3655800"/>
           </a:xfrm>
           <a:prstGeom prst="roundRect">
             <a:avLst>
@@ -4688,7 +4688,7 @@
         <p:spPr>
           <a:xfrm>
             <a:off x="731520" y="1828800"/>
-            <a:ext cx="3839040" cy="3656160"/>
+            <a:ext cx="3838680" cy="3655800"/>
           </a:xfrm>
           <a:prstGeom prst="roundRect">
             <a:avLst>
@@ -4731,7 +4731,7 @@
         <p:spPr>
           <a:xfrm>
             <a:off x="1005840" y="2103120"/>
-            <a:ext cx="730080" cy="108360"/>
+            <a:ext cx="729720" cy="108000"/>
           </a:xfrm>
           <a:prstGeom prst="rect">
             <a:avLst/>
@@ -4772,7 +4772,7 @@
         <p:spPr>
           <a:xfrm>
             <a:off x="1100880" y="2377440"/>
-            <a:ext cx="722520" cy="577080"/>
+            <a:ext cx="722160" cy="577080"/>
           </a:xfrm>
           <a:prstGeom prst="rect">
             <a:avLst/>
@@ -4823,7 +4823,7 @@
         <p:spPr>
           <a:xfrm>
             <a:off x="1005840" y="3200400"/>
-            <a:ext cx="3290400" cy="394560"/>
+            <a:ext cx="3290040" cy="394560"/>
           </a:xfrm>
           <a:prstGeom prst="rect">
             <a:avLst/>
@@ -4874,7 +4874,7 @@
         <p:spPr>
           <a:xfrm>
             <a:off x="1005840" y="4206240"/>
-            <a:ext cx="3290400" cy="819720"/>
+            <a:ext cx="3290040" cy="819720"/>
           </a:xfrm>
           <a:prstGeom prst="rect">
             <a:avLst/>
@@ -4945,7 +4945,7 @@
         <p:spPr>
           <a:xfrm>
             <a:off x="4251960" y="2331720"/>
-            <a:ext cx="3839040" cy="3656160"/>
+            <a:ext cx="3838680" cy="3655800"/>
           </a:xfrm>
           <a:prstGeom prst="roundRect">
             <a:avLst>
@@ -4988,7 +4988,7 @@
         <p:spPr>
           <a:xfrm>
             <a:off x="4114800" y="2194560"/>
-            <a:ext cx="3839040" cy="3656160"/>
+            <a:ext cx="3838680" cy="3655800"/>
           </a:xfrm>
           <a:prstGeom prst="roundRect">
             <a:avLst>
@@ -5031,7 +5031,7 @@
         <p:spPr>
           <a:xfrm>
             <a:off x="4389120" y="2468880"/>
-            <a:ext cx="730080" cy="108360"/>
+            <a:ext cx="729720" cy="108000"/>
           </a:xfrm>
           <a:prstGeom prst="rect">
             <a:avLst/>
@@ -5072,7 +5072,7 @@
         <p:spPr>
           <a:xfrm>
             <a:off x="4484160" y="2743200"/>
-            <a:ext cx="722520" cy="577080"/>
+            <a:ext cx="722160" cy="577080"/>
           </a:xfrm>
           <a:prstGeom prst="rect">
             <a:avLst/>
@@ -5123,7 +5123,7 @@
         <p:spPr>
           <a:xfrm>
             <a:off x="4389120" y="3566160"/>
-            <a:ext cx="3290400" cy="394560"/>
+            <a:ext cx="3290040" cy="394560"/>
           </a:xfrm>
           <a:prstGeom prst="rect">
             <a:avLst/>
@@ -5174,7 +5174,7 @@
         <p:spPr>
           <a:xfrm>
             <a:off x="4389120" y="4572000"/>
-            <a:ext cx="3290400" cy="576360"/>
+            <a:ext cx="3290040" cy="576360"/>
           </a:xfrm>
           <a:prstGeom prst="rect">
             <a:avLst/>
@@ -5245,7 +5245,7 @@
         <p:spPr>
           <a:xfrm>
             <a:off x="7635240" y="1783080"/>
-            <a:ext cx="3839040" cy="3656160"/>
+            <a:ext cx="3838680" cy="3655800"/>
           </a:xfrm>
           <a:prstGeom prst="roundRect">
             <a:avLst>
@@ -5288,7 +5288,7 @@
         <p:spPr>
           <a:xfrm>
             <a:off x="7498080" y="1645920"/>
-            <a:ext cx="3839040" cy="3656160"/>
+            <a:ext cx="3838680" cy="3655800"/>
           </a:xfrm>
           <a:prstGeom prst="roundRect">
             <a:avLst>
@@ -5331,7 +5331,7 @@
         <p:spPr>
           <a:xfrm>
             <a:off x="7772400" y="1920240"/>
-            <a:ext cx="730080" cy="108360"/>
+            <a:ext cx="729720" cy="108000"/>
           </a:xfrm>
           <a:prstGeom prst="rect">
             <a:avLst/>
@@ -5372,7 +5372,7 @@
         <p:spPr>
           <a:xfrm>
             <a:off x="7867440" y="2194560"/>
-            <a:ext cx="722520" cy="577080"/>
+            <a:ext cx="722160" cy="577080"/>
           </a:xfrm>
           <a:prstGeom prst="rect">
             <a:avLst/>
@@ -5423,7 +5423,7 @@
         <p:spPr>
           <a:xfrm>
             <a:off x="7772400" y="3017520"/>
-            <a:ext cx="3290400" cy="394560"/>
+            <a:ext cx="3290040" cy="394560"/>
           </a:xfrm>
           <a:prstGeom prst="rect">
             <a:avLst/>
@@ -5474,7 +5474,7 @@
         <p:spPr>
           <a:xfrm>
             <a:off x="7772400" y="4023360"/>
-            <a:ext cx="3290400" cy="576360"/>
+            <a:ext cx="3290040" cy="576360"/>
           </a:xfrm>
           <a:prstGeom prst="rect">
             <a:avLst/>
@@ -5562,7 +5562,7 @@
         <p:spPr>
           <a:xfrm>
             <a:off x="0" y="0"/>
-            <a:ext cx="71640" cy="6856560"/>
+            <a:ext cx="71280" cy="6856200"/>
           </a:xfrm>
           <a:prstGeom prst="rect">
             <a:avLst/>
@@ -5603,7 +5603,7 @@
         <p:spPr>
           <a:xfrm>
             <a:off x="1517760" y="457200"/>
-            <a:ext cx="9032760" cy="638280"/>
+            <a:ext cx="9032400" cy="638280"/>
           </a:xfrm>
           <a:prstGeom prst="rect">
             <a:avLst/>
@@ -5654,7 +5654,7 @@
         <p:spPr>
           <a:xfrm>
             <a:off x="548640" y="1371600"/>
-            <a:ext cx="2284560" cy="53280"/>
+            <a:ext cx="2284200" cy="52920"/>
           </a:xfrm>
           <a:prstGeom prst="rect">
             <a:avLst/>
@@ -5695,7 +5695,7 @@
         <p:spPr>
           <a:xfrm>
             <a:off x="548640" y="1828800"/>
-            <a:ext cx="10971360" cy="394560"/>
+            <a:ext cx="10971000" cy="394560"/>
           </a:xfrm>
           <a:prstGeom prst="rect">
             <a:avLst/>
@@ -5746,7 +5746,7 @@
         <p:spPr>
           <a:xfrm>
             <a:off x="548640" y="2560320"/>
-            <a:ext cx="10971360" cy="363960"/>
+            <a:ext cx="10971000" cy="363960"/>
           </a:xfrm>
           <a:prstGeom prst="rect">
             <a:avLst/>
@@ -5797,7 +5797,7 @@
         <p:spPr>
           <a:xfrm>
             <a:off x="548640" y="3108960"/>
-            <a:ext cx="10971360" cy="363960"/>
+            <a:ext cx="10971000" cy="363960"/>
           </a:xfrm>
           <a:prstGeom prst="rect">
             <a:avLst/>
@@ -5848,7 +5848,7 @@
         <p:spPr>
           <a:xfrm>
             <a:off x="548640" y="3657600"/>
-            <a:ext cx="10971360" cy="363960"/>
+            <a:ext cx="10971000" cy="363960"/>
           </a:xfrm>
           <a:prstGeom prst="rect">
             <a:avLst/>
@@ -5899,7 +5899,7 @@
         <p:spPr>
           <a:xfrm>
             <a:off x="548640" y="4480560"/>
-            <a:ext cx="10971360" cy="394560"/>
+            <a:ext cx="10971000" cy="394560"/>
           </a:xfrm>
           <a:prstGeom prst="rect">
             <a:avLst/>
@@ -5950,7 +5950,7 @@
         <p:spPr>
           <a:xfrm>
             <a:off x="548640" y="5212080"/>
-            <a:ext cx="10971360" cy="913320"/>
+            <a:ext cx="10971000" cy="912960"/>
           </a:xfrm>
           <a:prstGeom prst="roundRect">
             <a:avLst>
@@ -5993,7 +5993,7 @@
         <p:spPr>
           <a:xfrm>
             <a:off x="823320" y="5487480"/>
-            <a:ext cx="10422720" cy="363960"/>
+            <a:ext cx="10422360" cy="363960"/>
           </a:xfrm>
           <a:prstGeom prst="rect">
             <a:avLst/>
@@ -6081,7 +6081,7 @@
         <p:spPr>
           <a:xfrm>
             <a:off x="0" y="0"/>
-            <a:ext cx="4113360" cy="6856560"/>
+            <a:ext cx="4113000" cy="6856200"/>
           </a:xfrm>
           <a:prstGeom prst="rect">
             <a:avLst/>
@@ -6122,7 +6122,7 @@
         <p:spPr>
           <a:xfrm>
             <a:off x="950040" y="2560320"/>
-            <a:ext cx="2212920" cy="1918080"/>
+            <a:ext cx="2212560" cy="1918080"/>
           </a:xfrm>
           <a:prstGeom prst="rect">
             <a:avLst/>
@@ -6173,7 +6173,7 @@
         <p:spPr>
           <a:xfrm>
             <a:off x="4114800" y="1371600"/>
-            <a:ext cx="71640" cy="4113360"/>
+            <a:ext cx="71280" cy="4113000"/>
           </a:xfrm>
           <a:prstGeom prst="rect">
             <a:avLst/>
@@ -6214,7 +6214,7 @@
         <p:spPr>
           <a:xfrm>
             <a:off x="4754880" y="2377440"/>
-            <a:ext cx="6856560" cy="759960"/>
+            <a:ext cx="6856200" cy="759960"/>
           </a:xfrm>
           <a:prstGeom prst="rect">
             <a:avLst/>
@@ -6265,7 +6265,7 @@
         <p:spPr>
           <a:xfrm>
             <a:off x="4754880" y="3840480"/>
-            <a:ext cx="6856560" cy="394560"/>
+            <a:ext cx="6856200" cy="394560"/>
           </a:xfrm>
           <a:prstGeom prst="rect">
             <a:avLst/>
@@ -6353,7 +6353,7 @@
         <p:spPr>
           <a:xfrm>
             <a:off x="1831680" y="457200"/>
-            <a:ext cx="8526960" cy="699120"/>
+            <a:ext cx="8526600" cy="699120"/>
           </a:xfrm>
           <a:prstGeom prst="rect">
             <a:avLst/>
@@ -6404,7 +6404,7 @@
         <p:spPr>
           <a:xfrm>
             <a:off x="868680" y="1965960"/>
-            <a:ext cx="3839040" cy="3656160"/>
+            <a:ext cx="3838680" cy="3655800"/>
           </a:xfrm>
           <a:prstGeom prst="roundRect">
             <a:avLst>
@@ -6447,7 +6447,7 @@
         <p:spPr>
           <a:xfrm>
             <a:off x="731520" y="1828800"/>
-            <a:ext cx="3839040" cy="3656160"/>
+            <a:ext cx="3838680" cy="3655800"/>
           </a:xfrm>
           <a:prstGeom prst="roundRect">
             <a:avLst>
@@ -6490,7 +6490,7 @@
         <p:spPr>
           <a:xfrm>
             <a:off x="1005840" y="2103120"/>
-            <a:ext cx="730080" cy="108360"/>
+            <a:ext cx="729720" cy="108000"/>
           </a:xfrm>
           <a:prstGeom prst="rect">
             <a:avLst/>
@@ -6531,7 +6531,7 @@
         <p:spPr>
           <a:xfrm>
             <a:off x="1100880" y="2377440"/>
-            <a:ext cx="722520" cy="577080"/>
+            <a:ext cx="722160" cy="577080"/>
           </a:xfrm>
           <a:prstGeom prst="rect">
             <a:avLst/>
@@ -6582,7 +6582,7 @@
         <p:spPr>
           <a:xfrm>
             <a:off x="1005840" y="3200400"/>
-            <a:ext cx="3290400" cy="394560"/>
+            <a:ext cx="3290040" cy="394560"/>
           </a:xfrm>
           <a:prstGeom prst="rect">
             <a:avLst/>
@@ -6633,7 +6633,7 @@
         <p:spPr>
           <a:xfrm>
             <a:off x="1005840" y="4206240"/>
-            <a:ext cx="3290400" cy="819720"/>
+            <a:ext cx="3290040" cy="819720"/>
           </a:xfrm>
           <a:prstGeom prst="rect">
             <a:avLst/>
@@ -6704,7 +6704,7 @@
         <p:spPr>
           <a:xfrm>
             <a:off x="4251960" y="2331720"/>
-            <a:ext cx="3839040" cy="3656160"/>
+            <a:ext cx="3838680" cy="3655800"/>
           </a:xfrm>
           <a:prstGeom prst="roundRect">
             <a:avLst>
@@ -6747,7 +6747,7 @@
         <p:spPr>
           <a:xfrm>
             <a:off x="4114800" y="2194560"/>
-            <a:ext cx="3839040" cy="3656160"/>
+            <a:ext cx="3838680" cy="3655800"/>
           </a:xfrm>
           <a:prstGeom prst="roundRect">
             <a:avLst>
@@ -6790,7 +6790,7 @@
         <p:spPr>
           <a:xfrm>
             <a:off x="4389120" y="2468880"/>
-            <a:ext cx="730080" cy="108360"/>
+            <a:ext cx="729720" cy="108000"/>
           </a:xfrm>
           <a:prstGeom prst="rect">
             <a:avLst/>
@@ -6831,7 +6831,7 @@
         <p:spPr>
           <a:xfrm>
             <a:off x="4484160" y="2743200"/>
-            <a:ext cx="722520" cy="577080"/>
+            <a:ext cx="722160" cy="577080"/>
           </a:xfrm>
           <a:prstGeom prst="rect">
             <a:avLst/>
@@ -6882,7 +6882,7 @@
         <p:spPr>
           <a:xfrm>
             <a:off x="4389120" y="3566160"/>
-            <a:ext cx="3290400" cy="394560"/>
+            <a:ext cx="3290040" cy="394560"/>
           </a:xfrm>
           <a:prstGeom prst="rect">
             <a:avLst/>
@@ -6933,7 +6933,7 @@
         <p:spPr>
           <a:xfrm>
             <a:off x="4389120" y="4572000"/>
-            <a:ext cx="3290400" cy="576360"/>
+            <a:ext cx="3290040" cy="576360"/>
           </a:xfrm>
           <a:prstGeom prst="rect">
             <a:avLst/>
@@ -7004,7 +7004,7 @@
         <p:spPr>
           <a:xfrm>
             <a:off x="7635240" y="1783080"/>
-            <a:ext cx="3839040" cy="3656160"/>
+            <a:ext cx="3838680" cy="3655800"/>
           </a:xfrm>
           <a:prstGeom prst="roundRect">
             <a:avLst>
@@ -7047,7 +7047,7 @@
         <p:spPr>
           <a:xfrm>
             <a:off x="7498080" y="1645920"/>
-            <a:ext cx="3839040" cy="3656160"/>
+            <a:ext cx="3838680" cy="3655800"/>
           </a:xfrm>
           <a:prstGeom prst="roundRect">
             <a:avLst>
@@ -7090,7 +7090,7 @@
         <p:spPr>
           <a:xfrm>
             <a:off x="7772400" y="1920240"/>
-            <a:ext cx="730080" cy="108360"/>
+            <a:ext cx="729720" cy="108000"/>
           </a:xfrm>
           <a:prstGeom prst="rect">
             <a:avLst/>
@@ -7131,7 +7131,7 @@
         <p:spPr>
           <a:xfrm>
             <a:off x="7867440" y="2194560"/>
-            <a:ext cx="722520" cy="577080"/>
+            <a:ext cx="722160" cy="577080"/>
           </a:xfrm>
           <a:prstGeom prst="rect">
             <a:avLst/>
@@ -7182,7 +7182,7 @@
         <p:spPr>
           <a:xfrm>
             <a:off x="7772400" y="3017520"/>
-            <a:ext cx="3290400" cy="394560"/>
+            <a:ext cx="3290040" cy="394560"/>
           </a:xfrm>
           <a:prstGeom prst="rect">
             <a:avLst/>
@@ -7233,7 +7233,7 @@
         <p:spPr>
           <a:xfrm>
             <a:off x="7772400" y="4023360"/>
-            <a:ext cx="3290400" cy="576360"/>
+            <a:ext cx="3290040" cy="576360"/>
           </a:xfrm>
           <a:prstGeom prst="rect">
             <a:avLst/>
@@ -7321,7 +7321,7 @@
         <p:spPr>
           <a:xfrm>
             <a:off x="2928960" y="365760"/>
-            <a:ext cx="6332400" cy="638280"/>
+            <a:ext cx="6332040" cy="638280"/>
           </a:xfrm>
           <a:prstGeom prst="rect">
             <a:avLst/>
@@ -7372,7 +7372,7 @@
         <p:spPr>
           <a:xfrm>
             <a:off x="457200" y="1234440"/>
-            <a:ext cx="2284560" cy="53280"/>
+            <a:ext cx="2284200" cy="52920"/>
           </a:xfrm>
           <a:prstGeom prst="rect">
             <a:avLst/>
@@ -7413,7 +7413,7 @@
         <p:spPr>
           <a:xfrm>
             <a:off x="457200" y="1645920"/>
-            <a:ext cx="5302080" cy="4753440"/>
+            <a:ext cx="5301720" cy="4753080"/>
           </a:xfrm>
           <a:prstGeom prst="roundRect">
             <a:avLst>
@@ -7456,7 +7456,7 @@
         <p:spPr>
           <a:xfrm>
             <a:off x="457200" y="1645920"/>
-            <a:ext cx="5302080" cy="90000"/>
+            <a:ext cx="5301720" cy="89640"/>
           </a:xfrm>
           <a:prstGeom prst="rect">
             <a:avLst/>
@@ -7497,7 +7497,7 @@
         <p:spPr>
           <a:xfrm>
             <a:off x="1296720" y="1920240"/>
-            <a:ext cx="3622680" cy="394560"/>
+            <a:ext cx="3622320" cy="394560"/>
           </a:xfrm>
           <a:prstGeom prst="rect">
             <a:avLst/>
@@ -7548,7 +7548,7 @@
         <p:spPr>
           <a:xfrm>
             <a:off x="731520" y="2560320"/>
-            <a:ext cx="4753440" cy="333000"/>
+            <a:ext cx="4753080" cy="333000"/>
           </a:xfrm>
           <a:prstGeom prst="rect">
             <a:avLst/>
@@ -7609,7 +7609,7 @@
         <p:spPr>
           <a:xfrm>
             <a:off x="731520" y="3246120"/>
-            <a:ext cx="4753440" cy="333000"/>
+            <a:ext cx="4753080" cy="333000"/>
           </a:xfrm>
           <a:prstGeom prst="rect">
             <a:avLst/>
@@ -7670,7 +7670,7 @@
         <p:spPr>
           <a:xfrm>
             <a:off x="731520" y="3931920"/>
-            <a:ext cx="4753440" cy="333000"/>
+            <a:ext cx="4753080" cy="333000"/>
           </a:xfrm>
           <a:prstGeom prst="rect">
             <a:avLst/>
@@ -7731,7 +7731,7 @@
         <p:spPr>
           <a:xfrm>
             <a:off x="731520" y="4617720"/>
-            <a:ext cx="4753440" cy="333000"/>
+            <a:ext cx="4753080" cy="333000"/>
           </a:xfrm>
           <a:prstGeom prst="rect">
             <a:avLst/>
@@ -7792,7 +7792,7 @@
         <p:spPr>
           <a:xfrm>
             <a:off x="731520" y="5303520"/>
-            <a:ext cx="4753440" cy="333000"/>
+            <a:ext cx="4753080" cy="333000"/>
           </a:xfrm>
           <a:prstGeom prst="rect">
             <a:avLst/>
@@ -7836,7 +7836,7 @@
                 <a:latin typeface="Inter"/>
                 <a:ea typeface="DejaVu Sans"/>
               </a:rPr>
-              <a:t>Create commands as you go</a:t>
+              <a:t>Create skills/commands as you go</a:t>
             </a:r>
             <a:endParaRPr b="0" lang="en-US" sz="1600" spc="-1" strike="noStrike">
               <a:latin typeface="Arial"/>
@@ -7853,7 +7853,7 @@
         <p:spPr>
           <a:xfrm>
             <a:off x="6400800" y="1645920"/>
-            <a:ext cx="5302080" cy="4753440"/>
+            <a:ext cx="5301720" cy="4753080"/>
           </a:xfrm>
           <a:prstGeom prst="roundRect">
             <a:avLst>
@@ -7896,7 +7896,7 @@
         <p:spPr>
           <a:xfrm>
             <a:off x="6400800" y="1645920"/>
-            <a:ext cx="5302080" cy="90000"/>
+            <a:ext cx="5301720" cy="89640"/>
           </a:xfrm>
           <a:prstGeom prst="rect">
             <a:avLst/>
@@ -7937,7 +7937,7 @@
         <p:spPr>
           <a:xfrm>
             <a:off x="7505640" y="1920240"/>
-            <a:ext cx="3092400" cy="394560"/>
+            <a:ext cx="3092040" cy="394560"/>
           </a:xfrm>
           <a:prstGeom prst="rect">
             <a:avLst/>
@@ -7988,7 +7988,7 @@
         <p:spPr>
           <a:xfrm>
             <a:off x="6675120" y="2560320"/>
-            <a:ext cx="4753440" cy="333000"/>
+            <a:ext cx="4753080" cy="333000"/>
           </a:xfrm>
           <a:prstGeom prst="rect">
             <a:avLst/>
@@ -8049,7 +8049,7 @@
         <p:spPr>
           <a:xfrm>
             <a:off x="6675120" y="3246120"/>
-            <a:ext cx="4753440" cy="333000"/>
+            <a:ext cx="4753080" cy="333000"/>
           </a:xfrm>
           <a:prstGeom prst="rect">
             <a:avLst/>
@@ -8110,7 +8110,7 @@
         <p:spPr>
           <a:xfrm>
             <a:off x="6675120" y="3931920"/>
-            <a:ext cx="4753440" cy="333000"/>
+            <a:ext cx="4753080" cy="333000"/>
           </a:xfrm>
           <a:prstGeom prst="rect">
             <a:avLst/>
@@ -8171,7 +8171,7 @@
         <p:spPr>
           <a:xfrm>
             <a:off x="6675120" y="4617720"/>
-            <a:ext cx="4753440" cy="333000"/>
+            <a:ext cx="4753080" cy="333000"/>
           </a:xfrm>
           <a:prstGeom prst="rect">
             <a:avLst/>
@@ -8215,7 +8215,7 @@
                 <a:latin typeface="Inter"/>
                 <a:ea typeface="DejaVu Sans"/>
               </a:rPr>
-              <a:t>Create commands for common tasks</a:t>
+              <a:t>Create skills/commands for common tasks</a:t>
             </a:r>
             <a:endParaRPr b="0" lang="en-US" sz="1600" spc="-1" strike="noStrike">
               <a:latin typeface="Arial"/>
@@ -8232,7 +8232,7 @@
         <p:spPr>
           <a:xfrm>
             <a:off x="6675120" y="5303520"/>
-            <a:ext cx="4753440" cy="333000"/>
+            <a:ext cx="4753080" cy="333000"/>
           </a:xfrm>
           <a:prstGeom prst="rect">
             <a:avLst/>
@@ -8330,7 +8330,7 @@
         <p:spPr>
           <a:xfrm>
             <a:off x="0" y="0"/>
-            <a:ext cx="4113360" cy="6856560"/>
+            <a:ext cx="4113000" cy="6856200"/>
           </a:xfrm>
           <a:prstGeom prst="rect">
             <a:avLst/>
@@ -8371,7 +8371,7 @@
         <p:spPr>
           <a:xfrm>
             <a:off x="767160" y="2560320"/>
-            <a:ext cx="2578680" cy="1613520"/>
+            <a:ext cx="2578320" cy="1613520"/>
           </a:xfrm>
           <a:prstGeom prst="rect">
             <a:avLst/>
@@ -8422,7 +8422,7 @@
         <p:spPr>
           <a:xfrm>
             <a:off x="4114800" y="1371600"/>
-            <a:ext cx="71640" cy="4113360"/>
+            <a:ext cx="71280" cy="4113000"/>
           </a:xfrm>
           <a:prstGeom prst="rect">
             <a:avLst/>
@@ -8463,7 +8463,7 @@
         <p:spPr>
           <a:xfrm>
             <a:off x="4754880" y="2194560"/>
-            <a:ext cx="6856560" cy="759960"/>
+            <a:ext cx="6856200" cy="759960"/>
           </a:xfrm>
           <a:prstGeom prst="rect">
             <a:avLst/>
@@ -8514,7 +8514,7 @@
         <p:spPr>
           <a:xfrm>
             <a:off x="4754880" y="3657600"/>
-            <a:ext cx="6856560" cy="455400"/>
+            <a:ext cx="6856200" cy="455400"/>
           </a:xfrm>
           <a:prstGeom prst="rect">
             <a:avLst/>
@@ -8602,7 +8602,7 @@
         <p:spPr>
           <a:xfrm>
             <a:off x="2795400" y="457200"/>
-            <a:ext cx="6599160" cy="699120"/>
+            <a:ext cx="6598800" cy="699120"/>
           </a:xfrm>
           <a:prstGeom prst="rect">
             <a:avLst/>
@@ -8653,7 +8653,7 @@
         <p:spPr>
           <a:xfrm>
             <a:off x="868680" y="1965960"/>
-            <a:ext cx="3839040" cy="3656160"/>
+            <a:ext cx="3838680" cy="3655800"/>
           </a:xfrm>
           <a:prstGeom prst="roundRect">
             <a:avLst>
@@ -8696,7 +8696,7 @@
         <p:spPr>
           <a:xfrm>
             <a:off x="731520" y="1828800"/>
-            <a:ext cx="3839040" cy="3656160"/>
+            <a:ext cx="3838680" cy="3655800"/>
           </a:xfrm>
           <a:prstGeom prst="roundRect">
             <a:avLst>
@@ -8739,7 +8739,7 @@
         <p:spPr>
           <a:xfrm>
             <a:off x="1005840" y="2103120"/>
-            <a:ext cx="730080" cy="108360"/>
+            <a:ext cx="729720" cy="108000"/>
           </a:xfrm>
           <a:prstGeom prst="rect">
             <a:avLst/>
@@ -8780,7 +8780,7 @@
         <p:spPr>
           <a:xfrm>
             <a:off x="1100880" y="2377440"/>
-            <a:ext cx="722520" cy="577080"/>
+            <a:ext cx="722160" cy="577080"/>
           </a:xfrm>
           <a:prstGeom prst="rect">
             <a:avLst/>
@@ -8831,7 +8831,7 @@
         <p:spPr>
           <a:xfrm>
             <a:off x="1005840" y="3200400"/>
-            <a:ext cx="3290400" cy="394560"/>
+            <a:ext cx="3290040" cy="394560"/>
           </a:xfrm>
           <a:prstGeom prst="rect">
             <a:avLst/>
@@ -8882,7 +8882,7 @@
         <p:spPr>
           <a:xfrm>
             <a:off x="1005840" y="4206240"/>
-            <a:ext cx="3290400" cy="576360"/>
+            <a:ext cx="3290040" cy="576360"/>
           </a:xfrm>
           <a:prstGeom prst="rect">
             <a:avLst/>
@@ -8933,7 +8933,7 @@
         <p:spPr>
           <a:xfrm>
             <a:off x="4251960" y="2331720"/>
-            <a:ext cx="3839040" cy="3656160"/>
+            <a:ext cx="3838680" cy="3655800"/>
           </a:xfrm>
           <a:prstGeom prst="roundRect">
             <a:avLst>
@@ -8976,7 +8976,7 @@
         <p:spPr>
           <a:xfrm>
             <a:off x="4114800" y="2194560"/>
-            <a:ext cx="3839040" cy="3656160"/>
+            <a:ext cx="3838680" cy="3655800"/>
           </a:xfrm>
           <a:prstGeom prst="roundRect">
             <a:avLst>
@@ -9019,7 +9019,7 @@
         <p:spPr>
           <a:xfrm>
             <a:off x="4389120" y="2468880"/>
-            <a:ext cx="730080" cy="108360"/>
+            <a:ext cx="729720" cy="108000"/>
           </a:xfrm>
           <a:prstGeom prst="rect">
             <a:avLst/>
@@ -9060,7 +9060,7 @@
         <p:spPr>
           <a:xfrm>
             <a:off x="4484160" y="2743200"/>
-            <a:ext cx="722520" cy="577080"/>
+            <a:ext cx="722160" cy="577080"/>
           </a:xfrm>
           <a:prstGeom prst="rect">
             <a:avLst/>
@@ -9111,7 +9111,7 @@
         <p:spPr>
           <a:xfrm>
             <a:off x="4389120" y="3566160"/>
-            <a:ext cx="3290400" cy="394560"/>
+            <a:ext cx="3290040" cy="394560"/>
           </a:xfrm>
           <a:prstGeom prst="rect">
             <a:avLst/>
@@ -9162,7 +9162,7 @@
         <p:spPr>
           <a:xfrm>
             <a:off x="4389120" y="4572000"/>
-            <a:ext cx="3290400" cy="576360"/>
+            <a:ext cx="3290040" cy="576360"/>
           </a:xfrm>
           <a:prstGeom prst="rect">
             <a:avLst/>
@@ -9233,7 +9233,7 @@
         <p:spPr>
           <a:xfrm>
             <a:off x="7635240" y="1783080"/>
-            <a:ext cx="3839040" cy="3656160"/>
+            <a:ext cx="3838680" cy="3655800"/>
           </a:xfrm>
           <a:prstGeom prst="roundRect">
             <a:avLst>
@@ -9276,7 +9276,7 @@
         <p:spPr>
           <a:xfrm>
             <a:off x="7498080" y="1645920"/>
-            <a:ext cx="3839040" cy="3656160"/>
+            <a:ext cx="3838680" cy="3655800"/>
           </a:xfrm>
           <a:prstGeom prst="roundRect">
             <a:avLst>
@@ -9319,7 +9319,7 @@
         <p:spPr>
           <a:xfrm>
             <a:off x="7772400" y="1920240"/>
-            <a:ext cx="730080" cy="108360"/>
+            <a:ext cx="729720" cy="108000"/>
           </a:xfrm>
           <a:prstGeom prst="rect">
             <a:avLst/>
@@ -9360,7 +9360,7 @@
         <p:spPr>
           <a:xfrm>
             <a:off x="7867440" y="2194560"/>
-            <a:ext cx="722520" cy="577080"/>
+            <a:ext cx="722160" cy="577080"/>
           </a:xfrm>
           <a:prstGeom prst="rect">
             <a:avLst/>
@@ -9411,7 +9411,7 @@
         <p:spPr>
           <a:xfrm>
             <a:off x="7772400" y="3017520"/>
-            <a:ext cx="3290400" cy="394560"/>
+            <a:ext cx="3290040" cy="394560"/>
           </a:xfrm>
           <a:prstGeom prst="rect">
             <a:avLst/>
@@ -9462,7 +9462,7 @@
         <p:spPr>
           <a:xfrm>
             <a:off x="7772400" y="4023360"/>
-            <a:ext cx="3290400" cy="819720"/>
+            <a:ext cx="3290040" cy="819720"/>
           </a:xfrm>
           <a:prstGeom prst="rect">
             <a:avLst/>
@@ -9550,7 +9550,7 @@
         <p:spPr>
           <a:xfrm>
             <a:off x="3075120" y="365760"/>
-            <a:ext cx="6039720" cy="638280"/>
+            <a:ext cx="6039360" cy="638280"/>
           </a:xfrm>
           <a:prstGeom prst="rect">
             <a:avLst/>
@@ -9601,7 +9601,7 @@
         <p:spPr>
           <a:xfrm>
             <a:off x="457200" y="1234440"/>
-            <a:ext cx="2284560" cy="53280"/>
+            <a:ext cx="2284200" cy="52920"/>
           </a:xfrm>
           <a:prstGeom prst="rect">
             <a:avLst/>
@@ -9642,7 +9642,7 @@
         <p:spPr>
           <a:xfrm>
             <a:off x="457200" y="1645920"/>
-            <a:ext cx="5302080" cy="4753440"/>
+            <a:ext cx="5301720" cy="4753080"/>
           </a:xfrm>
           <a:prstGeom prst="roundRect">
             <a:avLst>
@@ -9685,7 +9685,7 @@
         <p:spPr>
           <a:xfrm>
             <a:off x="1273320" y="1920240"/>
-            <a:ext cx="3669840" cy="394560"/>
+            <a:ext cx="3669480" cy="394560"/>
           </a:xfrm>
           <a:prstGeom prst="rect">
             <a:avLst/>
@@ -9736,7 +9736,7 @@
         <p:spPr>
           <a:xfrm>
             <a:off x="731520" y="2560320"/>
-            <a:ext cx="4753440" cy="333000"/>
+            <a:ext cx="4753080" cy="333000"/>
           </a:xfrm>
           <a:prstGeom prst="rect">
             <a:avLst/>
@@ -9797,7 +9797,7 @@
         <p:spPr>
           <a:xfrm>
             <a:off x="731520" y="3246120"/>
-            <a:ext cx="4753440" cy="333000"/>
+            <a:ext cx="4753080" cy="333000"/>
           </a:xfrm>
           <a:prstGeom prst="rect">
             <a:avLst/>
@@ -9858,7 +9858,7 @@
         <p:spPr>
           <a:xfrm>
             <a:off x="731520" y="3931920"/>
-            <a:ext cx="4753440" cy="333000"/>
+            <a:ext cx="4753080" cy="333000"/>
           </a:xfrm>
           <a:prstGeom prst="rect">
             <a:avLst/>
@@ -9919,7 +9919,7 @@
         <p:spPr>
           <a:xfrm>
             <a:off x="731520" y="4617720"/>
-            <a:ext cx="4753440" cy="333000"/>
+            <a:ext cx="4753080" cy="333000"/>
           </a:xfrm>
           <a:prstGeom prst="rect">
             <a:avLst/>
@@ -9980,7 +9980,7 @@
         <p:spPr>
           <a:xfrm>
             <a:off x="731520" y="5303520"/>
-            <a:ext cx="4753440" cy="333000"/>
+            <a:ext cx="4753080" cy="333000"/>
           </a:xfrm>
           <a:prstGeom prst="rect">
             <a:avLst/>
@@ -10041,7 +10041,7 @@
         <p:spPr>
           <a:xfrm>
             <a:off x="6400800" y="1645920"/>
-            <a:ext cx="5302080" cy="4753440"/>
+            <a:ext cx="5301720" cy="4753080"/>
           </a:xfrm>
           <a:prstGeom prst="roundRect">
             <a:avLst>
@@ -10084,7 +10084,7 @@
         <p:spPr>
           <a:xfrm>
             <a:off x="7388280" y="1920240"/>
-            <a:ext cx="3327120" cy="394560"/>
+            <a:ext cx="3326760" cy="394560"/>
           </a:xfrm>
           <a:prstGeom prst="rect">
             <a:avLst/>
@@ -10135,7 +10135,7 @@
         <p:spPr>
           <a:xfrm>
             <a:off x="6675120" y="2560320"/>
-            <a:ext cx="4753440" cy="333000"/>
+            <a:ext cx="4753080" cy="333000"/>
           </a:xfrm>
           <a:prstGeom prst="rect">
             <a:avLst/>
@@ -10196,7 +10196,7 @@
         <p:spPr>
           <a:xfrm>
             <a:off x="6675120" y="3246120"/>
-            <a:ext cx="4753440" cy="333000"/>
+            <a:ext cx="4753080" cy="333000"/>
           </a:xfrm>
           <a:prstGeom prst="rect">
             <a:avLst/>
@@ -10257,7 +10257,7 @@
         <p:spPr>
           <a:xfrm>
             <a:off x="6675120" y="3931920"/>
-            <a:ext cx="4753440" cy="333000"/>
+            <a:ext cx="4753080" cy="333000"/>
           </a:xfrm>
           <a:prstGeom prst="rect">
             <a:avLst/>
@@ -10318,7 +10318,7 @@
         <p:spPr>
           <a:xfrm>
             <a:off x="6675120" y="4617720"/>
-            <a:ext cx="4753440" cy="333000"/>
+            <a:ext cx="4753080" cy="333000"/>
           </a:xfrm>
           <a:prstGeom prst="rect">
             <a:avLst/>
@@ -10379,7 +10379,7 @@
         <p:spPr>
           <a:xfrm>
             <a:off x="6675120" y="5303520"/>
-            <a:ext cx="4753440" cy="333000"/>
+            <a:ext cx="4753080" cy="333000"/>
           </a:xfrm>
           <a:prstGeom prst="rect">
             <a:avLst/>
@@ -10477,7 +10477,7 @@
         <p:spPr>
           <a:xfrm>
             <a:off x="0" y="0"/>
-            <a:ext cx="71640" cy="6856560"/>
+            <a:ext cx="71280" cy="6856200"/>
           </a:xfrm>
           <a:prstGeom prst="rect">
             <a:avLst/>
@@ -10518,7 +10518,7 @@
         <p:spPr>
           <a:xfrm>
             <a:off x="3031200" y="457200"/>
-            <a:ext cx="6006240" cy="638280"/>
+            <a:ext cx="6005880" cy="638280"/>
           </a:xfrm>
           <a:prstGeom prst="rect">
             <a:avLst/>
@@ -10569,7 +10569,7 @@
         <p:spPr>
           <a:xfrm>
             <a:off x="548640" y="1371600"/>
-            <a:ext cx="2284560" cy="53280"/>
+            <a:ext cx="2284200" cy="52920"/>
           </a:xfrm>
           <a:prstGeom prst="rect">
             <a:avLst/>
@@ -10610,7 +10610,7 @@
         <p:spPr>
           <a:xfrm>
             <a:off x="548640" y="1965960"/>
-            <a:ext cx="108360" cy="108360"/>
+            <a:ext cx="108000" cy="108000"/>
           </a:xfrm>
           <a:prstGeom prst="rect">
             <a:avLst/>
@@ -10651,7 +10651,7 @@
         <p:spPr>
           <a:xfrm>
             <a:off x="914400" y="1828800"/>
-            <a:ext cx="10514160" cy="424800"/>
+            <a:ext cx="10513800" cy="424800"/>
           </a:xfrm>
           <a:prstGeom prst="rect">
             <a:avLst/>
@@ -10702,7 +10702,7 @@
         <p:spPr>
           <a:xfrm>
             <a:off x="548640" y="3063240"/>
-            <a:ext cx="108360" cy="108360"/>
+            <a:ext cx="108000" cy="108000"/>
           </a:xfrm>
           <a:prstGeom prst="rect">
             <a:avLst/>
@@ -10743,7 +10743,7 @@
         <p:spPr>
           <a:xfrm>
             <a:off x="914400" y="2926080"/>
-            <a:ext cx="10514160" cy="424800"/>
+            <a:ext cx="10513800" cy="424800"/>
           </a:xfrm>
           <a:prstGeom prst="rect">
             <a:avLst/>
@@ -10794,7 +10794,7 @@
         <p:spPr>
           <a:xfrm>
             <a:off x="548640" y="4160520"/>
-            <a:ext cx="108360" cy="108360"/>
+            <a:ext cx="108000" cy="108000"/>
           </a:xfrm>
           <a:prstGeom prst="rect">
             <a:avLst/>
@@ -10835,7 +10835,7 @@
         <p:spPr>
           <a:xfrm>
             <a:off x="914400" y="4023360"/>
-            <a:ext cx="10514160" cy="424800"/>
+            <a:ext cx="10513800" cy="424800"/>
           </a:xfrm>
           <a:prstGeom prst="rect">
             <a:avLst/>
@@ -10886,7 +10886,7 @@
         <p:spPr>
           <a:xfrm>
             <a:off x="548640" y="5257800"/>
-            <a:ext cx="108360" cy="108360"/>
+            <a:ext cx="108000" cy="108000"/>
           </a:xfrm>
           <a:prstGeom prst="rect">
             <a:avLst/>
@@ -10927,7 +10927,7 @@
         <p:spPr>
           <a:xfrm>
             <a:off x="914400" y="5120640"/>
-            <a:ext cx="10514160" cy="424800"/>
+            <a:ext cx="10513800" cy="424800"/>
           </a:xfrm>
           <a:prstGeom prst="rect">
             <a:avLst/>
@@ -11015,7 +11015,7 @@
         <p:spPr>
           <a:xfrm>
             <a:off x="4115520" y="1555200"/>
-            <a:ext cx="3656160" cy="3656160"/>
+            <a:ext cx="3655800" cy="3655800"/>
           </a:xfrm>
           <a:prstGeom prst="ellipse">
             <a:avLst/>
@@ -11056,7 +11056,7 @@
         <p:spPr>
           <a:xfrm>
             <a:off x="4115520" y="2652480"/>
-            <a:ext cx="3656160" cy="516240"/>
+            <a:ext cx="3655800" cy="516240"/>
           </a:xfrm>
           <a:prstGeom prst="rect">
             <a:avLst/>
@@ -11107,7 +11107,7 @@
         <p:spPr>
           <a:xfrm>
             <a:off x="4115520" y="3841200"/>
-            <a:ext cx="3656160" cy="333000"/>
+            <a:ext cx="3655800" cy="333000"/>
           </a:xfrm>
           <a:prstGeom prst="rect">
             <a:avLst/>
@@ -11158,7 +11158,7 @@
         <p:spPr>
           <a:xfrm>
             <a:off x="3108960" y="1554480"/>
-            <a:ext cx="730080" cy="730080"/>
+            <a:ext cx="729720" cy="729720"/>
           </a:xfrm>
           <a:prstGeom prst="ellipse">
             <a:avLst/>
@@ -11199,7 +11199,7 @@
         <p:spPr>
           <a:xfrm>
             <a:off x="2651760" y="2468880"/>
-            <a:ext cx="1644480" cy="333000"/>
+            <a:ext cx="1644120" cy="333000"/>
           </a:xfrm>
           <a:prstGeom prst="rect">
             <a:avLst/>
@@ -11250,7 +11250,7 @@
         <p:spPr>
           <a:xfrm>
             <a:off x="7772400" y="1188720"/>
-            <a:ext cx="730080" cy="730080"/>
+            <a:ext cx="729720" cy="729720"/>
           </a:xfrm>
           <a:prstGeom prst="ellipse">
             <a:avLst/>
@@ -11291,7 +11291,7 @@
         <p:spPr>
           <a:xfrm>
             <a:off x="7315200" y="2103120"/>
-            <a:ext cx="1644480" cy="333000"/>
+            <a:ext cx="1644120" cy="333000"/>
           </a:xfrm>
           <a:prstGeom prst="rect">
             <a:avLst/>
@@ -11342,7 +11342,7 @@
         <p:spPr>
           <a:xfrm>
             <a:off x="3109680" y="4480560"/>
-            <a:ext cx="730080" cy="730080"/>
+            <a:ext cx="729720" cy="729720"/>
           </a:xfrm>
           <a:prstGeom prst="ellipse">
             <a:avLst/>
@@ -11383,7 +11383,7 @@
         <p:spPr>
           <a:xfrm>
             <a:off x="2652480" y="5394960"/>
-            <a:ext cx="1644480" cy="333000"/>
+            <a:ext cx="1644120" cy="333000"/>
           </a:xfrm>
           <a:prstGeom prst="rect">
             <a:avLst/>
@@ -11434,7 +11434,7 @@
         <p:spPr>
           <a:xfrm>
             <a:off x="8046720" y="3840480"/>
-            <a:ext cx="730080" cy="730080"/>
+            <a:ext cx="729720" cy="729720"/>
           </a:xfrm>
           <a:prstGeom prst="ellipse">
             <a:avLst/>
@@ -11475,7 +11475,7 @@
         <p:spPr>
           <a:xfrm>
             <a:off x="7589520" y="4754880"/>
-            <a:ext cx="1644480" cy="576360"/>
+            <a:ext cx="1644120" cy="576360"/>
           </a:xfrm>
           <a:prstGeom prst="rect">
             <a:avLst/>
@@ -11563,7 +11563,7 @@
         <p:spPr>
           <a:xfrm>
             <a:off x="760320" y="1098720"/>
-            <a:ext cx="1222560" cy="3137760"/>
+            <a:ext cx="1222200" cy="3137760"/>
           </a:xfrm>
           <a:prstGeom prst="rect">
             <a:avLst/>
@@ -11614,7 +11614,7 @@
         <p:spPr>
           <a:xfrm>
             <a:off x="915120" y="2287440"/>
-            <a:ext cx="108360" cy="2284560"/>
+            <a:ext cx="108000" cy="2284200"/>
           </a:xfrm>
           <a:prstGeom prst="rect">
             <a:avLst/>
@@ -11655,7 +11655,7 @@
         <p:spPr>
           <a:xfrm>
             <a:off x="1829520" y="2563920"/>
-            <a:ext cx="9599760" cy="1551960"/>
+            <a:ext cx="9599400" cy="1551960"/>
           </a:xfrm>
           <a:prstGeom prst="rect">
             <a:avLst/>
@@ -11706,7 +11706,7 @@
         <p:spPr>
           <a:xfrm>
             <a:off x="5119560" y="5030640"/>
-            <a:ext cx="2104920" cy="363960"/>
+            <a:ext cx="2104560" cy="363960"/>
           </a:xfrm>
           <a:prstGeom prst="rect">
             <a:avLst/>
@@ -11794,7 +11794,7 @@
         <p:spPr>
           <a:xfrm>
             <a:off x="3833280" y="365760"/>
-            <a:ext cx="4523400" cy="638280"/>
+            <a:ext cx="4523040" cy="638280"/>
           </a:xfrm>
           <a:prstGeom prst="rect">
             <a:avLst/>
@@ -11845,7 +11845,7 @@
         <p:spPr>
           <a:xfrm>
             <a:off x="457200" y="1234440"/>
-            <a:ext cx="2284560" cy="53280"/>
+            <a:ext cx="2284200" cy="52920"/>
           </a:xfrm>
           <a:prstGeom prst="rect">
             <a:avLst/>
@@ -11886,7 +11886,7 @@
         <p:spPr>
           <a:xfrm>
             <a:off x="274320" y="1645920"/>
-            <a:ext cx="2180880" cy="4387680"/>
+            <a:ext cx="2180520" cy="4387320"/>
           </a:xfrm>
           <a:prstGeom prst="roundRect">
             <a:avLst>
@@ -11929,7 +11929,7 @@
         <p:spPr>
           <a:xfrm>
             <a:off x="274320" y="1645920"/>
-            <a:ext cx="2180880" cy="90000"/>
+            <a:ext cx="2180520" cy="89640"/>
           </a:xfrm>
           <a:prstGeom prst="rect">
             <a:avLst/>
@@ -11970,7 +11970,7 @@
         <p:spPr>
           <a:xfrm>
             <a:off x="1206000" y="1874520"/>
-            <a:ext cx="317160" cy="257040"/>
+            <a:ext cx="316800" cy="257040"/>
           </a:xfrm>
           <a:prstGeom prst="rect">
             <a:avLst/>
@@ -12021,7 +12021,7 @@
         <p:spPr>
           <a:xfrm>
             <a:off x="391680" y="2243160"/>
-            <a:ext cx="1985040" cy="546120"/>
+            <a:ext cx="1984680" cy="546120"/>
           </a:xfrm>
           <a:prstGeom prst="rect">
             <a:avLst/>
@@ -12072,7 +12072,7 @@
         <p:spPr>
           <a:xfrm>
             <a:off x="411480" y="3108960"/>
-            <a:ext cx="1906560" cy="637200"/>
+            <a:ext cx="1906200" cy="637200"/>
           </a:xfrm>
           <a:prstGeom prst="rect">
             <a:avLst/>
@@ -12123,7 +12123,7 @@
         <p:spPr>
           <a:xfrm>
             <a:off x="2639520" y="1645920"/>
-            <a:ext cx="2180880" cy="4387680"/>
+            <a:ext cx="2180520" cy="4387320"/>
           </a:xfrm>
           <a:prstGeom prst="roundRect">
             <a:avLst>
@@ -12166,7 +12166,7 @@
         <p:spPr>
           <a:xfrm>
             <a:off x="2639520" y="1645920"/>
-            <a:ext cx="2180880" cy="90000"/>
+            <a:ext cx="2180520" cy="89640"/>
           </a:xfrm>
           <a:prstGeom prst="rect">
             <a:avLst/>
@@ -12207,7 +12207,7 @@
         <p:spPr>
           <a:xfrm>
             <a:off x="3571200" y="1874520"/>
-            <a:ext cx="317160" cy="257040"/>
+            <a:ext cx="316800" cy="257040"/>
           </a:xfrm>
           <a:prstGeom prst="rect">
             <a:avLst/>
@@ -12258,7 +12258,7 @@
         <p:spPr>
           <a:xfrm>
             <a:off x="2776680" y="2286000"/>
-            <a:ext cx="1906560" cy="317880"/>
+            <a:ext cx="1906200" cy="317880"/>
           </a:xfrm>
           <a:prstGeom prst="rect">
             <a:avLst/>
@@ -12309,7 +12309,7 @@
         <p:spPr>
           <a:xfrm>
             <a:off x="2776680" y="3108960"/>
-            <a:ext cx="1906560" cy="454680"/>
+            <a:ext cx="1906200" cy="454680"/>
           </a:xfrm>
           <a:prstGeom prst="rect">
             <a:avLst/>
@@ -12360,7 +12360,7 @@
         <p:spPr>
           <a:xfrm>
             <a:off x="5004720" y="1645920"/>
-            <a:ext cx="2180880" cy="4387680"/>
+            <a:ext cx="2180520" cy="4387320"/>
           </a:xfrm>
           <a:prstGeom prst="roundRect">
             <a:avLst>
@@ -12403,7 +12403,7 @@
         <p:spPr>
           <a:xfrm>
             <a:off x="5004720" y="1645920"/>
-            <a:ext cx="2180880" cy="90000"/>
+            <a:ext cx="2180520" cy="89640"/>
           </a:xfrm>
           <a:prstGeom prst="rect">
             <a:avLst/>
@@ -12444,7 +12444,7 @@
         <p:spPr>
           <a:xfrm>
             <a:off x="5936400" y="1874520"/>
-            <a:ext cx="317160" cy="257040"/>
+            <a:ext cx="316800" cy="257040"/>
           </a:xfrm>
           <a:prstGeom prst="rect">
             <a:avLst/>
@@ -12495,7 +12495,7 @@
         <p:spPr>
           <a:xfrm>
             <a:off x="5120640" y="2286000"/>
-            <a:ext cx="2064960" cy="317880"/>
+            <a:ext cx="2064600" cy="317880"/>
           </a:xfrm>
           <a:prstGeom prst="rect">
             <a:avLst/>
@@ -12546,7 +12546,7 @@
         <p:spPr>
           <a:xfrm>
             <a:off x="5141880" y="3108960"/>
-            <a:ext cx="1906560" cy="454680"/>
+            <a:ext cx="1906200" cy="454680"/>
           </a:xfrm>
           <a:prstGeom prst="rect">
             <a:avLst/>
@@ -12597,7 +12597,7 @@
         <p:spPr>
           <a:xfrm>
             <a:off x="7369920" y="1645920"/>
-            <a:ext cx="2180880" cy="4387680"/>
+            <a:ext cx="2180520" cy="4387320"/>
           </a:xfrm>
           <a:prstGeom prst="roundRect">
             <a:avLst>
@@ -12640,7 +12640,7 @@
         <p:spPr>
           <a:xfrm>
             <a:off x="7369920" y="1645920"/>
-            <a:ext cx="2180880" cy="90000"/>
+            <a:ext cx="2180520" cy="89640"/>
           </a:xfrm>
           <a:prstGeom prst="rect">
             <a:avLst/>
@@ -12681,7 +12681,7 @@
         <p:spPr>
           <a:xfrm>
             <a:off x="8127360" y="1874520"/>
-            <a:ext cx="666000" cy="257040"/>
+            <a:ext cx="665640" cy="257040"/>
           </a:xfrm>
           <a:prstGeom prst="rect">
             <a:avLst/>
@@ -12732,7 +12732,7 @@
         <p:spPr>
           <a:xfrm>
             <a:off x="7507080" y="2286000"/>
-            <a:ext cx="1906560" cy="317880"/>
+            <a:ext cx="1906200" cy="317880"/>
           </a:xfrm>
           <a:prstGeom prst="rect">
             <a:avLst/>
@@ -12783,7 +12783,7 @@
         <p:spPr>
           <a:xfrm>
             <a:off x="7507080" y="3108960"/>
-            <a:ext cx="1906560" cy="454680"/>
+            <a:ext cx="1906200" cy="454680"/>
           </a:xfrm>
           <a:prstGeom prst="rect">
             <a:avLst/>
@@ -12834,7 +12834,7 @@
         <p:spPr>
           <a:xfrm>
             <a:off x="9735120" y="1645920"/>
-            <a:ext cx="2180880" cy="4387680"/>
+            <a:ext cx="2180520" cy="4387320"/>
           </a:xfrm>
           <a:prstGeom prst="roundRect">
             <a:avLst>
@@ -12877,7 +12877,7 @@
         <p:spPr>
           <a:xfrm>
             <a:off x="9735120" y="1645920"/>
-            <a:ext cx="2180880" cy="90000"/>
+            <a:ext cx="2180520" cy="89640"/>
           </a:xfrm>
           <a:prstGeom prst="rect">
             <a:avLst/>
@@ -12918,7 +12918,7 @@
         <p:spPr>
           <a:xfrm>
             <a:off x="10492560" y="1874520"/>
-            <a:ext cx="666000" cy="257040"/>
+            <a:ext cx="665640" cy="257040"/>
           </a:xfrm>
           <a:prstGeom prst="rect">
             <a:avLst/>
@@ -12969,7 +12969,7 @@
         <p:spPr>
           <a:xfrm>
             <a:off x="9872280" y="2286000"/>
-            <a:ext cx="1906560" cy="317880"/>
+            <a:ext cx="1906200" cy="317880"/>
           </a:xfrm>
           <a:prstGeom prst="rect">
             <a:avLst/>
@@ -13020,7 +13020,7 @@
         <p:spPr>
           <a:xfrm>
             <a:off x="9872280" y="3108960"/>
-            <a:ext cx="1906560" cy="454680"/>
+            <a:ext cx="1906200" cy="454680"/>
           </a:xfrm>
           <a:prstGeom prst="rect">
             <a:avLst/>
@@ -13108,7 +13108,7 @@
         <p:spPr>
           <a:xfrm>
             <a:off x="0" y="0"/>
-            <a:ext cx="71640" cy="6857280"/>
+            <a:ext cx="71280" cy="6856920"/>
           </a:xfrm>
           <a:prstGeom prst="rect">
             <a:avLst/>
@@ -13149,7 +13149,7 @@
         <p:spPr>
           <a:xfrm>
             <a:off x="1517760" y="457200"/>
-            <a:ext cx="9033480" cy="639360"/>
+            <a:ext cx="9033120" cy="639000"/>
           </a:xfrm>
           <a:prstGeom prst="rect">
             <a:avLst/>
@@ -13213,7 +13213,7 @@
         <p:spPr>
           <a:xfrm>
             <a:off x="548640" y="1371600"/>
-            <a:ext cx="2285280" cy="54000"/>
+            <a:ext cx="2284920" cy="53640"/>
           </a:xfrm>
           <a:prstGeom prst="rect">
             <a:avLst/>
@@ -13254,7 +13254,7 @@
         <p:spPr>
           <a:xfrm>
             <a:off x="548640" y="1828800"/>
-            <a:ext cx="10972080" cy="392400"/>
+            <a:ext cx="10971720" cy="392040"/>
           </a:xfrm>
           <a:prstGeom prst="rect">
             <a:avLst/>
@@ -13318,7 +13318,7 @@
         <p:spPr>
           <a:xfrm>
             <a:off x="548640" y="2560320"/>
-            <a:ext cx="10972080" cy="365040"/>
+            <a:ext cx="10971720" cy="364680"/>
           </a:xfrm>
           <a:prstGeom prst="rect">
             <a:avLst/>
@@ -13382,7 +13382,7 @@
         <p:spPr>
           <a:xfrm>
             <a:off x="548640" y="3291840"/>
-            <a:ext cx="10972080" cy="365040"/>
+            <a:ext cx="10971720" cy="364680"/>
           </a:xfrm>
           <a:prstGeom prst="rect">
             <a:avLst/>
@@ -13456,7 +13456,7 @@
         <p:spPr>
           <a:xfrm>
             <a:off x="548640" y="3749040"/>
-            <a:ext cx="10972080" cy="365040"/>
+            <a:ext cx="10971720" cy="364680"/>
           </a:xfrm>
           <a:prstGeom prst="rect">
             <a:avLst/>
@@ -13530,7 +13530,7 @@
         <p:spPr>
           <a:xfrm>
             <a:off x="548640" y="4206240"/>
-            <a:ext cx="10972080" cy="365040"/>
+            <a:ext cx="10971720" cy="364680"/>
           </a:xfrm>
           <a:prstGeom prst="rect">
             <a:avLst/>
@@ -13604,7 +13604,7 @@
         <p:spPr>
           <a:xfrm>
             <a:off x="548640" y="4663440"/>
-            <a:ext cx="10972080" cy="365040"/>
+            <a:ext cx="10971720" cy="364680"/>
           </a:xfrm>
           <a:prstGeom prst="rect">
             <a:avLst/>
@@ -13661,7 +13661,7 @@
                 <a:latin typeface="Inter"/>
                 <a:ea typeface="DejaVu Sans"/>
               </a:rPr>
-              <a:t>You can use commands for this exercise - we'll also cover them more next</a:t>
+              <a:t>You can use skills/commands for this exercise - we'll also cover them more next</a:t>
             </a:r>
             <a:endParaRPr b="0" lang="en-US" sz="1800" spc="-1" strike="noStrike">
               <a:latin typeface="Arial"/>
@@ -13678,7 +13678,7 @@
         <p:spPr>
           <a:xfrm>
             <a:off x="548640" y="5394960"/>
-            <a:ext cx="10972080" cy="913680"/>
+            <a:ext cx="10971720" cy="913320"/>
           </a:xfrm>
           <a:prstGeom prst="rect">
             <a:avLst/>
@@ -13719,7 +13719,7 @@
         <p:spPr>
           <a:xfrm>
             <a:off x="822960" y="5669280"/>
-            <a:ext cx="10423440" cy="365040"/>
+            <a:ext cx="10423080" cy="364680"/>
           </a:xfrm>
           <a:prstGeom prst="rect">
             <a:avLst/>
@@ -13820,7 +13820,7 @@
         <p:spPr>
           <a:xfrm>
             <a:off x="0" y="0"/>
-            <a:ext cx="4113360" cy="6856560"/>
+            <a:ext cx="4113000" cy="6856200"/>
           </a:xfrm>
           <a:prstGeom prst="rect">
             <a:avLst/>
@@ -13861,7 +13861,7 @@
         <p:spPr>
           <a:xfrm>
             <a:off x="950040" y="2560320"/>
-            <a:ext cx="2212920" cy="1918080"/>
+            <a:ext cx="2212560" cy="1918080"/>
           </a:xfrm>
           <a:prstGeom prst="rect">
             <a:avLst/>
@@ -13912,7 +13912,7 @@
         <p:spPr>
           <a:xfrm>
             <a:off x="4114800" y="1371600"/>
-            <a:ext cx="71640" cy="4113360"/>
+            <a:ext cx="71280" cy="4113000"/>
           </a:xfrm>
           <a:prstGeom prst="rect">
             <a:avLst/>
@@ -13953,7 +13953,7 @@
         <p:spPr>
           <a:xfrm>
             <a:off x="4754880" y="2377440"/>
-            <a:ext cx="6856560" cy="759960"/>
+            <a:ext cx="6856200" cy="759960"/>
           </a:xfrm>
           <a:prstGeom prst="rect">
             <a:avLst/>
@@ -14004,7 +14004,7 @@
         <p:spPr>
           <a:xfrm>
             <a:off x="4754880" y="3840480"/>
-            <a:ext cx="6856560" cy="394560"/>
+            <a:ext cx="6856200" cy="394560"/>
           </a:xfrm>
           <a:prstGeom prst="rect">
             <a:avLst/>
@@ -14092,7 +14092,7 @@
         <p:spPr>
           <a:xfrm>
             <a:off x="0" y="0"/>
-            <a:ext cx="71640" cy="6856560"/>
+            <a:ext cx="71280" cy="6856200"/>
           </a:xfrm>
           <a:prstGeom prst="rect">
             <a:avLst/>
@@ -14133,7 +14133,7 @@
         <p:spPr>
           <a:xfrm>
             <a:off x="4373640" y="457200"/>
-            <a:ext cx="3321000" cy="638280"/>
+            <a:ext cx="3320640" cy="638280"/>
           </a:xfrm>
           <a:prstGeom prst="rect">
             <a:avLst/>
@@ -14184,7 +14184,7 @@
         <p:spPr>
           <a:xfrm>
             <a:off x="548640" y="1371600"/>
-            <a:ext cx="2284560" cy="53280"/>
+            <a:ext cx="2284200" cy="52920"/>
           </a:xfrm>
           <a:prstGeom prst="rect">
             <a:avLst/>
@@ -14225,7 +14225,7 @@
         <p:spPr>
           <a:xfrm>
             <a:off x="548640" y="1965960"/>
-            <a:ext cx="108360" cy="108360"/>
+            <a:ext cx="108000" cy="108000"/>
           </a:xfrm>
           <a:prstGeom prst="rect">
             <a:avLst/>
@@ -14266,7 +14266,7 @@
         <p:spPr>
           <a:xfrm>
             <a:off x="914400" y="1828800"/>
-            <a:ext cx="10514160" cy="424800"/>
+            <a:ext cx="10513800" cy="424800"/>
           </a:xfrm>
           <a:prstGeom prst="rect">
             <a:avLst/>
@@ -14317,7 +14317,7 @@
         <p:spPr>
           <a:xfrm>
             <a:off x="548640" y="3063240"/>
-            <a:ext cx="108360" cy="108360"/>
+            <a:ext cx="108000" cy="108000"/>
           </a:xfrm>
           <a:prstGeom prst="rect">
             <a:avLst/>
@@ -14358,7 +14358,7 @@
         <p:spPr>
           <a:xfrm>
             <a:off x="914400" y="2926080"/>
-            <a:ext cx="10514160" cy="424800"/>
+            <a:ext cx="10513800" cy="424800"/>
           </a:xfrm>
           <a:prstGeom prst="rect">
             <a:avLst/>
@@ -14409,7 +14409,7 @@
         <p:spPr>
           <a:xfrm>
             <a:off x="548640" y="4160520"/>
-            <a:ext cx="108360" cy="108360"/>
+            <a:ext cx="108000" cy="108000"/>
           </a:xfrm>
           <a:prstGeom prst="rect">
             <a:avLst/>
@@ -14450,7 +14450,7 @@
         <p:spPr>
           <a:xfrm>
             <a:off x="914400" y="4023360"/>
-            <a:ext cx="10514160" cy="424800"/>
+            <a:ext cx="10513800" cy="424800"/>
           </a:xfrm>
           <a:prstGeom prst="rect">
             <a:avLst/>
@@ -14501,7 +14501,7 @@
         <p:spPr>
           <a:xfrm>
             <a:off x="548640" y="5257800"/>
-            <a:ext cx="108360" cy="108360"/>
+            <a:ext cx="108000" cy="108000"/>
           </a:xfrm>
           <a:prstGeom prst="rect">
             <a:avLst/>
@@ -14542,7 +14542,7 @@
         <p:spPr>
           <a:xfrm>
             <a:off x="914400" y="5120640"/>
-            <a:ext cx="10514160" cy="424800"/>
+            <a:ext cx="10513800" cy="424800"/>
           </a:xfrm>
           <a:prstGeom prst="rect">
             <a:avLst/>
@@ -14630,7 +14630,7 @@
         <p:spPr>
           <a:xfrm>
             <a:off x="-1828800" y="3657600"/>
-            <a:ext cx="5484960" cy="3656160"/>
+            <a:ext cx="5484600" cy="3655800"/>
           </a:xfrm>
           <a:prstGeom prst="parallelogram">
             <a:avLst>
@@ -14673,7 +14673,7 @@
         <p:spPr>
           <a:xfrm>
             <a:off x="-2743200" y="5029200"/>
-            <a:ext cx="4570560" cy="2741760"/>
+            <a:ext cx="4570200" cy="2741400"/>
           </a:xfrm>
           <a:prstGeom prst="parallelogram">
             <a:avLst>
@@ -14716,7 +14716,7 @@
         <p:spPr>
           <a:xfrm>
             <a:off x="4114800" y="1828800"/>
-            <a:ext cx="7588080" cy="1673640"/>
+            <a:ext cx="7587720" cy="1673640"/>
           </a:xfrm>
           <a:prstGeom prst="rect">
             <a:avLst/>
@@ -14767,7 +14767,7 @@
         <p:spPr>
           <a:xfrm>
             <a:off x="4114800" y="3840480"/>
-            <a:ext cx="7588080" cy="455400"/>
+            <a:ext cx="7587720" cy="455400"/>
           </a:xfrm>
           <a:prstGeom prst="rect">
             <a:avLst/>
@@ -14818,7 +14818,7 @@
         <p:spPr>
           <a:xfrm>
             <a:off x="11277360" y="0"/>
-            <a:ext cx="912960" cy="912960"/>
+            <a:ext cx="912600" cy="912600"/>
           </a:xfrm>
           <a:prstGeom prst="rtTriangle">
             <a:avLst/>
@@ -14896,7 +14896,7 @@
         <p:spPr>
           <a:xfrm>
             <a:off x="3067560" y="365760"/>
-            <a:ext cx="6055200" cy="638280"/>
+            <a:ext cx="6054840" cy="638280"/>
           </a:xfrm>
           <a:prstGeom prst="rect">
             <a:avLst/>
@@ -14947,7 +14947,7 @@
         <p:spPr>
           <a:xfrm>
             <a:off x="457200" y="1234440"/>
-            <a:ext cx="2284560" cy="53280"/>
+            <a:ext cx="2284200" cy="52920"/>
           </a:xfrm>
           <a:prstGeom prst="rect">
             <a:avLst/>
@@ -14988,7 +14988,7 @@
         <p:spPr>
           <a:xfrm>
             <a:off x="457200" y="1645920"/>
-            <a:ext cx="5302080" cy="4570560"/>
+            <a:ext cx="5301720" cy="4570200"/>
           </a:xfrm>
           <a:prstGeom prst="roundRect">
             <a:avLst>
@@ -15031,7 +15031,7 @@
         <p:spPr>
           <a:xfrm>
             <a:off x="1419480" y="1920240"/>
-            <a:ext cx="3377520" cy="394560"/>
+            <a:ext cx="3377160" cy="394560"/>
           </a:xfrm>
           <a:prstGeom prst="rect">
             <a:avLst/>
@@ -15082,7 +15082,7 @@
         <p:spPr>
           <a:xfrm>
             <a:off x="731520" y="2560320"/>
-            <a:ext cx="4753440" cy="333000"/>
+            <a:ext cx="4753080" cy="333000"/>
           </a:xfrm>
           <a:prstGeom prst="rect">
             <a:avLst/>
@@ -15143,7 +15143,7 @@
         <p:spPr>
           <a:xfrm>
             <a:off x="731520" y="3383280"/>
-            <a:ext cx="4753440" cy="333000"/>
+            <a:ext cx="4753080" cy="333000"/>
           </a:xfrm>
           <a:prstGeom prst="rect">
             <a:avLst/>
@@ -15204,7 +15204,7 @@
         <p:spPr>
           <a:xfrm>
             <a:off x="731520" y="4206240"/>
-            <a:ext cx="4753440" cy="333000"/>
+            <a:ext cx="4753080" cy="333000"/>
           </a:xfrm>
           <a:prstGeom prst="rect">
             <a:avLst/>
@@ -15265,7 +15265,7 @@
         <p:spPr>
           <a:xfrm>
             <a:off x="731520" y="5029200"/>
-            <a:ext cx="4753440" cy="333000"/>
+            <a:ext cx="4753080" cy="333000"/>
           </a:xfrm>
           <a:prstGeom prst="rect">
             <a:avLst/>
@@ -15326,7 +15326,7 @@
         <p:spPr>
           <a:xfrm>
             <a:off x="6400800" y="1645920"/>
-            <a:ext cx="5302080" cy="4570560"/>
+            <a:ext cx="5301720" cy="4570200"/>
           </a:xfrm>
           <a:prstGeom prst="roundRect">
             <a:avLst>
@@ -15369,7 +15369,7 @@
         <p:spPr>
           <a:xfrm>
             <a:off x="8047440" y="1920240"/>
-            <a:ext cx="2008800" cy="394560"/>
+            <a:ext cx="2008440" cy="394560"/>
           </a:xfrm>
           <a:prstGeom prst="rect">
             <a:avLst/>
@@ -15420,7 +15420,7 @@
         <p:spPr>
           <a:xfrm>
             <a:off x="6675120" y="2560320"/>
-            <a:ext cx="4753440" cy="333000"/>
+            <a:ext cx="4753080" cy="333000"/>
           </a:xfrm>
           <a:prstGeom prst="rect">
             <a:avLst/>
@@ -15481,7 +15481,7 @@
         <p:spPr>
           <a:xfrm>
             <a:off x="6675120" y="3383280"/>
-            <a:ext cx="4753440" cy="333000"/>
+            <a:ext cx="4753080" cy="333000"/>
           </a:xfrm>
           <a:prstGeom prst="rect">
             <a:avLst/>
@@ -15542,7 +15542,7 @@
         <p:spPr>
           <a:xfrm>
             <a:off x="6675120" y="4206240"/>
-            <a:ext cx="4753440" cy="333000"/>
+            <a:ext cx="4753080" cy="333000"/>
           </a:xfrm>
           <a:prstGeom prst="rect">
             <a:avLst/>
@@ -15603,7 +15603,7 @@
         <p:spPr>
           <a:xfrm>
             <a:off x="6675120" y="5029200"/>
-            <a:ext cx="4753440" cy="333000"/>
+            <a:ext cx="4753080" cy="333000"/>
           </a:xfrm>
           <a:prstGeom prst="rect">
             <a:avLst/>
@@ -15701,7 +15701,7 @@
         <p:spPr>
           <a:xfrm>
             <a:off x="3235320" y="457200"/>
-            <a:ext cx="5719680" cy="699120"/>
+            <a:ext cx="5719320" cy="699120"/>
           </a:xfrm>
           <a:prstGeom prst="rect">
             <a:avLst/>
@@ -15752,7 +15752,7 @@
         <p:spPr>
           <a:xfrm>
             <a:off x="868680" y="1965960"/>
-            <a:ext cx="3839040" cy="3656160"/>
+            <a:ext cx="3838680" cy="3655800"/>
           </a:xfrm>
           <a:prstGeom prst="roundRect">
             <a:avLst>
@@ -15795,7 +15795,7 @@
         <p:spPr>
           <a:xfrm>
             <a:off x="731520" y="1828800"/>
-            <a:ext cx="3839040" cy="3656160"/>
+            <a:ext cx="3838680" cy="3655800"/>
           </a:xfrm>
           <a:prstGeom prst="roundRect">
             <a:avLst>
@@ -15838,7 +15838,7 @@
         <p:spPr>
           <a:xfrm>
             <a:off x="1005840" y="2103120"/>
-            <a:ext cx="730080" cy="108360"/>
+            <a:ext cx="729720" cy="108000"/>
           </a:xfrm>
           <a:prstGeom prst="rect">
             <a:avLst/>
@@ -15879,7 +15879,7 @@
         <p:spPr>
           <a:xfrm>
             <a:off x="1100880" y="2377440"/>
-            <a:ext cx="722520" cy="577080"/>
+            <a:ext cx="722160" cy="577080"/>
           </a:xfrm>
           <a:prstGeom prst="rect">
             <a:avLst/>
@@ -15930,7 +15930,7 @@
         <p:spPr>
           <a:xfrm>
             <a:off x="1005840" y="3200400"/>
-            <a:ext cx="3290400" cy="394560"/>
+            <a:ext cx="3290040" cy="394560"/>
           </a:xfrm>
           <a:prstGeom prst="rect">
             <a:avLst/>
@@ -15981,7 +15981,7 @@
         <p:spPr>
           <a:xfrm>
             <a:off x="960840" y="4206240"/>
-            <a:ext cx="3290400" cy="576360"/>
+            <a:ext cx="3290040" cy="576360"/>
           </a:xfrm>
           <a:prstGeom prst="rect">
             <a:avLst/>
@@ -16032,7 +16032,7 @@
         <p:spPr>
           <a:xfrm>
             <a:off x="4251960" y="2331720"/>
-            <a:ext cx="3839040" cy="3656160"/>
+            <a:ext cx="3838680" cy="3655800"/>
           </a:xfrm>
           <a:prstGeom prst="roundRect">
             <a:avLst>
@@ -16075,7 +16075,7 @@
         <p:spPr>
           <a:xfrm>
             <a:off x="4114800" y="2194560"/>
-            <a:ext cx="3839040" cy="3656160"/>
+            <a:ext cx="3838680" cy="3655800"/>
           </a:xfrm>
           <a:prstGeom prst="roundRect">
             <a:avLst>
@@ -16118,7 +16118,7 @@
         <p:spPr>
           <a:xfrm>
             <a:off x="4389120" y="2468880"/>
-            <a:ext cx="730080" cy="108360"/>
+            <a:ext cx="729720" cy="108000"/>
           </a:xfrm>
           <a:prstGeom prst="rect">
             <a:avLst/>
@@ -16159,7 +16159,7 @@
         <p:spPr>
           <a:xfrm>
             <a:off x="4484160" y="2743200"/>
-            <a:ext cx="722520" cy="577080"/>
+            <a:ext cx="722160" cy="577080"/>
           </a:xfrm>
           <a:prstGeom prst="rect">
             <a:avLst/>
@@ -16210,7 +16210,7 @@
         <p:spPr>
           <a:xfrm>
             <a:off x="4389120" y="3566160"/>
-            <a:ext cx="3290400" cy="394560"/>
+            <a:ext cx="3290040" cy="394560"/>
           </a:xfrm>
           <a:prstGeom prst="rect">
             <a:avLst/>
@@ -16261,7 +16261,7 @@
         <p:spPr>
           <a:xfrm>
             <a:off x="4389120" y="4572000"/>
-            <a:ext cx="3290400" cy="819720"/>
+            <a:ext cx="3290040" cy="819720"/>
           </a:xfrm>
           <a:prstGeom prst="rect">
             <a:avLst/>
@@ -16312,7 +16312,7 @@
         <p:spPr>
           <a:xfrm>
             <a:off x="7635240" y="1783080"/>
-            <a:ext cx="3839040" cy="3656160"/>
+            <a:ext cx="3838680" cy="3655800"/>
           </a:xfrm>
           <a:prstGeom prst="roundRect">
             <a:avLst>
@@ -16355,7 +16355,7 @@
         <p:spPr>
           <a:xfrm>
             <a:off x="7498080" y="1645920"/>
-            <a:ext cx="3839040" cy="3656160"/>
+            <a:ext cx="3838680" cy="3655800"/>
           </a:xfrm>
           <a:prstGeom prst="roundRect">
             <a:avLst>
@@ -16398,7 +16398,7 @@
         <p:spPr>
           <a:xfrm>
             <a:off x="7772400" y="1920240"/>
-            <a:ext cx="730080" cy="108360"/>
+            <a:ext cx="729720" cy="108000"/>
           </a:xfrm>
           <a:prstGeom prst="rect">
             <a:avLst/>
@@ -16439,7 +16439,7 @@
         <p:spPr>
           <a:xfrm>
             <a:off x="7867440" y="2194560"/>
-            <a:ext cx="722520" cy="577080"/>
+            <a:ext cx="722160" cy="577080"/>
           </a:xfrm>
           <a:prstGeom prst="rect">
             <a:avLst/>
@@ -16490,7 +16490,7 @@
         <p:spPr>
           <a:xfrm>
             <a:off x="7772400" y="3017520"/>
-            <a:ext cx="3290400" cy="394560"/>
+            <a:ext cx="3290040" cy="394560"/>
           </a:xfrm>
           <a:prstGeom prst="rect">
             <a:avLst/>
@@ -16541,7 +16541,7 @@
         <p:spPr>
           <a:xfrm>
             <a:off x="7772400" y="4023360"/>
-            <a:ext cx="3290400" cy="576360"/>
+            <a:ext cx="3290040" cy="576360"/>
           </a:xfrm>
           <a:prstGeom prst="rect">
             <a:avLst/>
@@ -16629,7 +16629,7 @@
         <p:spPr>
           <a:xfrm>
             <a:off x="2218680" y="365760"/>
-            <a:ext cx="7752600" cy="638280"/>
+            <a:ext cx="7752240" cy="638280"/>
           </a:xfrm>
           <a:prstGeom prst="rect">
             <a:avLst/>
@@ -16680,7 +16680,7 @@
         <p:spPr>
           <a:xfrm>
             <a:off x="457200" y="1234440"/>
-            <a:ext cx="2284560" cy="53280"/>
+            <a:ext cx="2284200" cy="52920"/>
           </a:xfrm>
           <a:prstGeom prst="rect">
             <a:avLst/>
@@ -16721,7 +16721,7 @@
         <p:spPr>
           <a:xfrm>
             <a:off x="457200" y="1645920"/>
-            <a:ext cx="2612160" cy="4387680"/>
+            <a:ext cx="2611800" cy="4387320"/>
           </a:xfrm>
           <a:prstGeom prst="roundRect">
             <a:avLst>
@@ -16764,7 +16764,7 @@
         <p:spPr>
           <a:xfrm>
             <a:off x="457200" y="1645920"/>
-            <a:ext cx="2612160" cy="90000"/>
+            <a:ext cx="2611800" cy="89640"/>
           </a:xfrm>
           <a:prstGeom prst="rect">
             <a:avLst/>
@@ -16805,7 +16805,7 @@
         <p:spPr>
           <a:xfrm>
             <a:off x="1432440" y="1874520"/>
-            <a:ext cx="661680" cy="272160"/>
+            <a:ext cx="661320" cy="272160"/>
           </a:xfrm>
           <a:prstGeom prst="rect">
             <a:avLst/>
@@ -16856,7 +16856,7 @@
         <p:spPr>
           <a:xfrm>
             <a:off x="640080" y="2286000"/>
-            <a:ext cx="2246400" cy="317880"/>
+            <a:ext cx="2246040" cy="317880"/>
           </a:xfrm>
           <a:prstGeom prst="rect">
             <a:avLst/>
@@ -16907,7 +16907,7 @@
         <p:spPr>
           <a:xfrm>
             <a:off x="640080" y="3108960"/>
-            <a:ext cx="2246400" cy="637200"/>
+            <a:ext cx="2246040" cy="637200"/>
           </a:xfrm>
           <a:prstGeom prst="rect">
             <a:avLst/>
@@ -16958,7 +16958,7 @@
         <p:spPr>
           <a:xfrm>
             <a:off x="3345120" y="1645920"/>
-            <a:ext cx="2612160" cy="4387680"/>
+            <a:ext cx="2611800" cy="4387320"/>
           </a:xfrm>
           <a:prstGeom prst="roundRect">
             <a:avLst>
@@ -17001,7 +17001,7 @@
         <p:spPr>
           <a:xfrm>
             <a:off x="3345120" y="1645920"/>
-            <a:ext cx="2612160" cy="90000"/>
+            <a:ext cx="2611800" cy="89640"/>
           </a:xfrm>
           <a:prstGeom prst="rect">
             <a:avLst/>
@@ -17042,7 +17042,7 @@
         <p:spPr>
           <a:xfrm>
             <a:off x="4320360" y="1874520"/>
-            <a:ext cx="661680" cy="272160"/>
+            <a:ext cx="661320" cy="272160"/>
           </a:xfrm>
           <a:prstGeom prst="rect">
             <a:avLst/>
@@ -17093,7 +17093,7 @@
         <p:spPr>
           <a:xfrm>
             <a:off x="3528000" y="2286000"/>
-            <a:ext cx="2246400" cy="317880"/>
+            <a:ext cx="2246040" cy="317880"/>
           </a:xfrm>
           <a:prstGeom prst="rect">
             <a:avLst/>
@@ -17144,7 +17144,7 @@
         <p:spPr>
           <a:xfrm>
             <a:off x="3528000" y="3108960"/>
-            <a:ext cx="2246400" cy="637200"/>
+            <a:ext cx="2246040" cy="637200"/>
           </a:xfrm>
           <a:prstGeom prst="rect">
             <a:avLst/>
@@ -17195,7 +17195,7 @@
         <p:spPr>
           <a:xfrm>
             <a:off x="6233040" y="1645920"/>
-            <a:ext cx="2612160" cy="4387680"/>
+            <a:ext cx="2611800" cy="4387320"/>
           </a:xfrm>
           <a:prstGeom prst="roundRect">
             <a:avLst>
@@ -17238,7 +17238,7 @@
         <p:spPr>
           <a:xfrm>
             <a:off x="6233040" y="1645920"/>
-            <a:ext cx="2612160" cy="90000"/>
+            <a:ext cx="2611800" cy="89640"/>
           </a:xfrm>
           <a:prstGeom prst="rect">
             <a:avLst/>
@@ -17279,7 +17279,7 @@
         <p:spPr>
           <a:xfrm>
             <a:off x="7208280" y="1874520"/>
-            <a:ext cx="661680" cy="272160"/>
+            <a:ext cx="661320" cy="272160"/>
           </a:xfrm>
           <a:prstGeom prst="rect">
             <a:avLst/>
@@ -17330,7 +17330,7 @@
         <p:spPr>
           <a:xfrm>
             <a:off x="6415920" y="2286000"/>
-            <a:ext cx="2246400" cy="317880"/>
+            <a:ext cx="2246040" cy="317880"/>
           </a:xfrm>
           <a:prstGeom prst="rect">
             <a:avLst/>
@@ -17381,7 +17381,7 @@
         <p:spPr>
           <a:xfrm>
             <a:off x="6415920" y="3108960"/>
-            <a:ext cx="2246400" cy="637200"/>
+            <a:ext cx="2246040" cy="637200"/>
           </a:xfrm>
           <a:prstGeom prst="rect">
             <a:avLst/>
@@ -17432,7 +17432,7 @@
         <p:spPr>
           <a:xfrm>
             <a:off x="9120960" y="1645920"/>
-            <a:ext cx="2612160" cy="4387680"/>
+            <a:ext cx="2611800" cy="4387320"/>
           </a:xfrm>
           <a:prstGeom prst="roundRect">
             <a:avLst>
@@ -17475,7 +17475,7 @@
         <p:spPr>
           <a:xfrm>
             <a:off x="9120960" y="1645920"/>
-            <a:ext cx="2612160" cy="90000"/>
+            <a:ext cx="2611800" cy="89640"/>
           </a:xfrm>
           <a:prstGeom prst="rect">
             <a:avLst/>
@@ -17516,7 +17516,7 @@
         <p:spPr>
           <a:xfrm>
             <a:off x="10072440" y="1874520"/>
-            <a:ext cx="708840" cy="272160"/>
+            <a:ext cx="708480" cy="272160"/>
           </a:xfrm>
           <a:prstGeom prst="rect">
             <a:avLst/>
@@ -17567,7 +17567,7 @@
         <p:spPr>
           <a:xfrm>
             <a:off x="9303840" y="2286000"/>
-            <a:ext cx="2246400" cy="317880"/>
+            <a:ext cx="2246040" cy="317880"/>
           </a:xfrm>
           <a:prstGeom prst="rect">
             <a:avLst/>
@@ -17618,7 +17618,7 @@
         <p:spPr>
           <a:xfrm>
             <a:off x="9303840" y="3108960"/>
-            <a:ext cx="2246400" cy="454680"/>
+            <a:ext cx="2246040" cy="454680"/>
           </a:xfrm>
           <a:prstGeom prst="rect">
             <a:avLst/>
@@ -17706,7 +17706,7 @@
         <p:spPr>
           <a:xfrm>
             <a:off x="2177640" y="365760"/>
-            <a:ext cx="7835040" cy="638280"/>
+            <a:ext cx="7834680" cy="638280"/>
           </a:xfrm>
           <a:prstGeom prst="rect">
             <a:avLst/>
@@ -17757,7 +17757,7 @@
         <p:spPr>
           <a:xfrm>
             <a:off x="457200" y="1234440"/>
-            <a:ext cx="2284560" cy="53280"/>
+            <a:ext cx="2284200" cy="52920"/>
           </a:xfrm>
           <a:prstGeom prst="rect">
             <a:avLst/>
@@ -17798,7 +17798,7 @@
         <p:spPr>
           <a:xfrm>
             <a:off x="457200" y="1645920"/>
-            <a:ext cx="5302080" cy="4570560"/>
+            <a:ext cx="5301720" cy="4570200"/>
           </a:xfrm>
           <a:prstGeom prst="roundRect">
             <a:avLst>
@@ -17841,7 +17841,7 @@
         <p:spPr>
           <a:xfrm>
             <a:off x="1230480" y="1920240"/>
-            <a:ext cx="3755160" cy="394560"/>
+            <a:ext cx="3754800" cy="394560"/>
           </a:xfrm>
           <a:prstGeom prst="rect">
             <a:avLst/>
@@ -17892,7 +17892,7 @@
         <p:spPr>
           <a:xfrm>
             <a:off x="731520" y="2560320"/>
-            <a:ext cx="4753440" cy="333000"/>
+            <a:ext cx="4753080" cy="333000"/>
           </a:xfrm>
           <a:prstGeom prst="rect">
             <a:avLst/>
@@ -17953,7 +17953,7 @@
         <p:spPr>
           <a:xfrm>
             <a:off x="731520" y="3383280"/>
-            <a:ext cx="4753440" cy="333000"/>
+            <a:ext cx="4753080" cy="333000"/>
           </a:xfrm>
           <a:prstGeom prst="rect">
             <a:avLst/>
@@ -18014,7 +18014,7 @@
         <p:spPr>
           <a:xfrm>
             <a:off x="731520" y="4206240"/>
-            <a:ext cx="4753440" cy="333000"/>
+            <a:ext cx="4753080" cy="333000"/>
           </a:xfrm>
           <a:prstGeom prst="rect">
             <a:avLst/>
@@ -18075,7 +18075,7 @@
         <p:spPr>
           <a:xfrm>
             <a:off x="731520" y="5029200"/>
-            <a:ext cx="4753440" cy="333000"/>
+            <a:ext cx="4753080" cy="333000"/>
           </a:xfrm>
           <a:prstGeom prst="rect">
             <a:avLst/>
@@ -18136,7 +18136,7 @@
         <p:spPr>
           <a:xfrm>
             <a:off x="6400800" y="1645920"/>
-            <a:ext cx="5302080" cy="4570560"/>
+            <a:ext cx="5301720" cy="4570200"/>
           </a:xfrm>
           <a:prstGeom prst="roundRect">
             <a:avLst>
@@ -18179,7 +18179,7 @@
         <p:spPr>
           <a:xfrm>
             <a:off x="7867440" y="1920240"/>
-            <a:ext cx="2368440" cy="394560"/>
+            <a:ext cx="2368080" cy="394560"/>
           </a:xfrm>
           <a:prstGeom prst="rect">
             <a:avLst/>
@@ -18230,7 +18230,7 @@
         <p:spPr>
           <a:xfrm>
             <a:off x="6675120" y="2560320"/>
-            <a:ext cx="4753440" cy="333000"/>
+            <a:ext cx="4753080" cy="333000"/>
           </a:xfrm>
           <a:prstGeom prst="rect">
             <a:avLst/>
@@ -18291,7 +18291,7 @@
         <p:spPr>
           <a:xfrm>
             <a:off x="6675120" y="3383280"/>
-            <a:ext cx="4753440" cy="333000"/>
+            <a:ext cx="4753080" cy="333000"/>
           </a:xfrm>
           <a:prstGeom prst="rect">
             <a:avLst/>
@@ -18352,7 +18352,7 @@
         <p:spPr>
           <a:xfrm>
             <a:off x="6675120" y="4206240"/>
-            <a:ext cx="4753440" cy="333000"/>
+            <a:ext cx="4753080" cy="333000"/>
           </a:xfrm>
           <a:prstGeom prst="rect">
             <a:avLst/>
@@ -18413,7 +18413,7 @@
         <p:spPr>
           <a:xfrm>
             <a:off x="6675120" y="5029200"/>
-            <a:ext cx="4753440" cy="333000"/>
+            <a:ext cx="4753080" cy="333000"/>
           </a:xfrm>
           <a:prstGeom prst="rect">
             <a:avLst/>
@@ -18511,7 +18511,7 @@
         <p:spPr>
           <a:xfrm>
             <a:off x="2286000" y="1573560"/>
-            <a:ext cx="7595640" cy="516240"/>
+            <a:ext cx="7595280" cy="516240"/>
           </a:xfrm>
           <a:prstGeom prst="rect">
             <a:avLst/>
@@ -18562,7 +18562,7 @@
         <p:spPr>
           <a:xfrm>
             <a:off x="2292120" y="2487960"/>
-            <a:ext cx="7583760" cy="1308600"/>
+            <a:ext cx="7583400" cy="1308600"/>
           </a:xfrm>
           <a:prstGeom prst="rect">
             <a:avLst/>
@@ -18613,7 +18613,7 @@
         <p:spPr>
           <a:xfrm>
             <a:off x="3646800" y="4133880"/>
-            <a:ext cx="4874040" cy="455400"/>
+            <a:ext cx="4873680" cy="455400"/>
           </a:xfrm>
           <a:prstGeom prst="rect">
             <a:avLst/>
@@ -18664,7 +18664,7 @@
         <p:spPr>
           <a:xfrm>
             <a:off x="5018040" y="5414040"/>
-            <a:ext cx="2131920" cy="71640"/>
+            <a:ext cx="2131560" cy="71280"/>
           </a:xfrm>
           <a:prstGeom prst="rect">
             <a:avLst/>
@@ -18742,7 +18742,7 @@
         <p:spPr>
           <a:xfrm>
             <a:off x="0" y="0"/>
-            <a:ext cx="71640" cy="6856560"/>
+            <a:ext cx="71280" cy="6856200"/>
           </a:xfrm>
           <a:prstGeom prst="rect">
             <a:avLst/>
@@ -18783,7 +18783,7 @@
         <p:spPr>
           <a:xfrm>
             <a:off x="3696480" y="457200"/>
-            <a:ext cx="4675680" cy="638280"/>
+            <a:ext cx="4675320" cy="638280"/>
           </a:xfrm>
           <a:prstGeom prst="rect">
             <a:avLst/>
@@ -18834,7 +18834,7 @@
         <p:spPr>
           <a:xfrm>
             <a:off x="548640" y="1371600"/>
-            <a:ext cx="2284560" cy="53280"/>
+            <a:ext cx="2284200" cy="52920"/>
           </a:xfrm>
           <a:prstGeom prst="rect">
             <a:avLst/>
@@ -18875,7 +18875,7 @@
         <p:spPr>
           <a:xfrm>
             <a:off x="548640" y="1965960"/>
-            <a:ext cx="108360" cy="108360"/>
+            <a:ext cx="108000" cy="108000"/>
           </a:xfrm>
           <a:prstGeom prst="rect">
             <a:avLst/>
@@ -18916,7 +18916,7 @@
         <p:spPr>
           <a:xfrm>
             <a:off x="914400" y="1828800"/>
-            <a:ext cx="10514160" cy="424800"/>
+            <a:ext cx="10513800" cy="424800"/>
           </a:xfrm>
           <a:prstGeom prst="rect">
             <a:avLst/>
@@ -18950,7 +18950,7 @@
                 <a:latin typeface="Inter"/>
                 <a:ea typeface="DejaVu Sans"/>
               </a:rPr>
-              <a:t>Type something more than 3 times = make it a command</a:t>
+              <a:t>Type something more than 3 times = make it a skill/command</a:t>
             </a:r>
             <a:endParaRPr b="0" lang="en-US" sz="2200" spc="-1" strike="noStrike">
               <a:latin typeface="Arial"/>
@@ -18967,7 +18967,7 @@
         <p:spPr>
           <a:xfrm>
             <a:off x="548640" y="3063240"/>
-            <a:ext cx="108360" cy="108360"/>
+            <a:ext cx="108000" cy="108000"/>
           </a:xfrm>
           <a:prstGeom prst="rect">
             <a:avLst/>
@@ -19008,7 +19008,7 @@
         <p:spPr>
           <a:xfrm>
             <a:off x="914400" y="2926080"/>
-            <a:ext cx="10514160" cy="424800"/>
+            <a:ext cx="10513800" cy="424800"/>
           </a:xfrm>
           <a:prstGeom prst="rect">
             <a:avLst/>
@@ -19059,7 +19059,7 @@
         <p:spPr>
           <a:xfrm>
             <a:off x="548640" y="4160520"/>
-            <a:ext cx="108360" cy="108360"/>
+            <a:ext cx="108000" cy="108000"/>
           </a:xfrm>
           <a:prstGeom prst="rect">
             <a:avLst/>
@@ -19100,7 +19100,7 @@
         <p:spPr>
           <a:xfrm>
             <a:off x="914400" y="4023360"/>
-            <a:ext cx="10514160" cy="424800"/>
+            <a:ext cx="10513800" cy="424800"/>
           </a:xfrm>
           <a:prstGeom prst="rect">
             <a:avLst/>
@@ -19134,7 +19134,7 @@
                 <a:latin typeface="Inter"/>
                 <a:ea typeface="DejaVu Sans"/>
               </a:rPr>
-              <a:t>Commands encode your best practices automatically</a:t>
+              <a:t>Commands and skills encode your best practices automatically</a:t>
             </a:r>
             <a:endParaRPr b="0" lang="en-US" sz="2200" spc="-1" strike="noStrike">
               <a:latin typeface="Arial"/>
@@ -19151,7 +19151,7 @@
         <p:spPr>
           <a:xfrm>
             <a:off x="548640" y="5257800"/>
-            <a:ext cx="108360" cy="108360"/>
+            <a:ext cx="108000" cy="108000"/>
           </a:xfrm>
           <a:prstGeom prst="rect">
             <a:avLst/>
@@ -19192,7 +19192,7 @@
         <p:spPr>
           <a:xfrm>
             <a:off x="914400" y="5120640"/>
-            <a:ext cx="10514160" cy="424800"/>
+            <a:ext cx="10513800" cy="424800"/>
           </a:xfrm>
           <a:prstGeom prst="rect">
             <a:avLst/>
@@ -19280,7 +19280,7 @@
         <p:spPr>
           <a:xfrm>
             <a:off x="1048320" y="457200"/>
-            <a:ext cx="10093680" cy="699120"/>
+            <a:ext cx="10093320" cy="699120"/>
           </a:xfrm>
           <a:prstGeom prst="rect">
             <a:avLst/>
@@ -19331,7 +19331,7 @@
         <p:spPr>
           <a:xfrm>
             <a:off x="868680" y="1965960"/>
-            <a:ext cx="3839040" cy="3656160"/>
+            <a:ext cx="3838680" cy="3655800"/>
           </a:xfrm>
           <a:prstGeom prst="roundRect">
             <a:avLst>
@@ -19374,7 +19374,7 @@
         <p:spPr>
           <a:xfrm>
             <a:off x="731520" y="1828800"/>
-            <a:ext cx="3839040" cy="3656160"/>
+            <a:ext cx="3838680" cy="3655800"/>
           </a:xfrm>
           <a:prstGeom prst="roundRect">
             <a:avLst>
@@ -19417,7 +19417,7 @@
         <p:spPr>
           <a:xfrm>
             <a:off x="1005840" y="2103120"/>
-            <a:ext cx="730080" cy="108360"/>
+            <a:ext cx="729720" cy="108000"/>
           </a:xfrm>
           <a:prstGeom prst="rect">
             <a:avLst/>
@@ -19458,7 +19458,7 @@
         <p:spPr>
           <a:xfrm>
             <a:off x="1100880" y="2377440"/>
-            <a:ext cx="722520" cy="577080"/>
+            <a:ext cx="722160" cy="577080"/>
           </a:xfrm>
           <a:prstGeom prst="rect">
             <a:avLst/>
@@ -19509,7 +19509,7 @@
         <p:spPr>
           <a:xfrm>
             <a:off x="1005840" y="3200400"/>
-            <a:ext cx="3290400" cy="394560"/>
+            <a:ext cx="3290040" cy="394560"/>
           </a:xfrm>
           <a:prstGeom prst="rect">
             <a:avLst/>
@@ -19560,7 +19560,7 @@
         <p:spPr>
           <a:xfrm>
             <a:off x="1005840" y="4206240"/>
-            <a:ext cx="3290400" cy="819720"/>
+            <a:ext cx="3290040" cy="819720"/>
           </a:xfrm>
           <a:prstGeom prst="rect">
             <a:avLst/>
@@ -19611,7 +19611,7 @@
         <p:spPr>
           <a:xfrm>
             <a:off x="4251960" y="2331720"/>
-            <a:ext cx="3839040" cy="3656160"/>
+            <a:ext cx="3838680" cy="3655800"/>
           </a:xfrm>
           <a:prstGeom prst="roundRect">
             <a:avLst>
@@ -19654,7 +19654,7 @@
         <p:spPr>
           <a:xfrm>
             <a:off x="4114800" y="2194560"/>
-            <a:ext cx="3839040" cy="3656160"/>
+            <a:ext cx="3838680" cy="3655800"/>
           </a:xfrm>
           <a:prstGeom prst="roundRect">
             <a:avLst>
@@ -19697,7 +19697,7 @@
         <p:spPr>
           <a:xfrm>
             <a:off x="4389120" y="2468880"/>
-            <a:ext cx="730080" cy="108360"/>
+            <a:ext cx="729720" cy="108000"/>
           </a:xfrm>
           <a:prstGeom prst="rect">
             <a:avLst/>
@@ -19738,7 +19738,7 @@
         <p:spPr>
           <a:xfrm>
             <a:off x="4484160" y="2743200"/>
-            <a:ext cx="722520" cy="577080"/>
+            <a:ext cx="722160" cy="577080"/>
           </a:xfrm>
           <a:prstGeom prst="rect">
             <a:avLst/>
@@ -19789,7 +19789,7 @@
         <p:spPr>
           <a:xfrm>
             <a:off x="4389120" y="3566160"/>
-            <a:ext cx="3290400" cy="394560"/>
+            <a:ext cx="3290040" cy="394560"/>
           </a:xfrm>
           <a:prstGeom prst="rect">
             <a:avLst/>
@@ -19840,7 +19840,7 @@
         <p:spPr>
           <a:xfrm>
             <a:off x="4389120" y="4572000"/>
-            <a:ext cx="3290400" cy="819720"/>
+            <a:ext cx="3290040" cy="819720"/>
           </a:xfrm>
           <a:prstGeom prst="rect">
             <a:avLst/>
@@ -19891,7 +19891,7 @@
         <p:spPr>
           <a:xfrm>
             <a:off x="7635240" y="1783080"/>
-            <a:ext cx="3839040" cy="3656160"/>
+            <a:ext cx="3838680" cy="3655800"/>
           </a:xfrm>
           <a:prstGeom prst="roundRect">
             <a:avLst>
@@ -19934,7 +19934,7 @@
         <p:spPr>
           <a:xfrm>
             <a:off x="7498080" y="1645920"/>
-            <a:ext cx="3839040" cy="3656160"/>
+            <a:ext cx="3838680" cy="3655800"/>
           </a:xfrm>
           <a:prstGeom prst="roundRect">
             <a:avLst>
@@ -19977,7 +19977,7 @@
         <p:spPr>
           <a:xfrm>
             <a:off x="7772400" y="1920240"/>
-            <a:ext cx="730080" cy="108360"/>
+            <a:ext cx="729720" cy="108000"/>
           </a:xfrm>
           <a:prstGeom prst="rect">
             <a:avLst/>
@@ -20018,7 +20018,7 @@
         <p:spPr>
           <a:xfrm>
             <a:off x="7867440" y="2194560"/>
-            <a:ext cx="722520" cy="577080"/>
+            <a:ext cx="722160" cy="577080"/>
           </a:xfrm>
           <a:prstGeom prst="rect">
             <a:avLst/>
@@ -20069,7 +20069,7 @@
         <p:spPr>
           <a:xfrm>
             <a:off x="7772400" y="3017520"/>
-            <a:ext cx="3290400" cy="394560"/>
+            <a:ext cx="3290040" cy="394560"/>
           </a:xfrm>
           <a:prstGeom prst="rect">
             <a:avLst/>
@@ -20120,7 +20120,7 @@
         <p:spPr>
           <a:xfrm>
             <a:off x="7772400" y="4023360"/>
-            <a:ext cx="3290400" cy="576360"/>
+            <a:ext cx="3290040" cy="576360"/>
           </a:xfrm>
           <a:prstGeom prst="rect">
             <a:avLst/>
@@ -20208,7 +20208,7 @@
         <p:spPr>
           <a:xfrm>
             <a:off x="0" y="0"/>
-            <a:ext cx="71640" cy="6857280"/>
+            <a:ext cx="71280" cy="6856920"/>
           </a:xfrm>
           <a:prstGeom prst="rect">
             <a:avLst/>
@@ -20249,7 +20249,7 @@
         <p:spPr>
           <a:xfrm>
             <a:off x="1517760" y="457200"/>
-            <a:ext cx="9033480" cy="639360"/>
+            <a:ext cx="9033120" cy="639000"/>
           </a:xfrm>
           <a:prstGeom prst="rect">
             <a:avLst/>
@@ -20296,7 +20296,7 @@
                 <a:latin typeface="Inter"/>
                 <a:ea typeface="DejaVu Sans"/>
               </a:rPr>
-              <a:t>Exercise 3: Build a Command</a:t>
+              <a:t>Exercise 3: Build a Skill</a:t>
             </a:r>
             <a:endParaRPr b="0" lang="en-US" sz="3600" spc="-1" strike="noStrike">
               <a:latin typeface="Arial"/>
@@ -20313,7 +20313,7 @@
         <p:spPr>
           <a:xfrm>
             <a:off x="548640" y="1371600"/>
-            <a:ext cx="2285280" cy="54000"/>
+            <a:ext cx="2284920" cy="53640"/>
           </a:xfrm>
           <a:prstGeom prst="rect">
             <a:avLst/>
@@ -20354,7 +20354,7 @@
         <p:spPr>
           <a:xfrm>
             <a:off x="548640" y="1828800"/>
-            <a:ext cx="10972080" cy="392400"/>
+            <a:ext cx="10971720" cy="392040"/>
           </a:xfrm>
           <a:prstGeom prst="rect">
             <a:avLst/>
@@ -20418,7 +20418,7 @@
         <p:spPr>
           <a:xfrm>
             <a:off x="548640" y="2560320"/>
-            <a:ext cx="10972080" cy="365040"/>
+            <a:ext cx="10971720" cy="364680"/>
           </a:xfrm>
           <a:prstGeom prst="rect">
             <a:avLst/>
@@ -20482,7 +20482,7 @@
         <p:spPr>
           <a:xfrm>
             <a:off x="548640" y="3291840"/>
-            <a:ext cx="10972080" cy="365040"/>
+            <a:ext cx="10971720" cy="364680"/>
           </a:xfrm>
           <a:prstGeom prst="rect">
             <a:avLst/>
@@ -20539,7 +20539,7 @@
                 <a:latin typeface="Inter"/>
                 <a:ea typeface="DejaVu Sans"/>
               </a:rPr>
-              <a:t>Create a command for something you do daily or weekly</a:t>
+              <a:t>Create a skill for something you do daily or weekly</a:t>
             </a:r>
             <a:endParaRPr b="0" lang="en-US" sz="1800" spc="-1" strike="noStrike">
               <a:latin typeface="Arial"/>
@@ -20556,7 +20556,7 @@
         <p:spPr>
           <a:xfrm>
             <a:off x="548640" y="3749040"/>
-            <a:ext cx="10972080" cy="365040"/>
+            <a:ext cx="10971720" cy="364680"/>
           </a:xfrm>
           <a:prstGeom prst="rect">
             <a:avLst/>
@@ -20630,7 +20630,7 @@
         <p:spPr>
           <a:xfrm>
             <a:off x="548640" y="4206240"/>
-            <a:ext cx="10972080" cy="365040"/>
+            <a:ext cx="10971720" cy="364680"/>
           </a:xfrm>
           <a:prstGeom prst="rect">
             <a:avLst/>
@@ -20687,7 +20687,7 @@
                 <a:latin typeface="Inter"/>
                 <a:ea typeface="DejaVu Sans"/>
               </a:rPr>
-              <a:t>Take inspiration from the commands in .github/prompts/</a:t>
+              <a:t>Take inspiration from what we have in in .github/prompts/ or .github/skills/</a:t>
             </a:r>
             <a:endParaRPr b="0" lang="en-US" sz="1800" spc="-1" strike="noStrike">
               <a:latin typeface="Arial"/>
@@ -20704,7 +20704,7 @@
         <p:spPr>
           <a:xfrm>
             <a:off x="548640" y="4663440"/>
-            <a:ext cx="10972080" cy="365040"/>
+            <a:ext cx="10971720" cy="364680"/>
           </a:xfrm>
           <a:prstGeom prst="rect">
             <a:avLst/>
@@ -20778,7 +20778,7 @@
         <p:spPr>
           <a:xfrm>
             <a:off x="548640" y="5394960"/>
-            <a:ext cx="10972080" cy="913680"/>
+            <a:ext cx="10971720" cy="913320"/>
           </a:xfrm>
           <a:prstGeom prst="rect">
             <a:avLst/>
@@ -20819,7 +20819,7 @@
         <p:spPr>
           <a:xfrm>
             <a:off x="822960" y="5669280"/>
-            <a:ext cx="10423440" cy="365040"/>
+            <a:ext cx="10423080" cy="364680"/>
           </a:xfrm>
           <a:prstGeom prst="rect">
             <a:avLst/>
@@ -20866,7 +20866,7 @@
                 <a:latin typeface="Inter"/>
                 <a:ea typeface="DejaVu Sans"/>
               </a:rPr>
-              <a:t>Goal: Create a reusable command that automates part of your workflow</a:t>
+              <a:t>Goal: Create a reusable prompt that automates part of your workflow</a:t>
             </a:r>
             <a:endParaRPr b="0" lang="en-US" sz="1800" spc="-1" strike="noStrike">
               <a:latin typeface="Arial"/>
@@ -20920,7 +20920,7 @@
         <p:spPr>
           <a:xfrm>
             <a:off x="822960" y="914400"/>
-            <a:ext cx="1222560" cy="3137760"/>
+            <a:ext cx="1222200" cy="3137760"/>
           </a:xfrm>
           <a:prstGeom prst="rect">
             <a:avLst/>
@@ -20971,7 +20971,7 @@
         <p:spPr>
           <a:xfrm>
             <a:off x="977760" y="2103120"/>
-            <a:ext cx="108360" cy="2284560"/>
+            <a:ext cx="108000" cy="2284200"/>
           </a:xfrm>
           <a:prstGeom prst="rect">
             <a:avLst/>
@@ -21012,7 +21012,7 @@
         <p:spPr>
           <a:xfrm>
             <a:off x="1709280" y="2531520"/>
-            <a:ext cx="9599760" cy="1308600"/>
+            <a:ext cx="9599400" cy="1308600"/>
           </a:xfrm>
           <a:prstGeom prst="rect">
             <a:avLst/>
@@ -21063,7 +21063,7 @@
         <p:spPr>
           <a:xfrm>
             <a:off x="4467600" y="4572000"/>
-            <a:ext cx="3534480" cy="363960"/>
+            <a:ext cx="3534120" cy="363960"/>
           </a:xfrm>
           <a:prstGeom prst="rect">
             <a:avLst/>
@@ -21151,7 +21151,7 @@
         <p:spPr>
           <a:xfrm>
             <a:off x="3203280" y="365760"/>
-            <a:ext cx="5783760" cy="638280"/>
+            <a:ext cx="5783400" cy="638280"/>
           </a:xfrm>
           <a:prstGeom prst="rect">
             <a:avLst/>
@@ -21202,7 +21202,7 @@
         <p:spPr>
           <a:xfrm>
             <a:off x="457200" y="1234440"/>
-            <a:ext cx="2284560" cy="53280"/>
+            <a:ext cx="2284200" cy="52920"/>
           </a:xfrm>
           <a:prstGeom prst="rect">
             <a:avLst/>
@@ -21243,7 +21243,7 @@
         <p:spPr>
           <a:xfrm>
             <a:off x="457200" y="1645920"/>
-            <a:ext cx="2612160" cy="4387680"/>
+            <a:ext cx="2611800" cy="4387320"/>
           </a:xfrm>
           <a:prstGeom prst="roundRect">
             <a:avLst>
@@ -21286,7 +21286,7 @@
         <p:spPr>
           <a:xfrm>
             <a:off x="457200" y="1645920"/>
-            <a:ext cx="2612160" cy="90000"/>
+            <a:ext cx="2611800" cy="89640"/>
           </a:xfrm>
           <a:prstGeom prst="rect">
             <a:avLst/>
@@ -21327,7 +21327,7 @@
         <p:spPr>
           <a:xfrm>
             <a:off x="712440" y="1920240"/>
-            <a:ext cx="585360" cy="455400"/>
+            <a:ext cx="585000" cy="455400"/>
           </a:xfrm>
           <a:prstGeom prst="rect">
             <a:avLst/>
@@ -21378,7 +21378,7 @@
         <p:spPr>
           <a:xfrm>
             <a:off x="640080" y="2560320"/>
-            <a:ext cx="2246400" cy="363960"/>
+            <a:ext cx="2246040" cy="363960"/>
           </a:xfrm>
           <a:prstGeom prst="rect">
             <a:avLst/>
@@ -21429,7 +21429,7 @@
         <p:spPr>
           <a:xfrm>
             <a:off x="640080" y="3474720"/>
-            <a:ext cx="2246400" cy="942120"/>
+            <a:ext cx="2246040" cy="942120"/>
           </a:xfrm>
           <a:prstGeom prst="rect">
             <a:avLst/>
@@ -21480,7 +21480,7 @@
         <p:spPr>
           <a:xfrm>
             <a:off x="3345120" y="1645920"/>
-            <a:ext cx="2612160" cy="4387680"/>
+            <a:ext cx="2611800" cy="4387320"/>
           </a:xfrm>
           <a:prstGeom prst="roundRect">
             <a:avLst>
@@ -21523,7 +21523,7 @@
         <p:spPr>
           <a:xfrm>
             <a:off x="3345120" y="1645920"/>
-            <a:ext cx="2612160" cy="90000"/>
+            <a:ext cx="2611800" cy="89640"/>
           </a:xfrm>
           <a:prstGeom prst="rect">
             <a:avLst/>
@@ -21564,7 +21564,7 @@
         <p:spPr>
           <a:xfrm>
             <a:off x="3600360" y="1920240"/>
-            <a:ext cx="585360" cy="455400"/>
+            <a:ext cx="585000" cy="455400"/>
           </a:xfrm>
           <a:prstGeom prst="rect">
             <a:avLst/>
@@ -21615,7 +21615,7 @@
         <p:spPr>
           <a:xfrm>
             <a:off x="3528000" y="2560320"/>
-            <a:ext cx="2246400" cy="363960"/>
+            <a:ext cx="2246040" cy="363960"/>
           </a:xfrm>
           <a:prstGeom prst="rect">
             <a:avLst/>
@@ -21666,7 +21666,7 @@
         <p:spPr>
           <a:xfrm>
             <a:off x="3528000" y="3474720"/>
-            <a:ext cx="2246400" cy="729000"/>
+            <a:ext cx="2246040" cy="729000"/>
           </a:xfrm>
           <a:prstGeom prst="rect">
             <a:avLst/>
@@ -21717,7 +21717,7 @@
         <p:spPr>
           <a:xfrm>
             <a:off x="6233040" y="1645920"/>
-            <a:ext cx="2612160" cy="4387680"/>
+            <a:ext cx="2611800" cy="4387320"/>
           </a:xfrm>
           <a:prstGeom prst="roundRect">
             <a:avLst>
@@ -21760,7 +21760,7 @@
         <p:spPr>
           <a:xfrm>
             <a:off x="6233040" y="1645920"/>
-            <a:ext cx="2612160" cy="90000"/>
+            <a:ext cx="2611800" cy="89640"/>
           </a:xfrm>
           <a:prstGeom prst="rect">
             <a:avLst/>
@@ -21801,7 +21801,7 @@
         <p:spPr>
           <a:xfrm>
             <a:off x="6488280" y="1920240"/>
-            <a:ext cx="585360" cy="455400"/>
+            <a:ext cx="585000" cy="455400"/>
           </a:xfrm>
           <a:prstGeom prst="rect">
             <a:avLst/>
@@ -21852,7 +21852,7 @@
         <p:spPr>
           <a:xfrm>
             <a:off x="6415920" y="2468880"/>
-            <a:ext cx="2246400" cy="638280"/>
+            <a:ext cx="2246040" cy="638280"/>
           </a:xfrm>
           <a:prstGeom prst="rect">
             <a:avLst/>
@@ -21886,7 +21886,7 @@
                 <a:latin typeface="Inter"/>
                 <a:ea typeface="DejaVu Sans"/>
               </a:rPr>
-              <a:t>Update/Add Commands</a:t>
+              <a:t>Update/Add Skills</a:t>
             </a:r>
             <a:endParaRPr b="0" lang="en-US" sz="1800" spc="-1" strike="noStrike">
               <a:latin typeface="Arial"/>
@@ -21903,7 +21903,7 @@
         <p:spPr>
           <a:xfrm>
             <a:off x="6415920" y="3474720"/>
-            <a:ext cx="2246400" cy="729000"/>
+            <a:ext cx="2246040" cy="729000"/>
           </a:xfrm>
           <a:prstGeom prst="rect">
             <a:avLst/>
@@ -21954,7 +21954,7 @@
         <p:spPr>
           <a:xfrm>
             <a:off x="9120960" y="1645920"/>
-            <a:ext cx="2612160" cy="4387680"/>
+            <a:ext cx="2611800" cy="4387320"/>
           </a:xfrm>
           <a:prstGeom prst="roundRect">
             <a:avLst>
@@ -21997,7 +21997,7 @@
         <p:spPr>
           <a:xfrm>
             <a:off x="9120960" y="1645920"/>
-            <a:ext cx="2612160" cy="90000"/>
+            <a:ext cx="2611800" cy="89640"/>
           </a:xfrm>
           <a:prstGeom prst="rect">
             <a:avLst/>
@@ -22038,7 +22038,7 @@
         <p:spPr>
           <a:xfrm>
             <a:off x="9376200" y="1920240"/>
-            <a:ext cx="585360" cy="455400"/>
+            <a:ext cx="585000" cy="455400"/>
           </a:xfrm>
           <a:prstGeom prst="rect">
             <a:avLst/>
@@ -22089,7 +22089,7 @@
         <p:spPr>
           <a:xfrm>
             <a:off x="9303840" y="2560320"/>
-            <a:ext cx="2246400" cy="363960"/>
+            <a:ext cx="2246040" cy="363960"/>
           </a:xfrm>
           <a:prstGeom prst="rect">
             <a:avLst/>
@@ -22140,7 +22140,7 @@
         <p:spPr>
           <a:xfrm>
             <a:off x="9303840" y="3474720"/>
-            <a:ext cx="2246400" cy="515880"/>
+            <a:ext cx="2246040" cy="515880"/>
           </a:xfrm>
           <a:prstGeom prst="rect">
             <a:avLst/>
@@ -22228,7 +22228,7 @@
         <p:spPr>
           <a:xfrm>
             <a:off x="0" y="0"/>
-            <a:ext cx="4113360" cy="6856560"/>
+            <a:ext cx="4113000" cy="6856200"/>
           </a:xfrm>
           <a:prstGeom prst="rect">
             <a:avLst/>
@@ -22269,7 +22269,7 @@
         <p:spPr>
           <a:xfrm>
             <a:off x="950040" y="2560320"/>
-            <a:ext cx="2212920" cy="1918080"/>
+            <a:ext cx="2212560" cy="1918080"/>
           </a:xfrm>
           <a:prstGeom prst="rect">
             <a:avLst/>
@@ -22320,7 +22320,7 @@
         <p:spPr>
           <a:xfrm>
             <a:off x="4114800" y="1371600"/>
-            <a:ext cx="71640" cy="4113360"/>
+            <a:ext cx="71280" cy="4113000"/>
           </a:xfrm>
           <a:prstGeom prst="rect">
             <a:avLst/>
@@ -22361,7 +22361,7 @@
         <p:spPr>
           <a:xfrm>
             <a:off x="4754880" y="2194560"/>
-            <a:ext cx="6856560" cy="1430280"/>
+            <a:ext cx="6856200" cy="1430280"/>
           </a:xfrm>
           <a:prstGeom prst="rect">
             <a:avLst/>
@@ -22412,7 +22412,7 @@
         <p:spPr>
           <a:xfrm>
             <a:off x="4754880" y="3840480"/>
-            <a:ext cx="6856560" cy="394560"/>
+            <a:ext cx="6856200" cy="394560"/>
           </a:xfrm>
           <a:prstGeom prst="rect">
             <a:avLst/>
@@ -22500,7 +22500,7 @@
         <p:spPr>
           <a:xfrm>
             <a:off x="759600" y="1188720"/>
-            <a:ext cx="1222560" cy="3137760"/>
+            <a:ext cx="1222200" cy="3137760"/>
           </a:xfrm>
           <a:prstGeom prst="rect">
             <a:avLst/>
@@ -22551,7 +22551,7 @@
         <p:spPr>
           <a:xfrm>
             <a:off x="914400" y="2377440"/>
-            <a:ext cx="108360" cy="2284560"/>
+            <a:ext cx="108000" cy="2284200"/>
           </a:xfrm>
           <a:prstGeom prst="rect">
             <a:avLst/>
@@ -22592,7 +22592,7 @@
         <p:spPr>
           <a:xfrm>
             <a:off x="1555200" y="2590560"/>
-            <a:ext cx="9599760" cy="1735560"/>
+            <a:ext cx="9599400" cy="1735560"/>
           </a:xfrm>
           <a:prstGeom prst="rect">
             <a:avLst/>
@@ -22680,7 +22680,7 @@
         <p:spPr>
           <a:xfrm>
             <a:off x="2922840" y="365760"/>
-            <a:ext cx="6344640" cy="638280"/>
+            <a:ext cx="6344280" cy="638280"/>
           </a:xfrm>
           <a:prstGeom prst="rect">
             <a:avLst/>
@@ -22731,7 +22731,7 @@
         <p:spPr>
           <a:xfrm>
             <a:off x="457200" y="1234440"/>
-            <a:ext cx="2284560" cy="53280"/>
+            <a:ext cx="2284200" cy="52920"/>
           </a:xfrm>
           <a:prstGeom prst="rect">
             <a:avLst/>
@@ -22762,6 +22762,10 @@
           </a:effectRef>
           <a:fontRef idx="minor"/>
         </p:style>
+        <p:txBody>
+          <a:bodyPr/>
+          <a:p/>
+        </p:txBody>
       </p:sp>
       <p:sp>
         <p:nvSpPr>
@@ -22772,7 +22776,7 @@
         <p:spPr>
           <a:xfrm>
             <a:off x="457200" y="1645920"/>
-            <a:ext cx="3574800" cy="2193120"/>
+            <a:ext cx="3574440" cy="2192760"/>
           </a:xfrm>
           <a:prstGeom prst="roundRect">
             <a:avLst>
@@ -22805,6 +22809,10 @@
           </a:effectRef>
           <a:fontRef idx="minor"/>
         </p:style>
+        <p:txBody>
+          <a:bodyPr/>
+          <a:p/>
+        </p:txBody>
       </p:sp>
       <p:sp>
         <p:nvSpPr>
@@ -22815,7 +22823,7 @@
         <p:spPr>
           <a:xfrm>
             <a:off x="457200" y="1645920"/>
-            <a:ext cx="3574800" cy="71640"/>
+            <a:ext cx="3574440" cy="71280"/>
           </a:xfrm>
           <a:prstGeom prst="rect">
             <a:avLst/>
@@ -22846,6 +22854,10 @@
           </a:effectRef>
           <a:fontRef idx="minor"/>
         </p:style>
+        <p:txBody>
+          <a:bodyPr/>
+          <a:p/>
+        </p:txBody>
       </p:sp>
       <p:sp>
         <p:nvSpPr>
@@ -22856,7 +22868,7 @@
         <p:spPr>
           <a:xfrm>
             <a:off x="671040" y="1828800"/>
-            <a:ext cx="484920" cy="363960"/>
+            <a:ext cx="484560" cy="363960"/>
           </a:xfrm>
           <a:prstGeom prst="rect">
             <a:avLst/>
@@ -22907,7 +22919,7 @@
         <p:spPr>
           <a:xfrm>
             <a:off x="640080" y="2286000"/>
-            <a:ext cx="3209040" cy="333000"/>
+            <a:ext cx="3208680" cy="333000"/>
           </a:xfrm>
           <a:prstGeom prst="rect">
             <a:avLst/>
@@ -22958,7 +22970,7 @@
         <p:spPr>
           <a:xfrm>
             <a:off x="640080" y="2834640"/>
-            <a:ext cx="3209040" cy="302760"/>
+            <a:ext cx="3208680" cy="302760"/>
           </a:xfrm>
           <a:prstGeom prst="rect">
             <a:avLst/>
@@ -22992,7 +23004,7 @@
                 <a:latin typeface="Inter"/>
                 <a:ea typeface="DejaVu Sans"/>
               </a:rPr>
-              <a:t>Biome, Vitest, Playwright</a:t>
+              <a:t>Ruff, pytest, Mypy + Pyright</a:t>
             </a:r>
             <a:endParaRPr b="0" lang="en-US" sz="1400" spc="-1" strike="noStrike">
               <a:latin typeface="Arial"/>
@@ -23009,7 +23021,7 @@
         <p:spPr>
           <a:xfrm>
             <a:off x="4307760" y="1645920"/>
-            <a:ext cx="3574800" cy="2193120"/>
+            <a:ext cx="3574440" cy="2192760"/>
           </a:xfrm>
           <a:prstGeom prst="roundRect">
             <a:avLst>
@@ -23042,6 +23054,10 @@
           </a:effectRef>
           <a:fontRef idx="minor"/>
         </p:style>
+        <p:txBody>
+          <a:bodyPr/>
+          <a:p/>
+        </p:txBody>
       </p:sp>
       <p:sp>
         <p:nvSpPr>
@@ -23052,7 +23068,7 @@
         <p:spPr>
           <a:xfrm>
             <a:off x="4307760" y="1645920"/>
-            <a:ext cx="3574800" cy="71640"/>
+            <a:ext cx="3574440" cy="71280"/>
           </a:xfrm>
           <a:prstGeom prst="rect">
             <a:avLst/>
@@ -23083,6 +23099,10 @@
           </a:effectRef>
           <a:fontRef idx="minor"/>
         </p:style>
+        <p:txBody>
+          <a:bodyPr/>
+          <a:p/>
+        </p:txBody>
       </p:sp>
       <p:sp>
         <p:nvSpPr>
@@ -23093,7 +23113,7 @@
         <p:spPr>
           <a:xfrm>
             <a:off x="4521600" y="1828800"/>
-            <a:ext cx="484920" cy="363960"/>
+            <a:ext cx="484560" cy="363960"/>
           </a:xfrm>
           <a:prstGeom prst="rect">
             <a:avLst/>
@@ -23144,7 +23164,7 @@
         <p:spPr>
           <a:xfrm>
             <a:off x="4490640" y="2286000"/>
-            <a:ext cx="3209040" cy="333000"/>
+            <a:ext cx="3208680" cy="333000"/>
           </a:xfrm>
           <a:prstGeom prst="rect">
             <a:avLst/>
@@ -23195,7 +23215,7 @@
         <p:spPr>
           <a:xfrm>
             <a:off x="4490640" y="2834640"/>
-            <a:ext cx="3209040" cy="302760"/>
+            <a:ext cx="3208680" cy="302760"/>
           </a:xfrm>
           <a:prstGeom prst="rect">
             <a:avLst/>
@@ -23229,7 +23249,7 @@
                 <a:latin typeface="Inter"/>
                 <a:ea typeface="DejaVu Sans"/>
               </a:rPr>
-              <a:t>Pino with structured output</a:t>
+              <a:t>structlog with JSON output</a:t>
             </a:r>
             <a:endParaRPr b="0" lang="en-US" sz="1400" spc="-1" strike="noStrike">
               <a:latin typeface="Arial"/>
@@ -23246,7 +23266,7 @@
         <p:spPr>
           <a:xfrm>
             <a:off x="8158320" y="1645920"/>
-            <a:ext cx="3574800" cy="2193120"/>
+            <a:ext cx="3574440" cy="2192760"/>
           </a:xfrm>
           <a:prstGeom prst="roundRect">
             <a:avLst>
@@ -23279,6 +23299,10 @@
           </a:effectRef>
           <a:fontRef idx="minor"/>
         </p:style>
+        <p:txBody>
+          <a:bodyPr/>
+          <a:p/>
+        </p:txBody>
       </p:sp>
       <p:sp>
         <p:nvSpPr>
@@ -23289,7 +23313,7 @@
         <p:spPr>
           <a:xfrm>
             <a:off x="8158320" y="1645920"/>
-            <a:ext cx="3574800" cy="71640"/>
+            <a:ext cx="3574440" cy="71280"/>
           </a:xfrm>
           <a:prstGeom prst="rect">
             <a:avLst/>
@@ -23320,6 +23344,10 @@
           </a:effectRef>
           <a:fontRef idx="minor"/>
         </p:style>
+        <p:txBody>
+          <a:bodyPr/>
+          <a:p/>
+        </p:txBody>
       </p:sp>
       <p:sp>
         <p:nvSpPr>
@@ -23330,7 +23358,7 @@
         <p:spPr>
           <a:xfrm>
             <a:off x="8372160" y="1828800"/>
-            <a:ext cx="484920" cy="363960"/>
+            <a:ext cx="484560" cy="363960"/>
           </a:xfrm>
           <a:prstGeom prst="rect">
             <a:avLst/>
@@ -23381,7 +23409,7 @@
         <p:spPr>
           <a:xfrm>
             <a:off x="8341200" y="2286000"/>
-            <a:ext cx="3209040" cy="333000"/>
+            <a:ext cx="3208680" cy="333000"/>
           </a:xfrm>
           <a:prstGeom prst="rect">
             <a:avLst/>
@@ -23432,7 +23460,7 @@
         <p:spPr>
           <a:xfrm>
             <a:off x="8341200" y="2834640"/>
-            <a:ext cx="3209040" cy="302760"/>
+            <a:ext cx="3208680" cy="302760"/>
           </a:xfrm>
           <a:prstGeom prst="rect">
             <a:avLst/>
@@ -23466,7 +23494,7 @@
                 <a:latin typeface="Inter"/>
                 <a:ea typeface="DejaVu Sans"/>
               </a:rPr>
-              <a:t>Next.js with app router</a:t>
+              <a:t>FastAPI with uvicorn</a:t>
             </a:r>
             <a:endParaRPr b="0" lang="en-US" sz="1400" spc="-1" strike="noStrike">
               <a:latin typeface="Arial"/>
@@ -23483,7 +23511,7 @@
         <p:spPr>
           <a:xfrm>
             <a:off x="457200" y="4114800"/>
-            <a:ext cx="3574800" cy="2193120"/>
+            <a:ext cx="3574440" cy="2192760"/>
           </a:xfrm>
           <a:prstGeom prst="roundRect">
             <a:avLst>
@@ -23516,6 +23544,10 @@
           </a:effectRef>
           <a:fontRef idx="minor"/>
         </p:style>
+        <p:txBody>
+          <a:bodyPr/>
+          <a:p/>
+        </p:txBody>
       </p:sp>
       <p:sp>
         <p:nvSpPr>
@@ -23526,7 +23558,7 @@
         <p:spPr>
           <a:xfrm>
             <a:off x="457200" y="4114800"/>
-            <a:ext cx="3574800" cy="71640"/>
+            <a:ext cx="3574440" cy="71280"/>
           </a:xfrm>
           <a:prstGeom prst="rect">
             <a:avLst/>
@@ -23557,6 +23589,10 @@
           </a:effectRef>
           <a:fontRef idx="minor"/>
         </p:style>
+        <p:txBody>
+          <a:bodyPr/>
+          <a:p/>
+        </p:txBody>
       </p:sp>
       <p:sp>
         <p:nvSpPr>
@@ -23567,7 +23603,7 @@
         <p:spPr>
           <a:xfrm>
             <a:off x="671040" y="4297680"/>
-            <a:ext cx="484920" cy="363960"/>
+            <a:ext cx="484560" cy="363960"/>
           </a:xfrm>
           <a:prstGeom prst="rect">
             <a:avLst/>
@@ -23618,7 +23654,7 @@
         <p:spPr>
           <a:xfrm>
             <a:off x="640080" y="4754880"/>
-            <a:ext cx="3209040" cy="333000"/>
+            <a:ext cx="3208680" cy="333000"/>
           </a:xfrm>
           <a:prstGeom prst="rect">
             <a:avLst/>
@@ -23669,7 +23705,7 @@
         <p:spPr>
           <a:xfrm>
             <a:off x="640080" y="5303520"/>
-            <a:ext cx="3209040" cy="302760"/>
+            <a:ext cx="3208680" cy="302760"/>
           </a:xfrm>
           <a:prstGeom prst="rect">
             <a:avLst/>
@@ -23703,7 +23739,7 @@
                 <a:latin typeface="Inter"/>
                 <a:ea typeface="DejaVu Sans"/>
               </a:rPr>
-              <a:t>Prisma ORM with migrations</a:t>
+              <a:t>SQLAlchemy 2.0 + Alembic</a:t>
             </a:r>
             <a:endParaRPr b="0" lang="en-US" sz="1400" spc="-1" strike="noStrike">
               <a:latin typeface="Arial"/>
@@ -23720,7 +23756,7 @@
         <p:spPr>
           <a:xfrm>
             <a:off x="4307760" y="4114800"/>
-            <a:ext cx="3574800" cy="2193120"/>
+            <a:ext cx="3574440" cy="2192760"/>
           </a:xfrm>
           <a:prstGeom prst="roundRect">
             <a:avLst>
@@ -23753,6 +23789,10 @@
           </a:effectRef>
           <a:fontRef idx="minor"/>
         </p:style>
+        <p:txBody>
+          <a:bodyPr/>
+          <a:p/>
+        </p:txBody>
       </p:sp>
       <p:sp>
         <p:nvSpPr>
@@ -23763,7 +23803,7 @@
         <p:spPr>
           <a:xfrm>
             <a:off x="4307760" y="4114800"/>
-            <a:ext cx="3574800" cy="71640"/>
+            <a:ext cx="3574440" cy="71280"/>
           </a:xfrm>
           <a:prstGeom prst="rect">
             <a:avLst/>
@@ -23794,6 +23834,10 @@
           </a:effectRef>
           <a:fontRef idx="minor"/>
         </p:style>
+        <p:txBody>
+          <a:bodyPr/>
+          <a:p/>
+        </p:txBody>
       </p:sp>
       <p:sp>
         <p:nvSpPr>
@@ -23804,7 +23848,7 @@
         <p:spPr>
           <a:xfrm>
             <a:off x="4521600" y="4297680"/>
-            <a:ext cx="484920" cy="363960"/>
+            <a:ext cx="484560" cy="363960"/>
           </a:xfrm>
           <a:prstGeom prst="rect">
             <a:avLst/>
@@ -23855,7 +23899,7 @@
         <p:spPr>
           <a:xfrm>
             <a:off x="4490640" y="4754880"/>
-            <a:ext cx="3209040" cy="333000"/>
+            <a:ext cx="3208680" cy="333000"/>
           </a:xfrm>
           <a:prstGeom prst="rect">
             <a:avLst/>
@@ -23906,7 +23950,7 @@
         <p:spPr>
           <a:xfrm>
             <a:off x="4490640" y="5303520"/>
-            <a:ext cx="3209040" cy="302760"/>
+            <a:ext cx="3208680" cy="302760"/>
           </a:xfrm>
           <a:prstGeom prst="rect">
             <a:avLst/>
@@ -23957,7 +24001,7 @@
         <p:spPr>
           <a:xfrm>
             <a:off x="8158320" y="4114800"/>
-            <a:ext cx="3574800" cy="2193120"/>
+            <a:ext cx="3574440" cy="2192760"/>
           </a:xfrm>
           <a:prstGeom prst="roundRect">
             <a:avLst>
@@ -23990,6 +24034,10 @@
           </a:effectRef>
           <a:fontRef idx="minor"/>
         </p:style>
+        <p:txBody>
+          <a:bodyPr/>
+          <a:p/>
+        </p:txBody>
       </p:sp>
       <p:sp>
         <p:nvSpPr>
@@ -24000,7 +24048,7 @@
         <p:spPr>
           <a:xfrm>
             <a:off x="8158320" y="4114800"/>
-            <a:ext cx="3574800" cy="71640"/>
+            <a:ext cx="3574440" cy="71280"/>
           </a:xfrm>
           <a:prstGeom prst="rect">
             <a:avLst/>
@@ -24031,6 +24079,10 @@
           </a:effectRef>
           <a:fontRef idx="minor"/>
         </p:style>
+        <p:txBody>
+          <a:bodyPr/>
+          <a:p/>
+        </p:txBody>
       </p:sp>
       <p:sp>
         <p:nvSpPr>
@@ -24041,7 +24093,7 @@
         <p:spPr>
           <a:xfrm>
             <a:off x="8372160" y="4297680"/>
-            <a:ext cx="484920" cy="363960"/>
+            <a:ext cx="484560" cy="363960"/>
           </a:xfrm>
           <a:prstGeom prst="rect">
             <a:avLst/>
@@ -24092,7 +24144,7 @@
         <p:spPr>
           <a:xfrm>
             <a:off x="8341200" y="4754880"/>
-            <a:ext cx="3209040" cy="333000"/>
+            <a:ext cx="3208680" cy="333000"/>
           </a:xfrm>
           <a:prstGeom prst="rect">
             <a:avLst/>
@@ -24143,7 +24195,7 @@
         <p:spPr>
           <a:xfrm>
             <a:off x="8341200" y="5303520"/>
-            <a:ext cx="3209040" cy="302760"/>
+            <a:ext cx="3208680" cy="302760"/>
           </a:xfrm>
           <a:prstGeom prst="rect">
             <a:avLst/>
@@ -24177,7 +24229,7 @@
                 <a:latin typeface="Inter"/>
                 <a:ea typeface="DejaVu Sans"/>
               </a:rPr>
-              <a:t>Zod validation everywhere</a:t>
+              <a:t>Pydantic v2 validation</a:t>
             </a:r>
             <a:endParaRPr b="0" lang="en-US" sz="1400" spc="-1" strike="noStrike">
               <a:latin typeface="Arial"/>
@@ -24231,7 +24283,7 @@
         <p:spPr>
           <a:xfrm>
             <a:off x="0" y="0"/>
-            <a:ext cx="71640" cy="6856560"/>
+            <a:ext cx="71280" cy="6856200"/>
           </a:xfrm>
           <a:prstGeom prst="rect">
             <a:avLst/>
@@ -24272,7 +24324,7 @@
         <p:spPr>
           <a:xfrm>
             <a:off x="1897920" y="457200"/>
-            <a:ext cx="8272440" cy="638280"/>
+            <a:ext cx="8272080" cy="638280"/>
           </a:xfrm>
           <a:prstGeom prst="rect">
             <a:avLst/>
@@ -24323,7 +24375,7 @@
         <p:spPr>
           <a:xfrm>
             <a:off x="548640" y="1371600"/>
-            <a:ext cx="2284560" cy="53280"/>
+            <a:ext cx="2284200" cy="52920"/>
           </a:xfrm>
           <a:prstGeom prst="rect">
             <a:avLst/>
@@ -24364,7 +24416,7 @@
         <p:spPr>
           <a:xfrm>
             <a:off x="548640" y="1965960"/>
-            <a:ext cx="108360" cy="108360"/>
+            <a:ext cx="108000" cy="108000"/>
           </a:xfrm>
           <a:prstGeom prst="rect">
             <a:avLst/>
@@ -24405,7 +24457,7 @@
         <p:spPr>
           <a:xfrm>
             <a:off x="914400" y="1828800"/>
-            <a:ext cx="10514160" cy="424800"/>
+            <a:ext cx="10513800" cy="424800"/>
           </a:xfrm>
           <a:prstGeom prst="rect">
             <a:avLst/>
@@ -24456,7 +24508,7 @@
         <p:spPr>
           <a:xfrm>
             <a:off x="548640" y="3063240"/>
-            <a:ext cx="108360" cy="108360"/>
+            <a:ext cx="108000" cy="108000"/>
           </a:xfrm>
           <a:prstGeom prst="rect">
             <a:avLst/>
@@ -24497,7 +24549,7 @@
         <p:spPr>
           <a:xfrm>
             <a:off x="914400" y="2926080"/>
-            <a:ext cx="10514160" cy="424800"/>
+            <a:ext cx="10513800" cy="424800"/>
           </a:xfrm>
           <a:prstGeom prst="rect">
             <a:avLst/>
@@ -24548,7 +24600,7 @@
         <p:spPr>
           <a:xfrm>
             <a:off x="548640" y="4160520"/>
-            <a:ext cx="108360" cy="108360"/>
+            <a:ext cx="108000" cy="108000"/>
           </a:xfrm>
           <a:prstGeom prst="rect">
             <a:avLst/>
@@ -24589,7 +24641,7 @@
         <p:spPr>
           <a:xfrm>
             <a:off x="914400" y="4023360"/>
-            <a:ext cx="10514160" cy="424800"/>
+            <a:ext cx="10513800" cy="424800"/>
           </a:xfrm>
           <a:prstGeom prst="rect">
             <a:avLst/>
@@ -24640,7 +24692,7 @@
         <p:spPr>
           <a:xfrm>
             <a:off x="548640" y="5257800"/>
-            <a:ext cx="108360" cy="108360"/>
+            <a:ext cx="108000" cy="108000"/>
           </a:xfrm>
           <a:prstGeom prst="rect">
             <a:avLst/>
@@ -24681,7 +24733,7 @@
         <p:spPr>
           <a:xfrm>
             <a:off x="914400" y="5120640"/>
-            <a:ext cx="10514160" cy="424800"/>
+            <a:ext cx="10513800" cy="424800"/>
           </a:xfrm>
           <a:prstGeom prst="rect">
             <a:avLst/>
@@ -24769,7 +24821,7 @@
         <p:spPr>
           <a:xfrm>
             <a:off x="3491280" y="365760"/>
-            <a:ext cx="5207760" cy="638280"/>
+            <a:ext cx="5207400" cy="638280"/>
           </a:xfrm>
           <a:prstGeom prst="rect">
             <a:avLst/>
@@ -24820,7 +24872,7 @@
         <p:spPr>
           <a:xfrm>
             <a:off x="457200" y="1234440"/>
-            <a:ext cx="2284560" cy="53280"/>
+            <a:ext cx="2284200" cy="52920"/>
           </a:xfrm>
           <a:prstGeom prst="rect">
             <a:avLst/>
@@ -24851,6 +24903,10 @@
           </a:effectRef>
           <a:fontRef idx="minor"/>
         </p:style>
+        <p:txBody>
+          <a:bodyPr/>
+          <a:p/>
+        </p:txBody>
       </p:sp>
       <p:sp>
         <p:nvSpPr>
@@ -24861,7 +24917,7 @@
         <p:spPr>
           <a:xfrm>
             <a:off x="457200" y="1645920"/>
-            <a:ext cx="2612160" cy="4387680"/>
+            <a:ext cx="2611800" cy="4387320"/>
           </a:xfrm>
           <a:prstGeom prst="roundRect">
             <a:avLst>
@@ -24894,6 +24950,10 @@
           </a:effectRef>
           <a:fontRef idx="minor"/>
         </p:style>
+        <p:txBody>
+          <a:bodyPr/>
+          <a:p/>
+        </p:txBody>
       </p:sp>
       <p:sp>
         <p:nvSpPr>
@@ -24904,7 +24964,7 @@
         <p:spPr>
           <a:xfrm>
             <a:off x="457200" y="1645920"/>
-            <a:ext cx="2612160" cy="90000"/>
+            <a:ext cx="2611800" cy="89640"/>
           </a:xfrm>
           <a:prstGeom prst="rect">
             <a:avLst/>
@@ -24935,6 +24995,10 @@
           </a:effectRef>
           <a:fontRef idx="minor"/>
         </p:style>
+        <p:txBody>
+          <a:bodyPr/>
+          <a:p/>
+        </p:txBody>
       </p:sp>
       <p:sp>
         <p:nvSpPr>
@@ -24945,7 +25009,7 @@
         <p:spPr>
           <a:xfrm>
             <a:off x="712440" y="1920240"/>
-            <a:ext cx="585360" cy="455400"/>
+            <a:ext cx="585000" cy="455400"/>
           </a:xfrm>
           <a:prstGeom prst="rect">
             <a:avLst/>
@@ -24996,7 +25060,7 @@
         <p:spPr>
           <a:xfrm>
             <a:off x="640080" y="2560320"/>
-            <a:ext cx="2246400" cy="363960"/>
+            <a:ext cx="2246040" cy="363960"/>
           </a:xfrm>
           <a:prstGeom prst="rect">
             <a:avLst/>
@@ -25047,7 +25111,7 @@
         <p:spPr>
           <a:xfrm>
             <a:off x="640080" y="3474720"/>
-            <a:ext cx="2246400" cy="942120"/>
+            <a:ext cx="2246040" cy="942120"/>
           </a:xfrm>
           <a:prstGeom prst="rect">
             <a:avLst/>
@@ -25098,7 +25162,7 @@
         <p:spPr>
           <a:xfrm>
             <a:off x="3345120" y="1645920"/>
-            <a:ext cx="2612160" cy="4387680"/>
+            <a:ext cx="2611800" cy="4387320"/>
           </a:xfrm>
           <a:prstGeom prst="roundRect">
             <a:avLst>
@@ -25131,6 +25195,10 @@
           </a:effectRef>
           <a:fontRef idx="minor"/>
         </p:style>
+        <p:txBody>
+          <a:bodyPr/>
+          <a:p/>
+        </p:txBody>
       </p:sp>
       <p:sp>
         <p:nvSpPr>
@@ -25141,7 +25209,7 @@
         <p:spPr>
           <a:xfrm>
             <a:off x="3345120" y="1645920"/>
-            <a:ext cx="2612160" cy="90000"/>
+            <a:ext cx="2611800" cy="89640"/>
           </a:xfrm>
           <a:prstGeom prst="rect">
             <a:avLst/>
@@ -25172,6 +25240,10 @@
           </a:effectRef>
           <a:fontRef idx="minor"/>
         </p:style>
+        <p:txBody>
+          <a:bodyPr/>
+          <a:p/>
+        </p:txBody>
       </p:sp>
       <p:sp>
         <p:nvSpPr>
@@ -25182,7 +25254,7 @@
         <p:spPr>
           <a:xfrm>
             <a:off x="3600360" y="1920240"/>
-            <a:ext cx="585360" cy="455400"/>
+            <a:ext cx="585000" cy="455400"/>
           </a:xfrm>
           <a:prstGeom prst="rect">
             <a:avLst/>
@@ -25233,7 +25305,7 @@
         <p:spPr>
           <a:xfrm>
             <a:off x="3528000" y="2560320"/>
-            <a:ext cx="2246400" cy="363960"/>
+            <a:ext cx="2246040" cy="363960"/>
           </a:xfrm>
           <a:prstGeom prst="rect">
             <a:avLst/>
@@ -25284,7 +25356,7 @@
         <p:spPr>
           <a:xfrm>
             <a:off x="3528000" y="3474720"/>
-            <a:ext cx="2246400" cy="942120"/>
+            <a:ext cx="2246040" cy="942120"/>
           </a:xfrm>
           <a:prstGeom prst="rect">
             <a:avLst/>
@@ -25335,7 +25407,7 @@
         <p:spPr>
           <a:xfrm>
             <a:off x="6233040" y="1645920"/>
-            <a:ext cx="2612160" cy="4387680"/>
+            <a:ext cx="2611800" cy="4387320"/>
           </a:xfrm>
           <a:prstGeom prst="roundRect">
             <a:avLst>
@@ -25368,6 +25440,10 @@
           </a:effectRef>
           <a:fontRef idx="minor"/>
         </p:style>
+        <p:txBody>
+          <a:bodyPr/>
+          <a:p/>
+        </p:txBody>
       </p:sp>
       <p:sp>
         <p:nvSpPr>
@@ -25378,7 +25454,7 @@
         <p:spPr>
           <a:xfrm>
             <a:off x="6233040" y="1645920"/>
-            <a:ext cx="2612160" cy="90000"/>
+            <a:ext cx="2611800" cy="89640"/>
           </a:xfrm>
           <a:prstGeom prst="rect">
             <a:avLst/>
@@ -25409,6 +25485,10 @@
           </a:effectRef>
           <a:fontRef idx="minor"/>
         </p:style>
+        <p:txBody>
+          <a:bodyPr/>
+          <a:p/>
+        </p:txBody>
       </p:sp>
       <p:sp>
         <p:nvSpPr>
@@ -25419,7 +25499,7 @@
         <p:spPr>
           <a:xfrm>
             <a:off x="6488280" y="1920240"/>
-            <a:ext cx="585360" cy="455400"/>
+            <a:ext cx="585000" cy="455400"/>
           </a:xfrm>
           <a:prstGeom prst="rect">
             <a:avLst/>
@@ -25470,7 +25550,7 @@
         <p:spPr>
           <a:xfrm>
             <a:off x="6415920" y="2560320"/>
-            <a:ext cx="2246400" cy="638280"/>
+            <a:ext cx="2246040" cy="364680"/>
           </a:xfrm>
           <a:prstGeom prst="rect">
             <a:avLst/>
@@ -25504,7 +25584,7 @@
                 <a:latin typeface="Inter"/>
                 <a:ea typeface="DejaVu Sans"/>
               </a:rPr>
-              <a:t>Build a Command</a:t>
+              <a:t>Build a Skill</a:t>
             </a:r>
             <a:endParaRPr b="0" lang="en-US" sz="1800" spc="-1" strike="noStrike">
               <a:latin typeface="Arial"/>
@@ -25521,7 +25601,7 @@
         <p:spPr>
           <a:xfrm>
             <a:off x="6415920" y="3474720"/>
-            <a:ext cx="2246400" cy="942120"/>
+            <a:ext cx="2246040" cy="942120"/>
           </a:xfrm>
           <a:prstGeom prst="rect">
             <a:avLst/>
@@ -25555,7 +25635,7 @@
                 <a:latin typeface="Inter"/>
                 <a:ea typeface="DejaVu Sans"/>
               </a:rPr>
-              <a:t>Create your own workflow command to automate something you do daily/weekly</a:t>
+              <a:t>Create your own workflow skill to automate something you do daily/weekly</a:t>
             </a:r>
             <a:endParaRPr b="0" lang="en-US" sz="1400" spc="-1" strike="noStrike">
               <a:latin typeface="Arial"/>
@@ -25572,7 +25652,7 @@
         <p:spPr>
           <a:xfrm>
             <a:off x="9120960" y="1645920"/>
-            <a:ext cx="2612160" cy="4387680"/>
+            <a:ext cx="2611800" cy="4387320"/>
           </a:xfrm>
           <a:prstGeom prst="roundRect">
             <a:avLst>
@@ -25605,6 +25685,10 @@
           </a:effectRef>
           <a:fontRef idx="minor"/>
         </p:style>
+        <p:txBody>
+          <a:bodyPr/>
+          <a:p/>
+        </p:txBody>
       </p:sp>
       <p:sp>
         <p:nvSpPr>
@@ -25615,7 +25699,7 @@
         <p:spPr>
           <a:xfrm>
             <a:off x="9120960" y="1645920"/>
-            <a:ext cx="2612160" cy="90000"/>
+            <a:ext cx="2611800" cy="89640"/>
           </a:xfrm>
           <a:prstGeom prst="rect">
             <a:avLst/>
@@ -25646,6 +25730,10 @@
           </a:effectRef>
           <a:fontRef idx="minor"/>
         </p:style>
+        <p:txBody>
+          <a:bodyPr/>
+          <a:p/>
+        </p:txBody>
       </p:sp>
       <p:sp>
         <p:nvSpPr>
@@ -25656,7 +25744,7 @@
         <p:spPr>
           <a:xfrm>
             <a:off x="9376200" y="1920240"/>
-            <a:ext cx="585360" cy="455400"/>
+            <a:ext cx="585000" cy="455400"/>
           </a:xfrm>
           <a:prstGeom prst="rect">
             <a:avLst/>
@@ -25707,7 +25795,7 @@
         <p:spPr>
           <a:xfrm>
             <a:off x="9303840" y="2560320"/>
-            <a:ext cx="2246400" cy="363960"/>
+            <a:ext cx="2246040" cy="363960"/>
           </a:xfrm>
           <a:prstGeom prst="rect">
             <a:avLst/>
@@ -25758,7 +25846,7 @@
         <p:spPr>
           <a:xfrm>
             <a:off x="9303840" y="3474720"/>
-            <a:ext cx="2246400" cy="729000"/>
+            <a:ext cx="2246040" cy="729000"/>
           </a:xfrm>
           <a:prstGeom prst="rect">
             <a:avLst/>
@@ -25792,7 +25880,7 @@
                 <a:latin typeface="Inter"/>
                 <a:ea typeface="DejaVu Sans"/>
               </a:rPr>
-              <a:t>Build anything on top of an AI-optimized codebase (Next.js)</a:t>
+              <a:t>Build anything on top of an AI-optimized codebase (Python/FastAPI)</a:t>
             </a:r>
             <a:endParaRPr b="0" lang="en-US" sz="1400" spc="-1" strike="noStrike">
               <a:latin typeface="Arial"/>
@@ -25846,7 +25934,7 @@
         <p:spPr>
           <a:xfrm>
             <a:off x="0" y="0"/>
-            <a:ext cx="4113360" cy="6856560"/>
+            <a:ext cx="4113000" cy="6856200"/>
           </a:xfrm>
           <a:prstGeom prst="rect">
             <a:avLst/>
@@ -25887,7 +25975,7 @@
         <p:spPr>
           <a:xfrm>
             <a:off x="520200" y="2560320"/>
-            <a:ext cx="3072600" cy="1613520"/>
+            <a:ext cx="3072240" cy="1613520"/>
           </a:xfrm>
           <a:prstGeom prst="rect">
             <a:avLst/>
@@ -25938,7 +26026,7 @@
         <p:spPr>
           <a:xfrm>
             <a:off x="4114800" y="1371600"/>
-            <a:ext cx="71640" cy="4113360"/>
+            <a:ext cx="71280" cy="4113000"/>
           </a:xfrm>
           <a:prstGeom prst="rect">
             <a:avLst/>
@@ -25979,7 +26067,7 @@
         <p:spPr>
           <a:xfrm>
             <a:off x="4754880" y="2194560"/>
-            <a:ext cx="6856560" cy="1430280"/>
+            <a:ext cx="6856200" cy="1430280"/>
           </a:xfrm>
           <a:prstGeom prst="rect">
             <a:avLst/>
@@ -26030,7 +26118,7 @@
         <p:spPr>
           <a:xfrm>
             <a:off x="4754880" y="3657600"/>
-            <a:ext cx="6856560" cy="394560"/>
+            <a:ext cx="6856200" cy="394560"/>
           </a:xfrm>
           <a:prstGeom prst="rect">
             <a:avLst/>
@@ -26118,7 +26206,7 @@
         <p:spPr>
           <a:xfrm>
             <a:off x="3303720" y="365760"/>
-            <a:ext cx="5582520" cy="638280"/>
+            <a:ext cx="5582160" cy="638280"/>
           </a:xfrm>
           <a:prstGeom prst="rect">
             <a:avLst/>
@@ -26169,7 +26257,7 @@
         <p:spPr>
           <a:xfrm>
             <a:off x="457200" y="1234440"/>
-            <a:ext cx="2284560" cy="53280"/>
+            <a:ext cx="2284200" cy="52920"/>
           </a:xfrm>
           <a:prstGeom prst="rect">
             <a:avLst/>
@@ -26210,7 +26298,7 @@
         <p:spPr>
           <a:xfrm>
             <a:off x="457200" y="1645920"/>
-            <a:ext cx="5302080" cy="4570560"/>
+            <a:ext cx="5301720" cy="4570200"/>
           </a:xfrm>
           <a:prstGeom prst="roundRect">
             <a:avLst>
@@ -26253,7 +26341,7 @@
         <p:spPr>
           <a:xfrm>
             <a:off x="1412640" y="1920240"/>
-            <a:ext cx="3391200" cy="394560"/>
+            <a:ext cx="3390840" cy="394560"/>
           </a:xfrm>
           <a:prstGeom prst="rect">
             <a:avLst/>
@@ -26304,7 +26392,7 @@
         <p:spPr>
           <a:xfrm>
             <a:off x="731520" y="2560320"/>
-            <a:ext cx="4753440" cy="333000"/>
+            <a:ext cx="4753080" cy="333000"/>
           </a:xfrm>
           <a:prstGeom prst="rect">
             <a:avLst/>
@@ -26365,7 +26453,7 @@
         <p:spPr>
           <a:xfrm>
             <a:off x="731520" y="3383280"/>
-            <a:ext cx="4753440" cy="333000"/>
+            <a:ext cx="4753080" cy="333000"/>
           </a:xfrm>
           <a:prstGeom prst="rect">
             <a:avLst/>
@@ -26426,7 +26514,7 @@
         <p:spPr>
           <a:xfrm>
             <a:off x="731520" y="4206240"/>
-            <a:ext cx="4753440" cy="333000"/>
+            <a:ext cx="4753080" cy="333000"/>
           </a:xfrm>
           <a:prstGeom prst="rect">
             <a:avLst/>
@@ -26487,7 +26575,7 @@
         <p:spPr>
           <a:xfrm>
             <a:off x="731520" y="5029200"/>
-            <a:ext cx="4753440" cy="333000"/>
+            <a:ext cx="4753080" cy="333000"/>
           </a:xfrm>
           <a:prstGeom prst="rect">
             <a:avLst/>
@@ -26548,7 +26636,7 @@
         <p:spPr>
           <a:xfrm>
             <a:off x="6400800" y="1645920"/>
-            <a:ext cx="5302080" cy="4570560"/>
+            <a:ext cx="5301720" cy="4570200"/>
           </a:xfrm>
           <a:prstGeom prst="roundRect">
             <a:avLst>
@@ -26591,7 +26679,7 @@
         <p:spPr>
           <a:xfrm>
             <a:off x="7979400" y="1920240"/>
-            <a:ext cx="2144520" cy="394560"/>
+            <a:ext cx="2144160" cy="394560"/>
           </a:xfrm>
           <a:prstGeom prst="rect">
             <a:avLst/>
@@ -26642,7 +26730,7 @@
         <p:spPr>
           <a:xfrm>
             <a:off x="6675120" y="2560320"/>
-            <a:ext cx="4753440" cy="333000"/>
+            <a:ext cx="4753080" cy="333000"/>
           </a:xfrm>
           <a:prstGeom prst="rect">
             <a:avLst/>
@@ -26703,7 +26791,7 @@
         <p:spPr>
           <a:xfrm>
             <a:off x="6675120" y="3383280"/>
-            <a:ext cx="4753440" cy="333000"/>
+            <a:ext cx="4753080" cy="333000"/>
           </a:xfrm>
           <a:prstGeom prst="rect">
             <a:avLst/>
@@ -26764,7 +26852,7 @@
         <p:spPr>
           <a:xfrm>
             <a:off x="6675120" y="4206240"/>
-            <a:ext cx="4753440" cy="333000"/>
+            <a:ext cx="4753080" cy="333000"/>
           </a:xfrm>
           <a:prstGeom prst="rect">
             <a:avLst/>
@@ -26825,7 +26913,7 @@
         <p:spPr>
           <a:xfrm>
             <a:off x="6675120" y="5029200"/>
-            <a:ext cx="4753440" cy="333000"/>
+            <a:ext cx="4753080" cy="333000"/>
           </a:xfrm>
           <a:prstGeom prst="rect">
             <a:avLst/>
@@ -26923,7 +27011,7 @@
         <p:spPr>
           <a:xfrm>
             <a:off x="2858040" y="457200"/>
-            <a:ext cx="6474240" cy="699120"/>
+            <a:ext cx="6473880" cy="699120"/>
           </a:xfrm>
           <a:prstGeom prst="rect">
             <a:avLst/>
@@ -26974,7 +27062,7 @@
         <p:spPr>
           <a:xfrm>
             <a:off x="868680" y="1965960"/>
-            <a:ext cx="3839040" cy="3656160"/>
+            <a:ext cx="3838680" cy="3655800"/>
           </a:xfrm>
           <a:prstGeom prst="roundRect">
             <a:avLst>
@@ -27017,7 +27105,7 @@
         <p:spPr>
           <a:xfrm>
             <a:off x="731520" y="1828800"/>
-            <a:ext cx="3839040" cy="3656160"/>
+            <a:ext cx="3838680" cy="3655800"/>
           </a:xfrm>
           <a:prstGeom prst="roundRect">
             <a:avLst>
@@ -27060,7 +27148,7 @@
         <p:spPr>
           <a:xfrm>
             <a:off x="1005840" y="2103120"/>
-            <a:ext cx="730080" cy="108360"/>
+            <a:ext cx="729720" cy="108000"/>
           </a:xfrm>
           <a:prstGeom prst="rect">
             <a:avLst/>
@@ -27101,7 +27189,7 @@
         <p:spPr>
           <a:xfrm>
             <a:off x="1100880" y="2377440"/>
-            <a:ext cx="722520" cy="577080"/>
+            <a:ext cx="722160" cy="577080"/>
           </a:xfrm>
           <a:prstGeom prst="rect">
             <a:avLst/>
@@ -27152,7 +27240,7 @@
         <p:spPr>
           <a:xfrm>
             <a:off x="1005840" y="3200400"/>
-            <a:ext cx="3290400" cy="394560"/>
+            <a:ext cx="3290040" cy="394560"/>
           </a:xfrm>
           <a:prstGeom prst="rect">
             <a:avLst/>
@@ -27203,7 +27291,7 @@
         <p:spPr>
           <a:xfrm>
             <a:off x="960840" y="4206240"/>
-            <a:ext cx="3290400" cy="576360"/>
+            <a:ext cx="3290040" cy="576360"/>
           </a:xfrm>
           <a:prstGeom prst="rect">
             <a:avLst/>
@@ -27254,7 +27342,7 @@
         <p:spPr>
           <a:xfrm>
             <a:off x="4251960" y="2331720"/>
-            <a:ext cx="3839040" cy="3656160"/>
+            <a:ext cx="3838680" cy="3655800"/>
           </a:xfrm>
           <a:prstGeom prst="roundRect">
             <a:avLst>
@@ -27297,7 +27385,7 @@
         <p:spPr>
           <a:xfrm>
             <a:off x="4114800" y="2194560"/>
-            <a:ext cx="3839040" cy="3656160"/>
+            <a:ext cx="3838680" cy="3655800"/>
           </a:xfrm>
           <a:prstGeom prst="roundRect">
             <a:avLst>
@@ -27340,7 +27428,7 @@
         <p:spPr>
           <a:xfrm>
             <a:off x="4389120" y="2468880"/>
-            <a:ext cx="730080" cy="108360"/>
+            <a:ext cx="729720" cy="108000"/>
           </a:xfrm>
           <a:prstGeom prst="rect">
             <a:avLst/>
@@ -27381,7 +27469,7 @@
         <p:spPr>
           <a:xfrm>
             <a:off x="4484160" y="2743200"/>
-            <a:ext cx="722520" cy="577080"/>
+            <a:ext cx="722160" cy="577080"/>
           </a:xfrm>
           <a:prstGeom prst="rect">
             <a:avLst/>
@@ -27432,7 +27520,7 @@
         <p:spPr>
           <a:xfrm>
             <a:off x="4389120" y="3566160"/>
-            <a:ext cx="3290400" cy="394560"/>
+            <a:ext cx="3290040" cy="394560"/>
           </a:xfrm>
           <a:prstGeom prst="rect">
             <a:avLst/>
@@ -27483,7 +27571,7 @@
         <p:spPr>
           <a:xfrm>
             <a:off x="4389120" y="4572000"/>
-            <a:ext cx="3290400" cy="576360"/>
+            <a:ext cx="3290040" cy="576360"/>
           </a:xfrm>
           <a:prstGeom prst="rect">
             <a:avLst/>
@@ -27534,7 +27622,7 @@
         <p:spPr>
           <a:xfrm>
             <a:off x="7635240" y="1783080"/>
-            <a:ext cx="3839040" cy="3656160"/>
+            <a:ext cx="3838680" cy="3655800"/>
           </a:xfrm>
           <a:prstGeom prst="roundRect">
             <a:avLst>
@@ -27577,7 +27665,7 @@
         <p:spPr>
           <a:xfrm>
             <a:off x="7498080" y="1645920"/>
-            <a:ext cx="3839040" cy="3656160"/>
+            <a:ext cx="3838680" cy="3655800"/>
           </a:xfrm>
           <a:prstGeom prst="roundRect">
             <a:avLst>
@@ -27620,7 +27708,7 @@
         <p:spPr>
           <a:xfrm>
             <a:off x="7772400" y="1920240"/>
-            <a:ext cx="730080" cy="108360"/>
+            <a:ext cx="729720" cy="108000"/>
           </a:xfrm>
           <a:prstGeom prst="rect">
             <a:avLst/>
@@ -27661,7 +27749,7 @@
         <p:spPr>
           <a:xfrm>
             <a:off x="7867440" y="2194560"/>
-            <a:ext cx="722520" cy="577080"/>
+            <a:ext cx="722160" cy="577080"/>
           </a:xfrm>
           <a:prstGeom prst="rect">
             <a:avLst/>
@@ -27712,7 +27800,7 @@
         <p:spPr>
           <a:xfrm>
             <a:off x="7772400" y="3017520"/>
-            <a:ext cx="3290400" cy="394560"/>
+            <a:ext cx="3290040" cy="394560"/>
           </a:xfrm>
           <a:prstGeom prst="rect">
             <a:avLst/>
@@ -27763,7 +27851,7 @@
         <p:spPr>
           <a:xfrm>
             <a:off x="7772400" y="4023360"/>
-            <a:ext cx="3290400" cy="576360"/>
+            <a:ext cx="3290040" cy="576360"/>
           </a:xfrm>
           <a:prstGeom prst="rect">
             <a:avLst/>
@@ -27851,7 +27939,7 @@
         <p:spPr>
           <a:xfrm>
             <a:off x="0" y="0"/>
-            <a:ext cx="4113360" cy="6856560"/>
+            <a:ext cx="4113000" cy="6856200"/>
           </a:xfrm>
           <a:prstGeom prst="rect">
             <a:avLst/>
@@ -27892,7 +27980,7 @@
         <p:spPr>
           <a:xfrm>
             <a:off x="709200" y="2560320"/>
-            <a:ext cx="2694600" cy="1004040"/>
+            <a:ext cx="2694240" cy="1004040"/>
           </a:xfrm>
           <a:prstGeom prst="rect">
             <a:avLst/>
@@ -27943,7 +28031,7 @@
         <p:spPr>
           <a:xfrm>
             <a:off x="4114800" y="1371600"/>
-            <a:ext cx="71640" cy="4113360"/>
+            <a:ext cx="71280" cy="4113000"/>
           </a:xfrm>
           <a:prstGeom prst="rect">
             <a:avLst/>
@@ -27984,7 +28072,7 @@
         <p:spPr>
           <a:xfrm>
             <a:off x="4754880" y="2194560"/>
-            <a:ext cx="6856560" cy="759960"/>
+            <a:ext cx="6856200" cy="759960"/>
           </a:xfrm>
           <a:prstGeom prst="rect">
             <a:avLst/>
@@ -28035,7 +28123,7 @@
         <p:spPr>
           <a:xfrm>
             <a:off x="4754880" y="3657600"/>
-            <a:ext cx="6856560" cy="394560"/>
+            <a:ext cx="6856200" cy="394560"/>
           </a:xfrm>
           <a:prstGeom prst="rect">
             <a:avLst/>
@@ -28123,7 +28211,7 @@
         <p:spPr>
           <a:xfrm>
             <a:off x="2742120" y="365760"/>
-            <a:ext cx="6705720" cy="638280"/>
+            <a:ext cx="6705360" cy="638280"/>
           </a:xfrm>
           <a:prstGeom prst="rect">
             <a:avLst/>
@@ -28174,7 +28262,7 @@
         <p:spPr>
           <a:xfrm>
             <a:off x="457200" y="1234440"/>
-            <a:ext cx="2284560" cy="53280"/>
+            <a:ext cx="2284200" cy="52920"/>
           </a:xfrm>
           <a:prstGeom prst="rect">
             <a:avLst/>
@@ -28215,7 +28303,7 @@
         <p:spPr>
           <a:xfrm>
             <a:off x="457200" y="1645920"/>
-            <a:ext cx="2612160" cy="4387680"/>
+            <a:ext cx="2611800" cy="4387320"/>
           </a:xfrm>
           <a:prstGeom prst="roundRect">
             <a:avLst>
@@ -28258,7 +28346,7 @@
         <p:spPr>
           <a:xfrm>
             <a:off x="457200" y="1645920"/>
-            <a:ext cx="2612160" cy="90000"/>
+            <a:ext cx="2611800" cy="89640"/>
           </a:xfrm>
           <a:prstGeom prst="rect">
             <a:avLst/>
@@ -28299,7 +28387,7 @@
         <p:spPr>
           <a:xfrm>
             <a:off x="640080" y="2103120"/>
-            <a:ext cx="2246400" cy="363960"/>
+            <a:ext cx="2246040" cy="363960"/>
           </a:xfrm>
           <a:prstGeom prst="rect">
             <a:avLst/>
@@ -28350,7 +28438,7 @@
         <p:spPr>
           <a:xfrm>
             <a:off x="640080" y="3108960"/>
-            <a:ext cx="2246400" cy="1155240"/>
+            <a:ext cx="2246040" cy="1155240"/>
           </a:xfrm>
           <a:prstGeom prst="rect">
             <a:avLst/>
@@ -28401,7 +28489,7 @@
         <p:spPr>
           <a:xfrm>
             <a:off x="3345120" y="1645920"/>
-            <a:ext cx="2612160" cy="4387680"/>
+            <a:ext cx="2611800" cy="4387320"/>
           </a:xfrm>
           <a:prstGeom prst="roundRect">
             <a:avLst>
@@ -28444,7 +28532,7 @@
         <p:spPr>
           <a:xfrm>
             <a:off x="3345120" y="1645920"/>
-            <a:ext cx="2612160" cy="90000"/>
+            <a:ext cx="2611800" cy="89640"/>
           </a:xfrm>
           <a:prstGeom prst="rect">
             <a:avLst/>
@@ -28485,7 +28573,7 @@
         <p:spPr>
           <a:xfrm>
             <a:off x="3528000" y="2103120"/>
-            <a:ext cx="2246400" cy="363960"/>
+            <a:ext cx="2246040" cy="363960"/>
           </a:xfrm>
           <a:prstGeom prst="rect">
             <a:avLst/>
@@ -28536,7 +28624,7 @@
         <p:spPr>
           <a:xfrm>
             <a:off x="3528000" y="3108960"/>
-            <a:ext cx="2246400" cy="515880"/>
+            <a:ext cx="2246040" cy="515880"/>
           </a:xfrm>
           <a:prstGeom prst="rect">
             <a:avLst/>
@@ -28587,7 +28675,7 @@
         <p:spPr>
           <a:xfrm>
             <a:off x="6233040" y="1645920"/>
-            <a:ext cx="2612160" cy="4387680"/>
+            <a:ext cx="2611800" cy="4387320"/>
           </a:xfrm>
           <a:prstGeom prst="roundRect">
             <a:avLst>
@@ -28630,7 +28718,7 @@
         <p:spPr>
           <a:xfrm>
             <a:off x="6233040" y="1645920"/>
-            <a:ext cx="2612160" cy="90000"/>
+            <a:ext cx="2611800" cy="89640"/>
           </a:xfrm>
           <a:prstGeom prst="rect">
             <a:avLst/>
@@ -28671,7 +28759,7 @@
         <p:spPr>
           <a:xfrm>
             <a:off x="6415920" y="2103120"/>
-            <a:ext cx="2246400" cy="363960"/>
+            <a:ext cx="2246040" cy="363960"/>
           </a:xfrm>
           <a:prstGeom prst="rect">
             <a:avLst/>
@@ -28722,7 +28810,7 @@
         <p:spPr>
           <a:xfrm>
             <a:off x="6415920" y="3108960"/>
-            <a:ext cx="2246400" cy="515880"/>
+            <a:ext cx="2246040" cy="515880"/>
           </a:xfrm>
           <a:prstGeom prst="rect">
             <a:avLst/>
@@ -28773,7 +28861,7 @@
         <p:spPr>
           <a:xfrm>
             <a:off x="9120960" y="1645920"/>
-            <a:ext cx="2612160" cy="4387680"/>
+            <a:ext cx="2611800" cy="4387320"/>
           </a:xfrm>
           <a:prstGeom prst="roundRect">
             <a:avLst>
@@ -28816,7 +28904,7 @@
         <p:spPr>
           <a:xfrm>
             <a:off x="9120960" y="1645920"/>
-            <a:ext cx="2612160" cy="90000"/>
+            <a:ext cx="2611800" cy="89640"/>
           </a:xfrm>
           <a:prstGeom prst="rect">
             <a:avLst/>
@@ -28857,7 +28945,7 @@
         <p:spPr>
           <a:xfrm>
             <a:off x="9303840" y="2103120"/>
-            <a:ext cx="2246400" cy="363960"/>
+            <a:ext cx="2246040" cy="363960"/>
           </a:xfrm>
           <a:prstGeom prst="rect">
             <a:avLst/>
@@ -28908,7 +28996,7 @@
         <p:spPr>
           <a:xfrm>
             <a:off x="9303840" y="3108960"/>
-            <a:ext cx="2246400" cy="515880"/>
+            <a:ext cx="2246040" cy="515880"/>
           </a:xfrm>
           <a:prstGeom prst="rect">
             <a:avLst/>
@@ -29047,7 +29135,7 @@
         <p:spPr>
           <a:xfrm>
             <a:off x="457200" y="1234440"/>
-            <a:ext cx="2284560" cy="53280"/>
+            <a:ext cx="2284200" cy="52920"/>
           </a:xfrm>
           <a:prstGeom prst="rect">
             <a:avLst/>
@@ -29088,7 +29176,7 @@
         <p:spPr>
           <a:xfrm>
             <a:off x="457200" y="1645920"/>
-            <a:ext cx="5302080" cy="4753440"/>
+            <a:ext cx="5301720" cy="4753080"/>
           </a:xfrm>
           <a:prstGeom prst="roundRect">
             <a:avLst>
@@ -29131,7 +29219,7 @@
         <p:spPr>
           <a:xfrm>
             <a:off x="1773000" y="1920240"/>
-            <a:ext cx="2670120" cy="394560"/>
+            <a:ext cx="2669760" cy="394560"/>
           </a:xfrm>
           <a:prstGeom prst="rect">
             <a:avLst/>
@@ -29182,7 +29270,7 @@
         <p:spPr>
           <a:xfrm>
             <a:off x="731520" y="2560320"/>
-            <a:ext cx="4753440" cy="317880"/>
+            <a:ext cx="4753080" cy="317880"/>
           </a:xfrm>
           <a:prstGeom prst="rect">
             <a:avLst/>
@@ -29243,7 +29331,7 @@
         <p:spPr>
           <a:xfrm>
             <a:off x="731520" y="3246120"/>
-            <a:ext cx="4753440" cy="317880"/>
+            <a:ext cx="4753080" cy="317880"/>
           </a:xfrm>
           <a:prstGeom prst="rect">
             <a:avLst/>
@@ -29304,7 +29392,7 @@
         <p:spPr>
           <a:xfrm>
             <a:off x="731520" y="3931920"/>
-            <a:ext cx="4753440" cy="317880"/>
+            <a:ext cx="4753080" cy="317880"/>
           </a:xfrm>
           <a:prstGeom prst="rect">
             <a:avLst/>
@@ -29365,7 +29453,7 @@
         <p:spPr>
           <a:xfrm>
             <a:off x="731520" y="4617720"/>
-            <a:ext cx="4753440" cy="317880"/>
+            <a:ext cx="4753080" cy="317880"/>
           </a:xfrm>
           <a:prstGeom prst="rect">
             <a:avLst/>
@@ -29426,7 +29514,7 @@
         <p:spPr>
           <a:xfrm>
             <a:off x="731520" y="5303520"/>
-            <a:ext cx="4753440" cy="317880"/>
+            <a:ext cx="4753080" cy="317880"/>
           </a:xfrm>
           <a:prstGeom prst="rect">
             <a:avLst/>
@@ -29487,7 +29575,7 @@
         <p:spPr>
           <a:xfrm>
             <a:off x="6400800" y="1645920"/>
-            <a:ext cx="5302080" cy="4753440"/>
+            <a:ext cx="5301720" cy="4753080"/>
           </a:xfrm>
           <a:prstGeom prst="roundRect">
             <a:avLst>
@@ -29530,7 +29618,7 @@
         <p:spPr>
           <a:xfrm>
             <a:off x="7058880" y="1920240"/>
-            <a:ext cx="3985560" cy="394560"/>
+            <a:ext cx="3985200" cy="394560"/>
           </a:xfrm>
           <a:prstGeom prst="rect">
             <a:avLst/>
@@ -29581,7 +29669,7 @@
         <p:spPr>
           <a:xfrm>
             <a:off x="6675120" y="2560320"/>
-            <a:ext cx="4753440" cy="317880"/>
+            <a:ext cx="4753080" cy="317880"/>
           </a:xfrm>
           <a:prstGeom prst="rect">
             <a:avLst/>
@@ -29642,7 +29730,7 @@
         <p:spPr>
           <a:xfrm>
             <a:off x="6675120" y="3246120"/>
-            <a:ext cx="4753440" cy="317880"/>
+            <a:ext cx="4753080" cy="317880"/>
           </a:xfrm>
           <a:prstGeom prst="rect">
             <a:avLst/>
@@ -29703,7 +29791,7 @@
         <p:spPr>
           <a:xfrm>
             <a:off x="6675120" y="3931920"/>
-            <a:ext cx="4753440" cy="317880"/>
+            <a:ext cx="4753080" cy="317880"/>
           </a:xfrm>
           <a:prstGeom prst="rect">
             <a:avLst/>
@@ -29764,7 +29852,7 @@
         <p:spPr>
           <a:xfrm>
             <a:off x="6675120" y="4617720"/>
-            <a:ext cx="4753440" cy="317880"/>
+            <a:ext cx="4753080" cy="317880"/>
           </a:xfrm>
           <a:prstGeom prst="rect">
             <a:avLst/>
@@ -29825,7 +29913,7 @@
         <p:spPr>
           <a:xfrm>
             <a:off x="6675120" y="5303520"/>
-            <a:ext cx="4753440" cy="317880"/>
+            <a:ext cx="4753080" cy="317880"/>
           </a:xfrm>
           <a:prstGeom prst="rect">
             <a:avLst/>
@@ -29923,7 +30011,7 @@
         <p:spPr>
           <a:xfrm>
             <a:off x="0" y="0"/>
-            <a:ext cx="71640" cy="6856560"/>
+            <a:ext cx="71280" cy="6856200"/>
           </a:xfrm>
           <a:prstGeom prst="rect">
             <a:avLst/>
@@ -29964,7 +30052,7 @@
         <p:spPr>
           <a:xfrm>
             <a:off x="2299680" y="457200"/>
-            <a:ext cx="7469280" cy="638280"/>
+            <a:ext cx="7468920" cy="638280"/>
           </a:xfrm>
           <a:prstGeom prst="rect">
             <a:avLst/>
@@ -30015,7 +30103,7 @@
         <p:spPr>
           <a:xfrm>
             <a:off x="548640" y="1371600"/>
-            <a:ext cx="2284560" cy="53280"/>
+            <a:ext cx="2284200" cy="52920"/>
           </a:xfrm>
           <a:prstGeom prst="rect">
             <a:avLst/>
@@ -30056,7 +30144,7 @@
         <p:spPr>
           <a:xfrm>
             <a:off x="548640" y="1965960"/>
-            <a:ext cx="108360" cy="108360"/>
+            <a:ext cx="108000" cy="108000"/>
           </a:xfrm>
           <a:prstGeom prst="rect">
             <a:avLst/>
@@ -30097,7 +30185,7 @@
         <p:spPr>
           <a:xfrm>
             <a:off x="914400" y="1828800"/>
-            <a:ext cx="10514160" cy="424800"/>
+            <a:ext cx="10513800" cy="424800"/>
           </a:xfrm>
           <a:prstGeom prst="rect">
             <a:avLst/>
@@ -30148,7 +30236,7 @@
         <p:spPr>
           <a:xfrm>
             <a:off x="548640" y="3063240"/>
-            <a:ext cx="108360" cy="108360"/>
+            <a:ext cx="108000" cy="108000"/>
           </a:xfrm>
           <a:prstGeom prst="rect">
             <a:avLst/>
@@ -30189,7 +30277,7 @@
         <p:spPr>
           <a:xfrm>
             <a:off x="914400" y="2926080"/>
-            <a:ext cx="10514160" cy="424800"/>
+            <a:ext cx="10513800" cy="424800"/>
           </a:xfrm>
           <a:prstGeom prst="rect">
             <a:avLst/>
@@ -30240,7 +30328,7 @@
         <p:spPr>
           <a:xfrm>
             <a:off x="548640" y="4160520"/>
-            <a:ext cx="108360" cy="108360"/>
+            <a:ext cx="108000" cy="108000"/>
           </a:xfrm>
           <a:prstGeom prst="rect">
             <a:avLst/>
@@ -30281,7 +30369,7 @@
         <p:spPr>
           <a:xfrm>
             <a:off x="914400" y="4023360"/>
-            <a:ext cx="10514160" cy="424800"/>
+            <a:ext cx="10513800" cy="424800"/>
           </a:xfrm>
           <a:prstGeom prst="rect">
             <a:avLst/>
@@ -30332,7 +30420,7 @@
         <p:spPr>
           <a:xfrm>
             <a:off x="548640" y="5257800"/>
-            <a:ext cx="108360" cy="108360"/>
+            <a:ext cx="108000" cy="108000"/>
           </a:xfrm>
           <a:prstGeom prst="rect">
             <a:avLst/>
@@ -30373,7 +30461,7 @@
         <p:spPr>
           <a:xfrm>
             <a:off x="914400" y="5120640"/>
-            <a:ext cx="10514160" cy="424800"/>
+            <a:ext cx="10513800" cy="424800"/>
           </a:xfrm>
           <a:prstGeom prst="rect">
             <a:avLst/>
@@ -30461,7 +30549,7 @@
         <p:spPr>
           <a:xfrm>
             <a:off x="3839400" y="457200"/>
-            <a:ext cx="4511160" cy="699120"/>
+            <a:ext cx="4510800" cy="699120"/>
           </a:xfrm>
           <a:prstGeom prst="rect">
             <a:avLst/>
@@ -30512,7 +30600,7 @@
         <p:spPr>
           <a:xfrm>
             <a:off x="868680" y="1965960"/>
-            <a:ext cx="3839040" cy="3656160"/>
+            <a:ext cx="3838680" cy="3655800"/>
           </a:xfrm>
           <a:prstGeom prst="roundRect">
             <a:avLst>
@@ -30555,7 +30643,7 @@
         <p:spPr>
           <a:xfrm>
             <a:off x="731520" y="1828800"/>
-            <a:ext cx="3839040" cy="3656160"/>
+            <a:ext cx="3838680" cy="3655800"/>
           </a:xfrm>
           <a:prstGeom prst="roundRect">
             <a:avLst>
@@ -30598,7 +30686,7 @@
         <p:spPr>
           <a:xfrm>
             <a:off x="1005840" y="2103120"/>
-            <a:ext cx="730080" cy="108360"/>
+            <a:ext cx="729720" cy="108000"/>
           </a:xfrm>
           <a:prstGeom prst="rect">
             <a:avLst/>
@@ -30639,7 +30727,7 @@
         <p:spPr>
           <a:xfrm>
             <a:off x="1100880" y="2377440"/>
-            <a:ext cx="722520" cy="577080"/>
+            <a:ext cx="722160" cy="577080"/>
           </a:xfrm>
           <a:prstGeom prst="rect">
             <a:avLst/>
@@ -30690,7 +30778,7 @@
         <p:spPr>
           <a:xfrm>
             <a:off x="1005840" y="3200400"/>
-            <a:ext cx="3290400" cy="394560"/>
+            <a:ext cx="3290040" cy="394560"/>
           </a:xfrm>
           <a:prstGeom prst="rect">
             <a:avLst/>
@@ -30741,7 +30829,7 @@
         <p:spPr>
           <a:xfrm>
             <a:off x="1005840" y="4206240"/>
-            <a:ext cx="3290400" cy="819720"/>
+            <a:ext cx="3290040" cy="819720"/>
           </a:xfrm>
           <a:prstGeom prst="rect">
             <a:avLst/>
@@ -30792,7 +30880,7 @@
         <p:spPr>
           <a:xfrm>
             <a:off x="4251960" y="2331720"/>
-            <a:ext cx="3839040" cy="3656160"/>
+            <a:ext cx="3838680" cy="3655800"/>
           </a:xfrm>
           <a:prstGeom prst="roundRect">
             <a:avLst>
@@ -30835,7 +30923,7 @@
         <p:spPr>
           <a:xfrm>
             <a:off x="4114800" y="2194560"/>
-            <a:ext cx="3839040" cy="3656160"/>
+            <a:ext cx="3838680" cy="3655800"/>
           </a:xfrm>
           <a:prstGeom prst="roundRect">
             <a:avLst>
@@ -30878,7 +30966,7 @@
         <p:spPr>
           <a:xfrm>
             <a:off x="4389120" y="2468880"/>
-            <a:ext cx="730080" cy="108360"/>
+            <a:ext cx="729720" cy="108000"/>
           </a:xfrm>
           <a:prstGeom prst="rect">
             <a:avLst/>
@@ -30919,7 +31007,7 @@
         <p:spPr>
           <a:xfrm>
             <a:off x="4484160" y="2743200"/>
-            <a:ext cx="722520" cy="577080"/>
+            <a:ext cx="722160" cy="577080"/>
           </a:xfrm>
           <a:prstGeom prst="rect">
             <a:avLst/>
@@ -30970,7 +31058,7 @@
         <p:spPr>
           <a:xfrm>
             <a:off x="4389120" y="3566160"/>
-            <a:ext cx="3290400" cy="394560"/>
+            <a:ext cx="3290040" cy="394560"/>
           </a:xfrm>
           <a:prstGeom prst="rect">
             <a:avLst/>
@@ -31021,7 +31109,7 @@
         <p:spPr>
           <a:xfrm>
             <a:off x="4389120" y="4572000"/>
-            <a:ext cx="3290400" cy="819720"/>
+            <a:ext cx="3290040" cy="819720"/>
           </a:xfrm>
           <a:prstGeom prst="rect">
             <a:avLst/>
@@ -31072,7 +31160,7 @@
         <p:spPr>
           <a:xfrm>
             <a:off x="7635240" y="1783080"/>
-            <a:ext cx="3839040" cy="3656160"/>
+            <a:ext cx="3838680" cy="3655800"/>
           </a:xfrm>
           <a:prstGeom prst="roundRect">
             <a:avLst>
@@ -31115,7 +31203,7 @@
         <p:spPr>
           <a:xfrm>
             <a:off x="7498080" y="1645920"/>
-            <a:ext cx="3839040" cy="3656160"/>
+            <a:ext cx="3838680" cy="3655800"/>
           </a:xfrm>
           <a:prstGeom prst="roundRect">
             <a:avLst>
@@ -31158,7 +31246,7 @@
         <p:spPr>
           <a:xfrm>
             <a:off x="7772400" y="1920240"/>
-            <a:ext cx="730080" cy="108360"/>
+            <a:ext cx="729720" cy="108000"/>
           </a:xfrm>
           <a:prstGeom prst="rect">
             <a:avLst/>
@@ -31199,7 +31287,7 @@
         <p:spPr>
           <a:xfrm>
             <a:off x="7867440" y="2194560"/>
-            <a:ext cx="722520" cy="577080"/>
+            <a:ext cx="722160" cy="577080"/>
           </a:xfrm>
           <a:prstGeom prst="rect">
             <a:avLst/>
@@ -31250,7 +31338,7 @@
         <p:spPr>
           <a:xfrm>
             <a:off x="7772400" y="3017520"/>
-            <a:ext cx="3290400" cy="394560"/>
+            <a:ext cx="3290040" cy="394560"/>
           </a:xfrm>
           <a:prstGeom prst="rect">
             <a:avLst/>
@@ -31301,7 +31389,7 @@
         <p:spPr>
           <a:xfrm>
             <a:off x="7772400" y="4023360"/>
-            <a:ext cx="3290400" cy="576360"/>
+            <a:ext cx="3290040" cy="576360"/>
           </a:xfrm>
           <a:prstGeom prst="rect">
             <a:avLst/>
@@ -31389,7 +31477,7 @@
         <p:spPr>
           <a:xfrm>
             <a:off x="0" y="0"/>
-            <a:ext cx="71640" cy="6857280"/>
+            <a:ext cx="71280" cy="6856920"/>
           </a:xfrm>
           <a:prstGeom prst="rect">
             <a:avLst/>
@@ -31420,6 +31508,10 @@
           </a:effectRef>
           <a:fontRef idx="minor"/>
         </p:style>
+        <p:txBody>
+          <a:bodyPr/>
+          <a:p/>
+        </p:txBody>
       </p:sp>
       <p:sp>
         <p:nvSpPr>
@@ -31430,7 +31522,7 @@
         <p:spPr>
           <a:xfrm>
             <a:off x="1517760" y="457200"/>
-            <a:ext cx="9033480" cy="639360"/>
+            <a:ext cx="9033120" cy="639000"/>
           </a:xfrm>
           <a:prstGeom prst="rect">
             <a:avLst/>
@@ -31494,7 +31586,7 @@
         <p:spPr>
           <a:xfrm>
             <a:off x="548640" y="1371600"/>
-            <a:ext cx="2285280" cy="54000"/>
+            <a:ext cx="2284920" cy="53640"/>
           </a:xfrm>
           <a:prstGeom prst="rect">
             <a:avLst/>
@@ -31525,6 +31617,10 @@
           </a:effectRef>
           <a:fontRef idx="minor"/>
         </p:style>
+        <p:txBody>
+          <a:bodyPr/>
+          <a:p/>
+        </p:txBody>
       </p:sp>
       <p:sp>
         <p:nvSpPr>
@@ -31535,7 +31631,7 @@
         <p:spPr>
           <a:xfrm>
             <a:off x="548640" y="1828800"/>
-            <a:ext cx="10972080" cy="392400"/>
+            <a:ext cx="10971720" cy="392040"/>
           </a:xfrm>
           <a:prstGeom prst="rect">
             <a:avLst/>
@@ -31599,7 +31695,7 @@
         <p:spPr>
           <a:xfrm>
             <a:off x="548640" y="2560320"/>
-            <a:ext cx="10972080" cy="365040"/>
+            <a:ext cx="10971720" cy="364680"/>
           </a:xfrm>
           <a:prstGeom prst="rect">
             <a:avLst/>
@@ -31646,7 +31742,7 @@
                 <a:latin typeface="Consolas"/>
                 <a:ea typeface="DejaVu Sans"/>
               </a:rPr>
-              <a:t>git clone https://github.com/dynamous-business/ai-optimized-starter</a:t>
+              <a:t>git clone https://github.com/dynamous-business/python-ai-optimized-codebase</a:t>
             </a:r>
             <a:endParaRPr b="0" lang="en-US" sz="1800" spc="-1" strike="noStrike">
               <a:latin typeface="Arial"/>
@@ -31663,7 +31759,7 @@
         <p:spPr>
           <a:xfrm>
             <a:off x="548640" y="3108960"/>
-            <a:ext cx="10972080" cy="365040"/>
+            <a:ext cx="10971720" cy="364680"/>
           </a:xfrm>
           <a:prstGeom prst="rect">
             <a:avLst/>
@@ -31710,7 +31806,7 @@
                 <a:latin typeface="Consolas"/>
                 <a:ea typeface="DejaVu Sans"/>
               </a:rPr>
-              <a:t>cd ai-optimized-starter</a:t>
+              <a:t>cd python-ai-optimized-codebase</a:t>
             </a:r>
             <a:endParaRPr b="0" lang="en-US" sz="1800" spc="-1" strike="noStrike">
               <a:latin typeface="Arial"/>
@@ -31727,7 +31823,7 @@
         <p:spPr>
           <a:xfrm>
             <a:off x="549000" y="3749040"/>
-            <a:ext cx="10972080" cy="365040"/>
+            <a:ext cx="10971720" cy="364680"/>
           </a:xfrm>
           <a:prstGeom prst="rect">
             <a:avLst/>
@@ -31801,7 +31897,7 @@
         <p:spPr>
           <a:xfrm>
             <a:off x="549000" y="4206240"/>
-            <a:ext cx="10972080" cy="365040"/>
+            <a:ext cx="10971720" cy="364680"/>
           </a:xfrm>
           <a:prstGeom prst="rect">
             <a:avLst/>
@@ -31875,7 +31971,7 @@
         <p:spPr>
           <a:xfrm>
             <a:off x="549000" y="4663440"/>
-            <a:ext cx="10972080" cy="365040"/>
+            <a:ext cx="10971720" cy="364680"/>
           </a:xfrm>
           <a:prstGeom prst="rect">
             <a:avLst/>
@@ -31949,7 +32045,7 @@
         <p:spPr>
           <a:xfrm>
             <a:off x="549000" y="5120640"/>
-            <a:ext cx="10972080" cy="365040"/>
+            <a:ext cx="10971720" cy="364680"/>
           </a:xfrm>
           <a:prstGeom prst="rect">
             <a:avLst/>
@@ -32023,7 +32119,7 @@
         <p:spPr>
           <a:xfrm>
             <a:off x="548640" y="5669280"/>
-            <a:ext cx="10972080" cy="913680"/>
+            <a:ext cx="10971720" cy="913320"/>
           </a:xfrm>
           <a:prstGeom prst="rect">
             <a:avLst/>
@@ -32054,6 +32150,10 @@
           </a:effectRef>
           <a:fontRef idx="minor"/>
         </p:style>
+        <p:txBody>
+          <a:bodyPr/>
+          <a:p/>
+        </p:txBody>
       </p:sp>
       <p:sp>
         <p:nvSpPr>
@@ -32064,7 +32164,7 @@
         <p:spPr>
           <a:xfrm>
             <a:off x="823320" y="5943600"/>
-            <a:ext cx="10423440" cy="365040"/>
+            <a:ext cx="10423080" cy="364680"/>
           </a:xfrm>
           <a:prstGeom prst="rect">
             <a:avLst/>
@@ -32165,7 +32265,7 @@
         <p:spPr>
           <a:xfrm>
             <a:off x="0" y="0"/>
-            <a:ext cx="71640" cy="6856560"/>
+            <a:ext cx="71280" cy="6856200"/>
           </a:xfrm>
           <a:prstGeom prst="rect">
             <a:avLst/>
@@ -32257,7 +32357,7 @@
         <p:spPr>
           <a:xfrm>
             <a:off x="548640" y="1371600"/>
-            <a:ext cx="2284560" cy="53280"/>
+            <a:ext cx="2284200" cy="52920"/>
           </a:xfrm>
           <a:prstGeom prst="rect">
             <a:avLst/>
@@ -32298,7 +32398,7 @@
         <p:spPr>
           <a:xfrm>
             <a:off x="548640" y="1965960"/>
-            <a:ext cx="108360" cy="108360"/>
+            <a:ext cx="108000" cy="108000"/>
           </a:xfrm>
           <a:prstGeom prst="rect">
             <a:avLst/>
@@ -32339,7 +32439,7 @@
         <p:spPr>
           <a:xfrm>
             <a:off x="914400" y="1828800"/>
-            <a:ext cx="10514160" cy="424800"/>
+            <a:ext cx="10513800" cy="424800"/>
           </a:xfrm>
           <a:prstGeom prst="rect">
             <a:avLst/>
@@ -32390,7 +32490,7 @@
         <p:spPr>
           <a:xfrm>
             <a:off x="548640" y="3063240"/>
-            <a:ext cx="108360" cy="108360"/>
+            <a:ext cx="108000" cy="108000"/>
           </a:xfrm>
           <a:prstGeom prst="rect">
             <a:avLst/>
@@ -32431,7 +32531,7 @@
         <p:spPr>
           <a:xfrm>
             <a:off x="914400" y="2926080"/>
-            <a:ext cx="10514160" cy="424800"/>
+            <a:ext cx="10513800" cy="424800"/>
           </a:xfrm>
           <a:prstGeom prst="rect">
             <a:avLst/>
@@ -32482,7 +32582,7 @@
         <p:spPr>
           <a:xfrm>
             <a:off x="548640" y="4160520"/>
-            <a:ext cx="108360" cy="108360"/>
+            <a:ext cx="108000" cy="108000"/>
           </a:xfrm>
           <a:prstGeom prst="rect">
             <a:avLst/>
@@ -32523,7 +32623,7 @@
         <p:spPr>
           <a:xfrm>
             <a:off x="914400" y="4023360"/>
-            <a:ext cx="10514160" cy="424800"/>
+            <a:ext cx="10513800" cy="424800"/>
           </a:xfrm>
           <a:prstGeom prst="rect">
             <a:avLst/>
@@ -32574,7 +32674,7 @@
         <p:spPr>
           <a:xfrm>
             <a:off x="548640" y="5257800"/>
-            <a:ext cx="108360" cy="108360"/>
+            <a:ext cx="108000" cy="108000"/>
           </a:xfrm>
           <a:prstGeom prst="rect">
             <a:avLst/>
@@ -32615,7 +32715,7 @@
         <p:spPr>
           <a:xfrm>
             <a:off x="914400" y="5120640"/>
-            <a:ext cx="10514160" cy="759960"/>
+            <a:ext cx="10513800" cy="759960"/>
           </a:xfrm>
           <a:prstGeom prst="rect">
             <a:avLst/>
@@ -32703,7 +32803,7 @@
         <p:spPr>
           <a:xfrm>
             <a:off x="0" y="0"/>
-            <a:ext cx="4113360" cy="6856560"/>
+            <a:ext cx="4113000" cy="6856200"/>
           </a:xfrm>
           <a:prstGeom prst="rect">
             <a:avLst/>
@@ -32744,7 +32844,7 @@
         <p:spPr>
           <a:xfrm>
             <a:off x="950040" y="2560320"/>
-            <a:ext cx="2212920" cy="1918080"/>
+            <a:ext cx="2212560" cy="1918080"/>
           </a:xfrm>
           <a:prstGeom prst="rect">
             <a:avLst/>
@@ -32795,7 +32895,7 @@
         <p:spPr>
           <a:xfrm>
             <a:off x="4114800" y="1371600"/>
-            <a:ext cx="71640" cy="4113360"/>
+            <a:ext cx="71280" cy="4113000"/>
           </a:xfrm>
           <a:prstGeom prst="rect">
             <a:avLst/>
@@ -32836,7 +32936,7 @@
         <p:spPr>
           <a:xfrm>
             <a:off x="4754880" y="2377440"/>
-            <a:ext cx="6856560" cy="759960"/>
+            <a:ext cx="6856200" cy="759960"/>
           </a:xfrm>
           <a:prstGeom prst="rect">
             <a:avLst/>
@@ -32887,7 +32987,7 @@
         <p:spPr>
           <a:xfrm>
             <a:off x="4754880" y="3840480"/>
-            <a:ext cx="6856560" cy="394560"/>
+            <a:ext cx="6856200" cy="394560"/>
           </a:xfrm>
           <a:prstGeom prst="rect">
             <a:avLst/>
@@ -32975,7 +33075,7 @@
         <p:spPr>
           <a:xfrm>
             <a:off x="0" y="0"/>
-            <a:ext cx="12190320" cy="135720"/>
+            <a:ext cx="12189960" cy="135360"/>
           </a:xfrm>
           <a:prstGeom prst="rect">
             <a:avLst/>
@@ -33016,7 +33116,7 @@
         <p:spPr>
           <a:xfrm>
             <a:off x="427680" y="1738800"/>
-            <a:ext cx="11275920" cy="943200"/>
+            <a:ext cx="11275560" cy="943200"/>
           </a:xfrm>
           <a:prstGeom prst="rect">
             <a:avLst/>
@@ -33067,7 +33167,7 @@
         <p:spPr>
           <a:xfrm>
             <a:off x="4235040" y="3293280"/>
-            <a:ext cx="3660840" cy="455400"/>
+            <a:ext cx="3660480" cy="455400"/>
           </a:xfrm>
           <a:prstGeom prst="rect">
             <a:avLst/>
@@ -33206,7 +33306,7 @@
         <p:spPr>
           <a:xfrm>
             <a:off x="4240440" y="457200"/>
-            <a:ext cx="3709440" cy="699120"/>
+            <a:ext cx="3709080" cy="699120"/>
           </a:xfrm>
           <a:prstGeom prst="rect">
             <a:avLst/>
@@ -33257,7 +33357,7 @@
         <p:spPr>
           <a:xfrm>
             <a:off x="868680" y="1965960"/>
-            <a:ext cx="3839040" cy="3656160"/>
+            <a:ext cx="3838680" cy="3655800"/>
           </a:xfrm>
           <a:prstGeom prst="roundRect">
             <a:avLst>
@@ -33300,7 +33400,7 @@
         <p:spPr>
           <a:xfrm>
             <a:off x="731520" y="1828800"/>
-            <a:ext cx="3839040" cy="3656160"/>
+            <a:ext cx="3838680" cy="3655800"/>
           </a:xfrm>
           <a:prstGeom prst="roundRect">
             <a:avLst>
@@ -33343,7 +33443,7 @@
         <p:spPr>
           <a:xfrm>
             <a:off x="1005840" y="2103120"/>
-            <a:ext cx="730080" cy="108360"/>
+            <a:ext cx="729720" cy="108000"/>
           </a:xfrm>
           <a:prstGeom prst="rect">
             <a:avLst/>
@@ -33384,7 +33484,7 @@
         <p:spPr>
           <a:xfrm>
             <a:off x="1100880" y="2377440"/>
-            <a:ext cx="722520" cy="577080"/>
+            <a:ext cx="722160" cy="577080"/>
           </a:xfrm>
           <a:prstGeom prst="rect">
             <a:avLst/>
@@ -33435,7 +33535,7 @@
         <p:spPr>
           <a:xfrm>
             <a:off x="1005840" y="3200400"/>
-            <a:ext cx="3290400" cy="394560"/>
+            <a:ext cx="3290040" cy="394560"/>
           </a:xfrm>
           <a:prstGeom prst="rect">
             <a:avLst/>
@@ -33486,7 +33586,7 @@
         <p:spPr>
           <a:xfrm>
             <a:off x="1005840" y="4206240"/>
-            <a:ext cx="3290400" cy="576360"/>
+            <a:ext cx="3290040" cy="576360"/>
           </a:xfrm>
           <a:prstGeom prst="rect">
             <a:avLst/>
@@ -33537,7 +33637,7 @@
         <p:spPr>
           <a:xfrm>
             <a:off x="4251960" y="2331720"/>
-            <a:ext cx="3839040" cy="3656160"/>
+            <a:ext cx="3838680" cy="3655800"/>
           </a:xfrm>
           <a:prstGeom prst="roundRect">
             <a:avLst>
@@ -33580,7 +33680,7 @@
         <p:spPr>
           <a:xfrm>
             <a:off x="4114800" y="2194560"/>
-            <a:ext cx="3839040" cy="3656160"/>
+            <a:ext cx="3838680" cy="3655800"/>
           </a:xfrm>
           <a:prstGeom prst="roundRect">
             <a:avLst>
@@ -33623,7 +33723,7 @@
         <p:spPr>
           <a:xfrm>
             <a:off x="4389120" y="2468880"/>
-            <a:ext cx="730080" cy="108360"/>
+            <a:ext cx="729720" cy="108000"/>
           </a:xfrm>
           <a:prstGeom prst="rect">
             <a:avLst/>
@@ -33664,7 +33764,7 @@
         <p:spPr>
           <a:xfrm>
             <a:off x="4484160" y="2743200"/>
-            <a:ext cx="722520" cy="577080"/>
+            <a:ext cx="722160" cy="577080"/>
           </a:xfrm>
           <a:prstGeom prst="rect">
             <a:avLst/>
@@ -33715,7 +33815,7 @@
         <p:spPr>
           <a:xfrm>
             <a:off x="4389120" y="3566160"/>
-            <a:ext cx="3290400" cy="394560"/>
+            <a:ext cx="3290040" cy="394560"/>
           </a:xfrm>
           <a:prstGeom prst="rect">
             <a:avLst/>
@@ -33766,7 +33866,7 @@
         <p:spPr>
           <a:xfrm>
             <a:off x="4389120" y="4572000"/>
-            <a:ext cx="3290400" cy="576360"/>
+            <a:ext cx="3290040" cy="576360"/>
           </a:xfrm>
           <a:prstGeom prst="rect">
             <a:avLst/>
@@ -33837,7 +33937,7 @@
         <p:spPr>
           <a:xfrm>
             <a:off x="7635240" y="1783080"/>
-            <a:ext cx="3839040" cy="3656160"/>
+            <a:ext cx="3838680" cy="3655800"/>
           </a:xfrm>
           <a:prstGeom prst="roundRect">
             <a:avLst>
@@ -33880,7 +33980,7 @@
         <p:spPr>
           <a:xfrm>
             <a:off x="7498080" y="1645920"/>
-            <a:ext cx="3839040" cy="3656160"/>
+            <a:ext cx="3838680" cy="3655800"/>
           </a:xfrm>
           <a:prstGeom prst="roundRect">
             <a:avLst>
@@ -33923,7 +34023,7 @@
         <p:spPr>
           <a:xfrm>
             <a:off x="7772400" y="1920240"/>
-            <a:ext cx="730080" cy="108360"/>
+            <a:ext cx="729720" cy="108000"/>
           </a:xfrm>
           <a:prstGeom prst="rect">
             <a:avLst/>
@@ -33964,7 +34064,7 @@
         <p:spPr>
           <a:xfrm>
             <a:off x="7867440" y="2194560"/>
-            <a:ext cx="722520" cy="577080"/>
+            <a:ext cx="722160" cy="577080"/>
           </a:xfrm>
           <a:prstGeom prst="rect">
             <a:avLst/>
@@ -34015,7 +34115,7 @@
         <p:spPr>
           <a:xfrm>
             <a:off x="7772400" y="3017520"/>
-            <a:ext cx="3290400" cy="394560"/>
+            <a:ext cx="3290040" cy="394560"/>
           </a:xfrm>
           <a:prstGeom prst="rect">
             <a:avLst/>
@@ -34066,7 +34166,7 @@
         <p:spPr>
           <a:xfrm>
             <a:off x="7772400" y="4023360"/>
-            <a:ext cx="3290400" cy="576360"/>
+            <a:ext cx="3290040" cy="576360"/>
           </a:xfrm>
           <a:prstGeom prst="rect">
             <a:avLst/>
@@ -34154,7 +34254,7 @@
         <p:spPr>
           <a:xfrm>
             <a:off x="2989800" y="365760"/>
-            <a:ext cx="6210360" cy="638280"/>
+            <a:ext cx="6210000" cy="638280"/>
           </a:xfrm>
           <a:prstGeom prst="rect">
             <a:avLst/>
@@ -34205,7 +34305,7 @@
         <p:spPr>
           <a:xfrm>
             <a:off x="457200" y="1234440"/>
-            <a:ext cx="2284560" cy="53280"/>
+            <a:ext cx="2284200" cy="52920"/>
           </a:xfrm>
           <a:prstGeom prst="rect">
             <a:avLst/>
@@ -34246,7 +34346,7 @@
         <p:spPr>
           <a:xfrm>
             <a:off x="457200" y="1645920"/>
-            <a:ext cx="5302080" cy="4570560"/>
+            <a:ext cx="5301720" cy="4570200"/>
           </a:xfrm>
           <a:prstGeom prst="roundRect">
             <a:avLst>
@@ -34289,7 +34389,7 @@
         <p:spPr>
           <a:xfrm>
             <a:off x="1850040" y="1920240"/>
-            <a:ext cx="2516400" cy="394560"/>
+            <a:ext cx="2516040" cy="394560"/>
           </a:xfrm>
           <a:prstGeom prst="rect">
             <a:avLst/>
@@ -34340,7 +34440,7 @@
         <p:spPr>
           <a:xfrm>
             <a:off x="731520" y="2560320"/>
-            <a:ext cx="4753440" cy="333000"/>
+            <a:ext cx="4753080" cy="333000"/>
           </a:xfrm>
           <a:prstGeom prst="rect">
             <a:avLst/>
@@ -34401,7 +34501,7 @@
         <p:spPr>
           <a:xfrm>
             <a:off x="731520" y="3383280"/>
-            <a:ext cx="4753440" cy="333000"/>
+            <a:ext cx="4753080" cy="333000"/>
           </a:xfrm>
           <a:prstGeom prst="rect">
             <a:avLst/>
@@ -34462,7 +34562,7 @@
         <p:spPr>
           <a:xfrm>
             <a:off x="731520" y="4206240"/>
-            <a:ext cx="4753440" cy="333000"/>
+            <a:ext cx="4753080" cy="333000"/>
           </a:xfrm>
           <a:prstGeom prst="rect">
             <a:avLst/>
@@ -34523,7 +34623,7 @@
         <p:spPr>
           <a:xfrm>
             <a:off x="731520" y="5029200"/>
-            <a:ext cx="4753440" cy="333000"/>
+            <a:ext cx="4753080" cy="333000"/>
           </a:xfrm>
           <a:prstGeom prst="rect">
             <a:avLst/>
@@ -34584,7 +34684,7 @@
         <p:spPr>
           <a:xfrm>
             <a:off x="6400800" y="1645920"/>
-            <a:ext cx="5302080" cy="4570560"/>
+            <a:ext cx="5301720" cy="4570200"/>
           </a:xfrm>
           <a:prstGeom prst="roundRect">
             <a:avLst>
@@ -34627,7 +34727,7 @@
         <p:spPr>
           <a:xfrm>
             <a:off x="7907040" y="1920240"/>
-            <a:ext cx="2289240" cy="394560"/>
+            <a:ext cx="2288880" cy="394560"/>
           </a:xfrm>
           <a:prstGeom prst="rect">
             <a:avLst/>
@@ -34678,7 +34778,7 @@
         <p:spPr>
           <a:xfrm>
             <a:off x="6675120" y="2560320"/>
-            <a:ext cx="4753440" cy="333000"/>
+            <a:ext cx="4753080" cy="333000"/>
           </a:xfrm>
           <a:prstGeom prst="rect">
             <a:avLst/>
@@ -34739,7 +34839,7 @@
         <p:spPr>
           <a:xfrm>
             <a:off x="6675120" y="3383280"/>
-            <a:ext cx="4753440" cy="333000"/>
+            <a:ext cx="4753080" cy="333000"/>
           </a:xfrm>
           <a:prstGeom prst="rect">
             <a:avLst/>
@@ -34800,7 +34900,7 @@
         <p:spPr>
           <a:xfrm>
             <a:off x="6675120" y="4206240"/>
-            <a:ext cx="4753440" cy="333000"/>
+            <a:ext cx="4753080" cy="333000"/>
           </a:xfrm>
           <a:prstGeom prst="rect">
             <a:avLst/>
@@ -34861,7 +34961,7 @@
         <p:spPr>
           <a:xfrm>
             <a:off x="6675120" y="5029200"/>
-            <a:ext cx="4753440" cy="333000"/>
+            <a:ext cx="4753080" cy="333000"/>
           </a:xfrm>
           <a:prstGeom prst="rect">
             <a:avLst/>
@@ -34959,7 +35059,7 @@
         <p:spPr>
           <a:xfrm>
             <a:off x="759960" y="1005840"/>
-            <a:ext cx="1222560" cy="3137760"/>
+            <a:ext cx="1222200" cy="3137760"/>
           </a:xfrm>
           <a:prstGeom prst="rect">
             <a:avLst/>
@@ -35010,7 +35110,7 @@
         <p:spPr>
           <a:xfrm>
             <a:off x="914760" y="2194560"/>
-            <a:ext cx="108360" cy="2284560"/>
+            <a:ext cx="108000" cy="2284200"/>
           </a:xfrm>
           <a:prstGeom prst="rect">
             <a:avLst/>
@@ -35051,7 +35151,7 @@
         <p:spPr>
           <a:xfrm>
             <a:off x="1829160" y="2468880"/>
-            <a:ext cx="9599760" cy="1551960"/>
+            <a:ext cx="9599400" cy="1551960"/>
           </a:xfrm>
           <a:prstGeom prst="rect">
             <a:avLst/>
@@ -35102,7 +35202,7 @@
         <p:spPr>
           <a:xfrm>
             <a:off x="5288400" y="4937760"/>
-            <a:ext cx="1766520" cy="363960"/>
+            <a:ext cx="1766160" cy="363960"/>
           </a:xfrm>
           <a:prstGeom prst="rect">
             <a:avLst/>
@@ -35190,7 +35290,7 @@
         <p:spPr>
           <a:xfrm>
             <a:off x="3222360" y="365760"/>
-            <a:ext cx="5745600" cy="638280"/>
+            <a:ext cx="5745240" cy="638280"/>
           </a:xfrm>
           <a:prstGeom prst="rect">
             <a:avLst/>
@@ -35241,7 +35341,7 @@
         <p:spPr>
           <a:xfrm>
             <a:off x="458280" y="2468880"/>
-            <a:ext cx="2284560" cy="53280"/>
+            <a:ext cx="2284200" cy="52920"/>
           </a:xfrm>
           <a:prstGeom prst="rect">
             <a:avLst/>
@@ -35282,7 +35382,7 @@
         <p:spPr>
           <a:xfrm>
             <a:off x="580680" y="2775960"/>
-            <a:ext cx="2313720" cy="1186920"/>
+            <a:ext cx="2313360" cy="1186920"/>
           </a:xfrm>
           <a:prstGeom prst="rect">
             <a:avLst/>
@@ -35333,7 +35433,7 @@
         <p:spPr>
           <a:xfrm>
             <a:off x="458280" y="4330440"/>
-            <a:ext cx="2558880" cy="333000"/>
+            <a:ext cx="2558520" cy="333000"/>
           </a:xfrm>
           <a:prstGeom prst="rect">
             <a:avLst/>
@@ -35384,7 +35484,7 @@
         <p:spPr>
           <a:xfrm>
             <a:off x="3506760" y="2775960"/>
-            <a:ext cx="2313720" cy="1186920"/>
+            <a:ext cx="2313360" cy="1186920"/>
           </a:xfrm>
           <a:prstGeom prst="rect">
             <a:avLst/>
@@ -35435,7 +35535,7 @@
         <p:spPr>
           <a:xfrm>
             <a:off x="3384360" y="4330440"/>
-            <a:ext cx="2558880" cy="333000"/>
+            <a:ext cx="2558520" cy="333000"/>
           </a:xfrm>
           <a:prstGeom prst="rect">
             <a:avLst/>
@@ -35486,7 +35586,7 @@
         <p:spPr>
           <a:xfrm>
             <a:off x="6432840" y="2775960"/>
-            <a:ext cx="2313720" cy="1186920"/>
+            <a:ext cx="2313360" cy="1186920"/>
           </a:xfrm>
           <a:prstGeom prst="rect">
             <a:avLst/>
@@ -35537,7 +35637,7 @@
         <p:spPr>
           <a:xfrm>
             <a:off x="6310440" y="4330440"/>
-            <a:ext cx="2558880" cy="333000"/>
+            <a:ext cx="2558520" cy="333000"/>
           </a:xfrm>
           <a:prstGeom prst="rect">
             <a:avLst/>
@@ -35588,7 +35688,7 @@
         <p:spPr>
           <a:xfrm>
             <a:off x="9358920" y="2775960"/>
-            <a:ext cx="2313720" cy="1186920"/>
+            <a:ext cx="2313360" cy="1186920"/>
           </a:xfrm>
           <a:prstGeom prst="rect">
             <a:avLst/>
@@ -35639,7 +35739,7 @@
         <p:spPr>
           <a:xfrm>
             <a:off x="9236520" y="4330440"/>
-            <a:ext cx="2558880" cy="333000"/>
+            <a:ext cx="2558520" cy="333000"/>
           </a:xfrm>
           <a:prstGeom prst="rect">
             <a:avLst/>

--- a/cisco-workshop-slides.pptx
+++ b/cisco-workshop-slides.pptx
@@ -20239,6 +20239,10 @@
           </a:effectRef>
           <a:fontRef idx="minor"/>
         </p:style>
+        <p:txBody>
+          <a:bodyPr/>
+          <a:p/>
+        </p:txBody>
       </p:sp>
       <p:sp>
         <p:nvSpPr>
@@ -20344,6 +20348,10 @@
           </a:effectRef>
           <a:fontRef idx="minor"/>
         </p:style>
+        <p:txBody>
+          <a:bodyPr/>
+          <a:p/>
+        </p:txBody>
       </p:sp>
       <p:sp>
         <p:nvSpPr>
@@ -20687,7 +20695,7 @@
                 <a:latin typeface="Inter"/>
                 <a:ea typeface="DejaVu Sans"/>
               </a:rPr>
-              <a:t>Take inspiration from what we have in in .github/prompts/ or .github/skills/</a:t>
+              <a:t>Take inspiration from what we have in .github/prompts/ or .github/skills/</a:t>
             </a:r>
             <a:endParaRPr b="0" lang="en-US" sz="1800" spc="-1" strike="noStrike">
               <a:latin typeface="Arial"/>
@@ -20809,6 +20817,10 @@
           </a:effectRef>
           <a:fontRef idx="minor"/>
         </p:style>
+        <p:txBody>
+          <a:bodyPr/>
+          <a:p/>
+        </p:txBody>
       </p:sp>
       <p:sp>
         <p:nvSpPr>
